--- a/amp_llm_v3/standalone modules/agent_annotate/docs/Agent_Annotate_Architecture.pptx
+++ b/amp_llm_v3/standalone modules/agent_annotate/docs/Agent_Annotate_Architecture.pptx
@@ -14,6 +14,7 @@
     <p:sldId id="262" r:id="rId13"/>
     <p:sldId id="263" r:id="rId14"/>
     <p:sldId id="264" r:id="rId15"/>
+    <p:sldId id="265" r:id="rId16"/>
   </p:sldIdLst>
   <p:sldSz cx="12191695" cy="6858000" type="screen4x3"/>
   <p:notesSz cx="6858000" cy="9144000"/>
@@ -3244,6 +3245,695 @@
 </p:sld>
 </file>
 
+<file path=ppt/slides/slide10.xml><?xml version="1.0" encoding="utf-8"?>
+<p:sld xmlns:a="http://schemas.openxmlformats.org/drawingml/2006/main" xmlns:p="http://schemas.openxmlformats.org/presentationml/2006/main" xmlns:r="http://schemas.openxmlformats.org/officeDocument/2006/relationships">
+  <p:cSld>
+    <p:bg>
+      <p:bgPr>
+        <a:solidFill>
+          <a:srgbClr val="F5F7FA"/>
+        </a:solidFill>
+        <a:effectLst/>
+      </p:bgPr>
+    </p:bg>
+    <p:spTree>
+      <p:nvGrpSpPr>
+        <p:cNvPr id="1" name=""/>
+        <p:cNvGrpSpPr/>
+        <p:nvPr/>
+      </p:nvGrpSpPr>
+      <p:grpSpPr/>
+      <p:sp>
+        <p:nvSpPr>
+          <p:cNvPr id="2" name="TextBox 1"/>
+          <p:cNvSpPr txBox="1"/>
+          <p:nvPr/>
+        </p:nvSpPr>
+        <p:spPr>
+          <a:xfrm>
+            <a:off x="457200" y="274320"/>
+            <a:ext cx="10972800" cy="731520"/>
+          </a:xfrm>
+          <a:prstGeom prst="rect">
+            <a:avLst/>
+          </a:prstGeom>
+          <a:noFill/>
+        </p:spPr>
+        <p:txBody>
+          <a:bodyPr wrap="square"/>
+          <a:lstStyle/>
+          <a:p>
+            <a:pPr algn="l">
+              <a:defRPr sz="3600" b="1">
+                <a:solidFill>
+                  <a:srgbClr val="2D2D3F"/>
+                </a:solidFill>
+              </a:defRPr>
+            </a:pPr>
+            <a:r>
+              <a:t>Technology Stack</a:t>
+            </a:r>
+          </a:p>
+        </p:txBody>
+      </p:sp>
+      <p:sp>
+        <p:nvSpPr>
+          <p:cNvPr id="3" name="Rounded Rectangle 2"/>
+          <p:cNvSpPr/>
+          <p:nvPr/>
+        </p:nvSpPr>
+        <p:spPr>
+          <a:xfrm>
+            <a:off x="365760" y="1188720"/>
+            <a:ext cx="3657600" cy="5029200"/>
+          </a:xfrm>
+          <a:prstGeom prst="roundRect">
+            <a:avLst/>
+          </a:prstGeom>
+          <a:solidFill>
+            <a:srgbClr val="FFFFFF"/>
+          </a:solidFill>
+          <a:ln w="25400">
+            <a:solidFill>
+              <a:srgbClr val="0096D6"/>
+            </a:solidFill>
+          </a:ln>
+          <a:effectLst/>
+        </p:spPr>
+        <p:style>
+          <a:lnRef idx="1">
+            <a:schemeClr val="accent1"/>
+          </a:lnRef>
+          <a:fillRef idx="3">
+            <a:schemeClr val="accent1"/>
+          </a:fillRef>
+          <a:effectRef idx="2">
+            <a:schemeClr val="accent1"/>
+          </a:effectRef>
+          <a:fontRef idx="minor">
+            <a:schemeClr val="lt1"/>
+          </a:fontRef>
+        </p:style>
+        <p:txBody>
+          <a:bodyPr rtlCol="0" anchor="ctr"/>
+          <a:lstStyle/>
+          <a:p>
+            <a:pPr algn="ctr"/>
+          </a:p>
+        </p:txBody>
+      </p:sp>
+      <p:sp>
+        <p:nvSpPr>
+          <p:cNvPr id="4" name="Rounded Rectangle 3"/>
+          <p:cNvSpPr/>
+          <p:nvPr/>
+        </p:nvSpPr>
+        <p:spPr>
+          <a:xfrm>
+            <a:off x="365760" y="1188720"/>
+            <a:ext cx="3657600" cy="548640"/>
+          </a:xfrm>
+          <a:prstGeom prst="roundRect">
+            <a:avLst/>
+          </a:prstGeom>
+          <a:solidFill>
+            <a:srgbClr val="0096D6"/>
+          </a:solidFill>
+          <a:ln>
+            <a:noFill/>
+          </a:ln>
+          <a:effectLst/>
+        </p:spPr>
+        <p:style>
+          <a:lnRef idx="1">
+            <a:schemeClr val="accent1"/>
+          </a:lnRef>
+          <a:fillRef idx="3">
+            <a:schemeClr val="accent1"/>
+          </a:fillRef>
+          <a:effectRef idx="2">
+            <a:schemeClr val="accent1"/>
+          </a:effectRef>
+          <a:fontRef idx="minor">
+            <a:schemeClr val="lt1"/>
+          </a:fontRef>
+        </p:style>
+        <p:txBody>
+          <a:bodyPr rtlCol="0" anchor="ctr" wrap="square"/>
+          <a:lstStyle/>
+          <a:p>
+            <a:pPr algn="ctr">
+              <a:spcBef>
+                <a:spcPts val="600"/>
+              </a:spcBef>
+              <a:defRPr sz="1700" b="1">
+                <a:solidFill>
+                  <a:srgbClr val="FFFFFF"/>
+                </a:solidFill>
+              </a:defRPr>
+            </a:pPr>
+            <a:r>
+              <a:t>LLM Models (Local)</a:t>
+            </a:r>
+          </a:p>
+        </p:txBody>
+      </p:sp>
+      <p:sp>
+        <p:nvSpPr>
+          <p:cNvPr id="5" name="TextBox 4"/>
+          <p:cNvSpPr txBox="1"/>
+          <p:nvPr/>
+        </p:nvSpPr>
+        <p:spPr>
+          <a:xfrm>
+            <a:off x="548640" y="1920240"/>
+            <a:ext cx="3291840" cy="4114800"/>
+          </a:xfrm>
+          <a:prstGeom prst="rect">
+            <a:avLst/>
+          </a:prstGeom>
+          <a:noFill/>
+        </p:spPr>
+        <p:txBody>
+          <a:bodyPr wrap="square"/>
+          <a:lstStyle/>
+          <a:p>
+            <a:pPr algn="l">
+              <a:defRPr sz="1300" b="0">
+                <a:solidFill>
+                  <a:srgbClr val="2D2D3F"/>
+                </a:solidFill>
+              </a:defRPr>
+            </a:pPr>
+            <a:r>
+              <a:t>qwen3:14b — Primary annotation + reconciliation</a:t>
+            </a:r>
+          </a:p>
+          <a:p>
+            <a:pPr>
+              <a:spcBef>
+                <a:spcPts val="1000"/>
+              </a:spcBef>
+              <a:defRPr sz="1300" b="0">
+                <a:solidFill>
+                  <a:srgbClr val="2D2D3F"/>
+                </a:solidFill>
+              </a:defRPr>
+            </a:pPr>
+            <a:r>
+              <a:t>gemma2:9b — Verifier (conservative)</a:t>
+            </a:r>
+          </a:p>
+          <a:p>
+            <a:pPr>
+              <a:spcBef>
+                <a:spcPts val="1000"/>
+              </a:spcBef>
+              <a:defRPr sz="1300" b="0">
+                <a:solidFill>
+                  <a:srgbClr val="2D2D3F"/>
+                </a:solidFill>
+              </a:defRPr>
+            </a:pPr>
+            <a:r>
+              <a:t>qwen2.5:7b — Verifier (evidence-strict)</a:t>
+            </a:r>
+          </a:p>
+          <a:p>
+            <a:pPr>
+              <a:spcBef>
+                <a:spcPts val="1000"/>
+              </a:spcBef>
+              <a:defRPr sz="1300" b="0">
+                <a:solidFill>
+                  <a:srgbClr val="2D2D3F"/>
+                </a:solidFill>
+              </a:defRPr>
+            </a:pPr>
+            <a:r>
+              <a:t>llama3.1:8b — Verifier (adversarial)</a:t>
+            </a:r>
+          </a:p>
+          <a:p>
+            <a:pPr>
+              <a:spcBef>
+                <a:spcPts val="1000"/>
+              </a:spcBef>
+              <a:defRPr sz="1300" b="0">
+                <a:solidFill>
+                  <a:srgbClr val="2D2D3F"/>
+                </a:solidFill>
+              </a:defRPr>
+            </a:pPr>
+            <a:r>
+              <a:t>All models run locally via Ollama</a:t>
+            </a:r>
+          </a:p>
+          <a:p>
+            <a:pPr>
+              <a:spcBef>
+                <a:spcPts val="1000"/>
+              </a:spcBef>
+              <a:defRPr sz="1300" b="0">
+                <a:solidFill>
+                  <a:srgbClr val="2D2D3F"/>
+                </a:solidFill>
+              </a:defRPr>
+            </a:pPr>
+            <a:r>
+              <a:t>No cloud API calls — full data privacy</a:t>
+            </a:r>
+          </a:p>
+        </p:txBody>
+      </p:sp>
+      <p:sp>
+        <p:nvSpPr>
+          <p:cNvPr id="6" name="Rounded Rectangle 5"/>
+          <p:cNvSpPr/>
+          <p:nvPr/>
+        </p:nvSpPr>
+        <p:spPr>
+          <a:xfrm>
+            <a:off x="4206240" y="1188720"/>
+            <a:ext cx="3657600" cy="5029200"/>
+          </a:xfrm>
+          <a:prstGeom prst="roundRect">
+            <a:avLst/>
+          </a:prstGeom>
+          <a:solidFill>
+            <a:srgbClr val="FFFFFF"/>
+          </a:solidFill>
+          <a:ln w="25400">
+            <a:solidFill>
+              <a:srgbClr val="00C9A7"/>
+            </a:solidFill>
+          </a:ln>
+          <a:effectLst/>
+        </p:spPr>
+        <p:style>
+          <a:lnRef idx="1">
+            <a:schemeClr val="accent1"/>
+          </a:lnRef>
+          <a:fillRef idx="3">
+            <a:schemeClr val="accent1"/>
+          </a:fillRef>
+          <a:effectRef idx="2">
+            <a:schemeClr val="accent1"/>
+          </a:effectRef>
+          <a:fontRef idx="minor">
+            <a:schemeClr val="lt1"/>
+          </a:fontRef>
+        </p:style>
+        <p:txBody>
+          <a:bodyPr rtlCol="0" anchor="ctr"/>
+          <a:lstStyle/>
+          <a:p>
+            <a:pPr algn="ctr"/>
+          </a:p>
+        </p:txBody>
+      </p:sp>
+      <p:sp>
+        <p:nvSpPr>
+          <p:cNvPr id="7" name="Rounded Rectangle 6"/>
+          <p:cNvSpPr/>
+          <p:nvPr/>
+        </p:nvSpPr>
+        <p:spPr>
+          <a:xfrm>
+            <a:off x="4206240" y="1188720"/>
+            <a:ext cx="3657600" cy="548640"/>
+          </a:xfrm>
+          <a:prstGeom prst="roundRect">
+            <a:avLst/>
+          </a:prstGeom>
+          <a:solidFill>
+            <a:srgbClr val="00C9A7"/>
+          </a:solidFill>
+          <a:ln>
+            <a:noFill/>
+          </a:ln>
+          <a:effectLst/>
+        </p:spPr>
+        <p:style>
+          <a:lnRef idx="1">
+            <a:schemeClr val="accent1"/>
+          </a:lnRef>
+          <a:fillRef idx="3">
+            <a:schemeClr val="accent1"/>
+          </a:fillRef>
+          <a:effectRef idx="2">
+            <a:schemeClr val="accent1"/>
+          </a:effectRef>
+          <a:fontRef idx="minor">
+            <a:schemeClr val="lt1"/>
+          </a:fontRef>
+        </p:style>
+        <p:txBody>
+          <a:bodyPr rtlCol="0" anchor="ctr" wrap="square"/>
+          <a:lstStyle/>
+          <a:p>
+            <a:pPr algn="ctr">
+              <a:spcBef>
+                <a:spcPts val="600"/>
+              </a:spcBef>
+              <a:defRPr sz="1700" b="1">
+                <a:solidFill>
+                  <a:srgbClr val="FFFFFF"/>
+                </a:solidFill>
+              </a:defRPr>
+            </a:pPr>
+            <a:r>
+              <a:t>Infrastructure</a:t>
+            </a:r>
+          </a:p>
+        </p:txBody>
+      </p:sp>
+      <p:sp>
+        <p:nvSpPr>
+          <p:cNvPr id="8" name="TextBox 7"/>
+          <p:cNvSpPr txBox="1"/>
+          <p:nvPr/>
+        </p:nvSpPr>
+        <p:spPr>
+          <a:xfrm>
+            <a:off x="4389120" y="1920240"/>
+            <a:ext cx="3291840" cy="4114800"/>
+          </a:xfrm>
+          <a:prstGeom prst="rect">
+            <a:avLst/>
+          </a:prstGeom>
+          <a:noFill/>
+        </p:spPr>
+        <p:txBody>
+          <a:bodyPr wrap="square"/>
+          <a:lstStyle/>
+          <a:p>
+            <a:pPr algn="l">
+              <a:defRPr sz="1300" b="0">
+                <a:solidFill>
+                  <a:srgbClr val="2D2D3F"/>
+                </a:solidFill>
+              </a:defRPr>
+            </a:pPr>
+            <a:r>
+              <a:t>Python + FastAPI (async web framework)</a:t>
+            </a:r>
+          </a:p>
+          <a:p>
+            <a:pPr>
+              <a:spcBef>
+                <a:spcPts val="1000"/>
+              </a:spcBef>
+              <a:defRPr sz="1300" b="0">
+                <a:solidFill>
+                  <a:srgbClr val="2D2D3F"/>
+                </a:solidFill>
+              </a:defRPr>
+            </a:pPr>
+            <a:r>
+              <a:t>Ollama (local LLM inference server)</a:t>
+            </a:r>
+          </a:p>
+          <a:p>
+            <a:pPr>
+              <a:spcBef>
+                <a:spcPts val="1000"/>
+              </a:spcBef>
+              <a:defRPr sz="1300" b="0">
+                <a:solidFill>
+                  <a:srgbClr val="2D2D3F"/>
+                </a:solidFill>
+              </a:defRPr>
+            </a:pPr>
+            <a:r>
+              <a:t>Mac Mini M4 (16GB) or Server (240GB+)</a:t>
+            </a:r>
+          </a:p>
+          <a:p>
+            <a:pPr>
+              <a:spcBef>
+                <a:spcPts val="1000"/>
+              </a:spcBef>
+              <a:defRPr sz="1300" b="0">
+                <a:solidFill>
+                  <a:srgbClr val="2D2D3F"/>
+                </a:solidFill>
+              </a:defRPr>
+            </a:pPr>
+            <a:r>
+              <a:t>LaunchDaemon services (boot on startup)</a:t>
+            </a:r>
+          </a:p>
+          <a:p>
+            <a:pPr>
+              <a:spcBef>
+                <a:spcPts val="1000"/>
+              </a:spcBef>
+              <a:defRPr sz="1300" b="0">
+                <a:solidFill>
+                  <a:srgbClr val="2D2D3F"/>
+                </a:solidFill>
+              </a:defRPr>
+            </a:pPr>
+            <a:r>
+              <a:t>Git-based auto-updater (30s polling)</a:t>
+            </a:r>
+          </a:p>
+          <a:p>
+            <a:pPr>
+              <a:spcBef>
+                <a:spcPts val="1000"/>
+              </a:spcBef>
+              <a:defRPr sz="1300" b="0">
+                <a:solidFill>
+                  <a:srgbClr val="2D2D3F"/>
+                </a:solidFill>
+              </a:defRPr>
+            </a:pPr>
+            <a:r>
+              <a:t>Prod: port 8005 | Dev: port 9005</a:t>
+            </a:r>
+          </a:p>
+        </p:txBody>
+      </p:sp>
+      <p:sp>
+        <p:nvSpPr>
+          <p:cNvPr id="9" name="Rounded Rectangle 8"/>
+          <p:cNvSpPr/>
+          <p:nvPr/>
+        </p:nvSpPr>
+        <p:spPr>
+          <a:xfrm>
+            <a:off x="8046720" y="1188720"/>
+            <a:ext cx="3657600" cy="5029200"/>
+          </a:xfrm>
+          <a:prstGeom prst="roundRect">
+            <a:avLst/>
+          </a:prstGeom>
+          <a:solidFill>
+            <a:srgbClr val="FFFFFF"/>
+          </a:solidFill>
+          <a:ln w="25400">
+            <a:solidFill>
+              <a:srgbClr val="FF8C42"/>
+            </a:solidFill>
+          </a:ln>
+          <a:effectLst/>
+        </p:spPr>
+        <p:style>
+          <a:lnRef idx="1">
+            <a:schemeClr val="accent1"/>
+          </a:lnRef>
+          <a:fillRef idx="3">
+            <a:schemeClr val="accent1"/>
+          </a:fillRef>
+          <a:effectRef idx="2">
+            <a:schemeClr val="accent1"/>
+          </a:effectRef>
+          <a:fontRef idx="minor">
+            <a:schemeClr val="lt1"/>
+          </a:fontRef>
+        </p:style>
+        <p:txBody>
+          <a:bodyPr rtlCol="0" anchor="ctr"/>
+          <a:lstStyle/>
+          <a:p>
+            <a:pPr algn="ctr"/>
+          </a:p>
+        </p:txBody>
+      </p:sp>
+      <p:sp>
+        <p:nvSpPr>
+          <p:cNvPr id="10" name="Rounded Rectangle 9"/>
+          <p:cNvSpPr/>
+          <p:nvPr/>
+        </p:nvSpPr>
+        <p:spPr>
+          <a:xfrm>
+            <a:off x="8046720" y="1188720"/>
+            <a:ext cx="3657600" cy="548640"/>
+          </a:xfrm>
+          <a:prstGeom prst="roundRect">
+            <a:avLst/>
+          </a:prstGeom>
+          <a:solidFill>
+            <a:srgbClr val="FF8C42"/>
+          </a:solidFill>
+          <a:ln>
+            <a:noFill/>
+          </a:ln>
+          <a:effectLst/>
+        </p:spPr>
+        <p:style>
+          <a:lnRef idx="1">
+            <a:schemeClr val="accent1"/>
+          </a:lnRef>
+          <a:fillRef idx="3">
+            <a:schemeClr val="accent1"/>
+          </a:fillRef>
+          <a:effectRef idx="2">
+            <a:schemeClr val="accent1"/>
+          </a:effectRef>
+          <a:fontRef idx="minor">
+            <a:schemeClr val="lt1"/>
+          </a:fontRef>
+        </p:style>
+        <p:txBody>
+          <a:bodyPr rtlCol="0" anchor="ctr" wrap="square"/>
+          <a:lstStyle/>
+          <a:p>
+            <a:pPr algn="ctr">
+              <a:spcBef>
+                <a:spcPts val="600"/>
+              </a:spcBef>
+              <a:defRPr sz="1700" b="1">
+                <a:solidFill>
+                  <a:srgbClr val="FFFFFF"/>
+                </a:solidFill>
+              </a:defRPr>
+            </a:pPr>
+            <a:r>
+              <a:t>Data Pipeline</a:t>
+            </a:r>
+          </a:p>
+        </p:txBody>
+      </p:sp>
+      <p:sp>
+        <p:nvSpPr>
+          <p:cNvPr id="11" name="TextBox 10"/>
+          <p:cNvSpPr txBox="1"/>
+          <p:nvPr/>
+        </p:nvSpPr>
+        <p:spPr>
+          <a:xfrm>
+            <a:off x="8229600" y="1920240"/>
+            <a:ext cx="3291840" cy="4114800"/>
+          </a:xfrm>
+          <a:prstGeom prst="rect">
+            <a:avLst/>
+          </a:prstGeom>
+          <a:noFill/>
+        </p:spPr>
+        <p:txBody>
+          <a:bodyPr wrap="square"/>
+          <a:lstStyle/>
+          <a:p>
+            <a:pPr algn="l">
+              <a:defRPr sz="1300" b="0">
+                <a:solidFill>
+                  <a:srgbClr val="2D2D3F"/>
+                </a:solidFill>
+              </a:defRPr>
+            </a:pPr>
+            <a:r>
+              <a:t>15 async research agents (parallel HTTP)</a:t>
+            </a:r>
+          </a:p>
+          <a:p>
+            <a:pPr>
+              <a:spcBef>
+                <a:spcPts val="1000"/>
+              </a:spcBef>
+              <a:defRPr sz="1300" b="0">
+                <a:solidFill>
+                  <a:srgbClr val="2D2D3F"/>
+                </a:solidFill>
+              </a:defRPr>
+            </a:pPr>
+            <a:r>
+              <a:t>HTTPX async client with per-model timeouts</a:t>
+            </a:r>
+          </a:p>
+          <a:p>
+            <a:pPr>
+              <a:spcBef>
+                <a:spcPts val="1000"/>
+              </a:spcBef>
+              <a:defRPr sz="1300" b="0">
+                <a:solidFill>
+                  <a:srgbClr val="2D2D3F"/>
+                </a:solidFill>
+              </a:defRPr>
+            </a:pPr>
+            <a:r>
+              <a:t>Structured evidence dossier architecture</a:t>
+            </a:r>
+          </a:p>
+          <a:p>
+            <a:pPr>
+              <a:spcBef>
+                <a:spcPts val="1000"/>
+              </a:spcBef>
+              <a:defRPr sz="1300" b="0">
+                <a:solidFill>
+                  <a:srgbClr val="2D2D3F"/>
+                </a:solidFill>
+              </a:defRPr>
+            </a:pPr>
+            <a:r>
+              <a:t>Publication quality classification (v41)</a:t>
+            </a:r>
+          </a:p>
+          <a:p>
+            <a:pPr>
+              <a:spcBef>
+                <a:spcPts val="1000"/>
+              </a:spcBef>
+              <a:defRPr sz="1300" b="0">
+                <a:solidFill>
+                  <a:srgbClr val="2D2D3F"/>
+                </a:solidFill>
+              </a:defRPr>
+            </a:pPr>
+            <a:r>
+              <a:t>Efficacy vs safety keyword separation</a:t>
+            </a:r>
+          </a:p>
+          <a:p>
+            <a:pPr>
+              <a:spcBef>
+                <a:spcPts val="1000"/>
+              </a:spcBef>
+              <a:defRPr sz="1300" b="0">
+                <a:solidFill>
+                  <a:srgbClr val="2D2D3F"/>
+                </a:solidFill>
+              </a:defRPr>
+            </a:pPr>
+            <a:r>
+              <a:t>Full JSON audit trail per trial</a:t>
+            </a:r>
+          </a:p>
+        </p:txBody>
+      </p:sp>
+    </p:spTree>
+  </p:cSld>
+  <p:clrMapOvr>
+    <a:masterClrMapping/>
+  </p:clrMapOvr>
+</p:sld>
+</file>
+
 <file path=ppt/slides/slide2.xml><?xml version="1.0" encoding="utf-8"?>
 <p:sld xmlns:a="http://schemas.openxmlformats.org/drawingml/2006/main" xmlns:p="http://schemas.openxmlformats.org/presentationml/2006/main" xmlns:r="http://schemas.openxmlformats.org/officeDocument/2006/relationships">
   <p:cSld>
@@ -5501,21 +6191,326 @@
               </a:defRPr>
             </a:pPr>
             <a:r>
-              <a:t>Phase 2: Annotation Agents (1/3)</a:t>
-            </a:r>
-          </a:p>
-        </p:txBody>
-      </p:sp>
-      <p:sp>
-        <p:nvSpPr>
-          <p:cNvPr id="3" name="Rounded Rectangle 2"/>
+              <a:t>Deterministic-First Architecture</a:t>
+            </a:r>
+          </a:p>
+        </p:txBody>
+      </p:sp>
+      <p:sp>
+        <p:nvSpPr>
+          <p:cNvPr id="3" name="TextBox 2"/>
+          <p:cNvSpPr txBox="1"/>
+          <p:nvPr/>
+        </p:nvSpPr>
+        <p:spPr>
+          <a:xfrm>
+            <a:off x="457200" y="822960"/>
+            <a:ext cx="10972800" cy="457200"/>
+          </a:xfrm>
+          <a:prstGeom prst="rect">
+            <a:avLst/>
+          </a:prstGeom>
+          <a:noFill/>
+        </p:spPr>
+        <p:txBody>
+          <a:bodyPr wrap="square"/>
+          <a:lstStyle/>
+          <a:p>
+            <a:pPr algn="l">
+              <a:defRPr sz="1600" b="0">
+                <a:solidFill>
+                  <a:srgbClr val="A0A0A0"/>
+                </a:solidFill>
+              </a:defRPr>
+            </a:pPr>
+            <a:r>
+              <a:t>Known answers are resolved instantly from reference data — the LLM only handles genuinely ambiguous cases</a:t>
+            </a:r>
+          </a:p>
+        </p:txBody>
+      </p:sp>
+      <p:sp>
+        <p:nvSpPr>
+          <p:cNvPr id="4" name="Rounded Rectangle 3"/>
           <p:cNvSpPr/>
           <p:nvPr/>
         </p:nvSpPr>
         <p:spPr>
           <a:xfrm>
-            <a:off x="457200" y="1188720"/>
-            <a:ext cx="5486400" cy="5029200"/>
+            <a:off x="457200" y="1645920"/>
+            <a:ext cx="3200400" cy="1463040"/>
+          </a:xfrm>
+          <a:prstGeom prst="roundRect">
+            <a:avLst/>
+          </a:prstGeom>
+          <a:solidFill>
+            <a:srgbClr val="FFFFFF"/>
+          </a:solidFill>
+          <a:ln w="25400">
+            <a:solidFill>
+              <a:srgbClr val="00C9A7"/>
+            </a:solidFill>
+          </a:ln>
+          <a:effectLst/>
+        </p:spPr>
+        <p:style>
+          <a:lnRef idx="1">
+            <a:schemeClr val="accent1"/>
+          </a:lnRef>
+          <a:fillRef idx="3">
+            <a:schemeClr val="accent1"/>
+          </a:fillRef>
+          <a:effectRef idx="2">
+            <a:schemeClr val="accent1"/>
+          </a:effectRef>
+          <a:fontRef idx="minor">
+            <a:schemeClr val="lt1"/>
+          </a:fontRef>
+        </p:style>
+        <p:txBody>
+          <a:bodyPr rtlCol="0" anchor="ctr" wrap="square"/>
+          <a:lstStyle/>
+          <a:p>
+            <a:pPr algn="l">
+              <a:spcBef>
+                <a:spcPts val="800"/>
+              </a:spcBef>
+              <a:defRPr sz="1600" b="1">
+                <a:solidFill>
+                  <a:srgbClr val="00C9A7"/>
+                </a:solidFill>
+              </a:defRPr>
+            </a:pPr>
+            <a:r>
+              <a:t>Step 1: Reference Lookup</a:t>
+            </a:r>
+          </a:p>
+          <a:p>
+            <a:pPr>
+              <a:spcBef>
+                <a:spcPts val="400"/>
+              </a:spcBef>
+              <a:defRPr sz="1300" b="0">
+                <a:solidFill>
+                  <a:srgbClr val="2D2D3F"/>
+                </a:solidFill>
+              </a:defRPr>
+            </a:pPr>
+            <a:r>
+              <a:t>Match drug name against curated lists</a:t>
+            </a:r>
+          </a:p>
+          <a:p>
+            <a:pPr>
+              <a:spcBef>
+                <a:spcPts val="400"/>
+              </a:spcBef>
+              <a:defRPr sz="1300" b="0">
+                <a:solidFill>
+                  <a:srgbClr val="2D2D3F"/>
+                </a:solidFill>
+              </a:defRPr>
+            </a:pPr>
+            <a:r>
+              <a:t>Match against live database hits</a:t>
+            </a:r>
+          </a:p>
+          <a:p>
+            <a:pPr>
+              <a:spcBef>
+                <a:spcPts val="400"/>
+              </a:spcBef>
+              <a:defRPr sz="1300" b="1">
+                <a:solidFill>
+                  <a:srgbClr val="00C9A7"/>
+                </a:solidFill>
+              </a:defRPr>
+            </a:pPr>
+            <a:r>
+              <a:t>If matched → instant answer, skip LLM</a:t>
+            </a:r>
+          </a:p>
+        </p:txBody>
+      </p:sp>
+      <p:sp>
+        <p:nvSpPr>
+          <p:cNvPr id="5" name="TextBox 4"/>
+          <p:cNvSpPr txBox="1"/>
+          <p:nvPr/>
+        </p:nvSpPr>
+        <p:spPr>
+          <a:xfrm>
+            <a:off x="3749039" y="2103120"/>
+            <a:ext cx="457200" cy="457200"/>
+          </a:xfrm>
+          <a:prstGeom prst="rect">
+            <a:avLst/>
+          </a:prstGeom>
+          <a:noFill/>
+        </p:spPr>
+        <p:txBody>
+          <a:bodyPr wrap="square"/>
+          <a:lstStyle/>
+          <a:p>
+            <a:pPr algn="ctr">
+              <a:defRPr sz="2800" b="0">
+                <a:solidFill>
+                  <a:srgbClr val="A0A0A0"/>
+                </a:solidFill>
+              </a:defRPr>
+            </a:pPr>
+            <a:r>
+              <a:t>➜</a:t>
+            </a:r>
+          </a:p>
+        </p:txBody>
+      </p:sp>
+      <p:sp>
+        <p:nvSpPr>
+          <p:cNvPr id="6" name="Rounded Rectangle 5"/>
+          <p:cNvSpPr/>
+          <p:nvPr/>
+        </p:nvSpPr>
+        <p:spPr>
+          <a:xfrm>
+            <a:off x="4297680" y="1645920"/>
+            <a:ext cx="3200400" cy="1463040"/>
+          </a:xfrm>
+          <a:prstGeom prst="roundRect">
+            <a:avLst/>
+          </a:prstGeom>
+          <a:solidFill>
+            <a:srgbClr val="FFFFFF"/>
+          </a:solidFill>
+          <a:ln w="25400">
+            <a:solidFill>
+              <a:srgbClr val="FF8C42"/>
+            </a:solidFill>
+          </a:ln>
+          <a:effectLst/>
+        </p:spPr>
+        <p:style>
+          <a:lnRef idx="1">
+            <a:schemeClr val="accent1"/>
+          </a:lnRef>
+          <a:fillRef idx="3">
+            <a:schemeClr val="accent1"/>
+          </a:fillRef>
+          <a:effectRef idx="2">
+            <a:schemeClr val="accent1"/>
+          </a:effectRef>
+          <a:fontRef idx="minor">
+            <a:schemeClr val="lt1"/>
+          </a:fontRef>
+        </p:style>
+        <p:txBody>
+          <a:bodyPr rtlCol="0" anchor="ctr" wrap="square"/>
+          <a:lstStyle/>
+          <a:p>
+            <a:pPr algn="l">
+              <a:spcBef>
+                <a:spcPts val="800"/>
+              </a:spcBef>
+              <a:defRPr sz="1600" b="1">
+                <a:solidFill>
+                  <a:srgbClr val="FF8C42"/>
+                </a:solidFill>
+              </a:defRPr>
+            </a:pPr>
+            <a:r>
+              <a:t>Step 2: Structured Rules</a:t>
+            </a:r>
+          </a:p>
+          <a:p>
+            <a:pPr>
+              <a:spcBef>
+                <a:spcPts val="400"/>
+              </a:spcBef>
+              <a:defRPr sz="1300" b="0">
+                <a:solidFill>
+                  <a:srgbClr val="2D2D3F"/>
+                </a:solidFill>
+              </a:defRPr>
+            </a:pPr>
+            <a:r>
+              <a:t>Apply deterministic rules on extracted data</a:t>
+            </a:r>
+          </a:p>
+          <a:p>
+            <a:pPr>
+              <a:spcBef>
+                <a:spcPts val="400"/>
+              </a:spcBef>
+              <a:defRPr sz="1300" b="0">
+                <a:solidFill>
+                  <a:srgbClr val="2D2D3F"/>
+                </a:solidFill>
+              </a:defRPr>
+            </a:pPr>
+            <a:r>
+              <a:t>p-values, registry status, keywords</a:t>
+            </a:r>
+          </a:p>
+          <a:p>
+            <a:pPr>
+              <a:spcBef>
+                <a:spcPts val="400"/>
+              </a:spcBef>
+              <a:defRPr sz="1300" b="1">
+                <a:solidFill>
+                  <a:srgbClr val="FF8C42"/>
+                </a:solidFill>
+              </a:defRPr>
+            </a:pPr>
+            <a:r>
+              <a:t>If conclusive → answer, skip LLM</a:t>
+            </a:r>
+          </a:p>
+        </p:txBody>
+      </p:sp>
+      <p:sp>
+        <p:nvSpPr>
+          <p:cNvPr id="7" name="TextBox 6"/>
+          <p:cNvSpPr txBox="1"/>
+          <p:nvPr/>
+        </p:nvSpPr>
+        <p:spPr>
+          <a:xfrm>
+            <a:off x="7589520" y="2103120"/>
+            <a:ext cx="457200" cy="457200"/>
+          </a:xfrm>
+          <a:prstGeom prst="rect">
+            <a:avLst/>
+          </a:prstGeom>
+          <a:noFill/>
+        </p:spPr>
+        <p:txBody>
+          <a:bodyPr wrap="square"/>
+          <a:lstStyle/>
+          <a:p>
+            <a:pPr algn="ctr">
+              <a:defRPr sz="2800" b="0">
+                <a:solidFill>
+                  <a:srgbClr val="A0A0A0"/>
+                </a:solidFill>
+              </a:defRPr>
+            </a:pPr>
+            <a:r>
+              <a:t>➜</a:t>
+            </a:r>
+          </a:p>
+        </p:txBody>
+      </p:sp>
+      <p:sp>
+        <p:nvSpPr>
+          <p:cNvPr id="8" name="Rounded Rectangle 7"/>
+          <p:cNvSpPr/>
+          <p:nvPr/>
+        </p:nvSpPr>
+        <p:spPr>
+          <a:xfrm>
+            <a:off x="8138160" y="1645920"/>
+            <a:ext cx="3566160" cy="1463040"/>
           </a:xfrm>
           <a:prstGeom prst="roundRect">
             <a:avLst/>
@@ -5545,6 +6540,109 @@
           </a:fontRef>
         </p:style>
         <p:txBody>
+          <a:bodyPr rtlCol="0" anchor="ctr" wrap="square"/>
+          <a:lstStyle/>
+          <a:p>
+            <a:pPr algn="l">
+              <a:spcBef>
+                <a:spcPts val="800"/>
+              </a:spcBef>
+              <a:defRPr sz="1600" b="1">
+                <a:solidFill>
+                  <a:srgbClr val="0096D6"/>
+                </a:solidFill>
+              </a:defRPr>
+            </a:pPr>
+            <a:r>
+              <a:t>Step 3: LLM Reasoning</a:t>
+            </a:r>
+          </a:p>
+          <a:p>
+            <a:pPr>
+              <a:spcBef>
+                <a:spcPts val="400"/>
+              </a:spcBef>
+              <a:defRPr sz="1300" b="0">
+                <a:solidFill>
+                  <a:srgbClr val="2D2D3F"/>
+                </a:solidFill>
+              </a:defRPr>
+            </a:pPr>
+            <a:r>
+              <a:t>Only for genuinely ambiguous cases</a:t>
+            </a:r>
+          </a:p>
+          <a:p>
+            <a:pPr>
+              <a:spcBef>
+                <a:spcPts val="400"/>
+              </a:spcBef>
+              <a:defRPr sz="1300" b="0">
+                <a:solidFill>
+                  <a:srgbClr val="2D2D3F"/>
+                </a:solidFill>
+              </a:defRPr>
+            </a:pPr>
+            <a:r>
+              <a:t>Novel drugs, borderline evidence, edge cases</a:t>
+            </a:r>
+          </a:p>
+          <a:p>
+            <a:pPr>
+              <a:spcBef>
+                <a:spcPts val="400"/>
+              </a:spcBef>
+              <a:defRPr sz="1300" b="1">
+                <a:solidFill>
+                  <a:srgbClr val="0096D6"/>
+                </a:solidFill>
+              </a:defRPr>
+            </a:pPr>
+            <a:r>
+              <a:t>Multi-pass with structured prompts</a:t>
+            </a:r>
+          </a:p>
+        </p:txBody>
+      </p:sp>
+      <p:sp>
+        <p:nvSpPr>
+          <p:cNvPr id="9" name="Rounded Rectangle 8"/>
+          <p:cNvSpPr/>
+          <p:nvPr/>
+        </p:nvSpPr>
+        <p:spPr>
+          <a:xfrm>
+            <a:off x="457200" y="3474720"/>
+            <a:ext cx="11247120" cy="3017520"/>
+          </a:xfrm>
+          <a:prstGeom prst="roundRect">
+            <a:avLst/>
+          </a:prstGeom>
+          <a:solidFill>
+            <a:srgbClr val="FFFFFF"/>
+          </a:solidFill>
+          <a:ln w="12700">
+            <a:solidFill>
+              <a:srgbClr val="DDDDDD"/>
+            </a:solidFill>
+          </a:ln>
+          <a:effectLst/>
+        </p:spPr>
+        <p:style>
+          <a:lnRef idx="1">
+            <a:schemeClr val="accent1"/>
+          </a:lnRef>
+          <a:fillRef idx="3">
+            <a:schemeClr val="accent1"/>
+          </a:fillRef>
+          <a:effectRef idx="2">
+            <a:schemeClr val="accent1"/>
+          </a:effectRef>
+          <a:fontRef idx="minor">
+            <a:schemeClr val="lt1"/>
+          </a:fontRef>
+        </p:style>
+        <p:txBody>
           <a:bodyPr rtlCol="0" anchor="ctr"/>
           <a:lstStyle/>
           <a:p>
@@ -5554,20 +6652,20 @@
       </p:sp>
       <p:sp>
         <p:nvSpPr>
-          <p:cNvPr id="4" name="Rounded Rectangle 3"/>
+          <p:cNvPr id="10" name="Rounded Rectangle 9"/>
           <p:cNvSpPr/>
           <p:nvPr/>
         </p:nvSpPr>
         <p:spPr>
           <a:xfrm>
-            <a:off x="457200" y="1188720"/>
-            <a:ext cx="5486400" cy="594360"/>
+            <a:off x="457200" y="3474720"/>
+            <a:ext cx="11247120" cy="502920"/>
           </a:xfrm>
           <a:prstGeom prst="roundRect">
             <a:avLst/>
           </a:prstGeom>
           <a:solidFill>
-            <a:srgbClr val="0096D6"/>
+            <a:srgbClr val="1A1A2E"/>
           </a:solidFill>
           <a:ln>
             <a:noFill/>
@@ -5592,235 +6690,41 @@
           <a:bodyPr rtlCol="0" anchor="ctr" wrap="square"/>
           <a:lstStyle/>
           <a:p>
-            <a:pPr algn="ctr">
+            <a:pPr algn="l">
               <a:spcBef>
                 <a:spcPts val="800"/>
               </a:spcBef>
-              <a:defRPr sz="1800" b="1">
+              <a:defRPr sz="1300" b="1">
                 <a:solidFill>
                   <a:srgbClr val="FFFFFF"/>
                 </a:solidFill>
               </a:defRPr>
             </a:pPr>
             <a:r>
-              <a:t>Classification: Is this an AMP trial?</a:t>
-            </a:r>
-          </a:p>
-        </p:txBody>
-      </p:sp>
-      <p:sp>
-        <p:nvSpPr>
-          <p:cNvPr id="5" name="TextBox 4"/>
-          <p:cNvSpPr txBox="1"/>
-          <p:nvPr/>
-        </p:nvSpPr>
-        <p:spPr>
-          <a:xfrm>
-            <a:off x="731520" y="1920240"/>
-            <a:ext cx="4937760" cy="4114800"/>
-          </a:xfrm>
-          <a:prstGeom prst="rect">
-            <a:avLst/>
-          </a:prstGeom>
-          <a:noFill/>
-        </p:spPr>
-        <p:txBody>
-          <a:bodyPr wrap="square"/>
-          <a:lstStyle/>
-          <a:p>
-            <a:pPr algn="l">
-              <a:defRPr sz="1400" b="1">
-                <a:solidFill>
-                  <a:srgbClr val="2D2D3F"/>
-                </a:solidFill>
-              </a:defRPr>
-            </a:pPr>
-            <a:r>
-              <a:t>Question: Is the trial studying an Antimicrobial Peptide?</a:t>
-            </a:r>
-          </a:p>
-          <a:p>
-            <a:pPr>
-              <a:spcBef>
-                <a:spcPts val="400"/>
-              </a:spcBef>
-              <a:defRPr sz="1300" b="0">
-                <a:solidFill>
-                  <a:srgbClr val="A0A0A0"/>
-                </a:solidFill>
-              </a:defRPr>
-            </a:pPr>
-            <a:r>
-              <a:t>Output: AMP or Other</a:t>
-            </a:r>
-          </a:p>
-          <a:p>
-            <a:pPr>
-              <a:spcBef>
-                <a:spcPts val="400"/>
-              </a:spcBef>
-              <a:defRPr sz="600" b="0">
-                <a:solidFill>
-                  <a:srgbClr val="FFFFFF"/>
-                </a:solidFill>
-              </a:defRPr>
-            </a:pPr>
-          </a:p>
-          <a:p>
-            <a:pPr>
-              <a:spcBef>
-                <a:spcPts val="400"/>
-              </a:spcBef>
-              <a:defRPr sz="1400" b="1">
-                <a:solidFill>
-                  <a:srgbClr val="2D2D3F"/>
-                </a:solidFill>
-              </a:defRPr>
-            </a:pPr>
-            <a:r>
-              <a:t>How it works:</a:t>
-            </a:r>
-          </a:p>
-          <a:p>
-            <a:pPr>
-              <a:spcBef>
-                <a:spcPts val="400"/>
-              </a:spcBef>
-              <a:defRPr sz="1300" b="0">
-                <a:solidFill>
-                  <a:srgbClr val="2D2D3F"/>
-                </a:solidFill>
-              </a:defRPr>
-            </a:pPr>
-            <a:r>
-              <a:t>1. Known AMP drug lookup (deterministic, instant)</a:t>
-            </a:r>
-          </a:p>
-          <a:p>
-            <a:pPr>
-              <a:spcBef>
-                <a:spcPts val="400"/>
-              </a:spcBef>
-              <a:defRPr sz="1300" b="0">
-                <a:solidFill>
-                  <a:srgbClr val="2D2D3F"/>
-                </a:solidFill>
-              </a:defRPr>
-            </a:pPr>
-            <a:r>
-              <a:t>2. DRAMP/DBAASP database hits → high-confidence AMP</a:t>
-            </a:r>
-          </a:p>
-          <a:p>
-            <a:pPr>
-              <a:spcBef>
-                <a:spcPts val="400"/>
-              </a:spcBef>
-              <a:defRPr sz="1300" b="0">
-                <a:solidFill>
-                  <a:srgbClr val="2D2D3F"/>
-                </a:solidFill>
-              </a:defRPr>
-            </a:pPr>
-            <a:r>
-              <a:t>3. Two-pass LLM analysis:</a:t>
-            </a:r>
-          </a:p>
-          <a:p>
-            <a:pPr lvl="1">
-              <a:spcBef>
-                <a:spcPts val="400"/>
-              </a:spcBef>
-              <a:defRPr sz="1200" b="0">
-                <a:solidFill>
-                  <a:srgbClr val="A0A0A0"/>
-                </a:solidFill>
-              </a:defRPr>
-            </a:pPr>
-            <a:r>
-              <a:t>Pass 1: Extract antimicrobial evidence &amp; mechanism</a:t>
-            </a:r>
-          </a:p>
-          <a:p>
-            <a:pPr lvl="1">
-              <a:spcBef>
-                <a:spcPts val="400"/>
-              </a:spcBef>
-              <a:defRPr sz="1200" b="0">
-                <a:solidFill>
-                  <a:srgbClr val="A0A0A0"/>
-                </a:solidFill>
-              </a:defRPr>
-            </a:pPr>
-            <a:r>
-              <a:t>Pass 2: Decision tree (peptide? direct antimicrobial?)</a:t>
-            </a:r>
-          </a:p>
-          <a:p>
-            <a:pPr>
-              <a:spcBef>
-                <a:spcPts val="400"/>
-              </a:spcBef>
-              <a:defRPr sz="1300" b="0">
-                <a:solidFill>
-                  <a:srgbClr val="2D2D3F"/>
-                </a:solidFill>
-              </a:defRPr>
-            </a:pPr>
-            <a:r>
-              <a:t>4. Post-LLM consistency check against database hits</a:t>
-            </a:r>
-          </a:p>
-          <a:p>
-            <a:pPr>
-              <a:spcBef>
-                <a:spcPts val="400"/>
-              </a:spcBef>
-              <a:defRPr sz="600" b="0">
-                <a:solidFill>
-                  <a:srgbClr val="FFFFFF"/>
-                </a:solidFill>
-              </a:defRPr>
-            </a:pPr>
-          </a:p>
-          <a:p>
-            <a:pPr>
-              <a:spcBef>
-                <a:spcPts val="400"/>
-              </a:spcBef>
-              <a:defRPr sz="1400" b="1">
-                <a:solidFill>
-                  <a:srgbClr val="0096D6"/>
-                </a:solidFill>
-              </a:defRPr>
-            </a:pPr>
-            <a:r>
-              <a:t>Accuracy: 91.4% (vs 93.2% human agreement)</a:t>
-            </a:r>
-          </a:p>
-        </p:txBody>
-      </p:sp>
-      <p:sp>
-        <p:nvSpPr>
-          <p:cNvPr id="6" name="Rounded Rectangle 5"/>
+              <a:t>    Field                     Reference Lists                              Source of Truth                                              Coverage</a:t>
+            </a:r>
+          </a:p>
+        </p:txBody>
+      </p:sp>
+      <p:sp>
+        <p:nvSpPr>
+          <p:cNvPr id="11" name="Rounded Rectangle 10"/>
           <p:cNvSpPr/>
           <p:nvPr/>
         </p:nvSpPr>
         <p:spPr>
           <a:xfrm>
-            <a:off x="6217920" y="1188720"/>
-            <a:ext cx="5486400" cy="5029200"/>
+            <a:off x="548640" y="4069080"/>
+            <a:ext cx="11064240" cy="365760"/>
           </a:xfrm>
           <a:prstGeom prst="roundRect">
             <a:avLst/>
           </a:prstGeom>
           <a:solidFill>
-            <a:srgbClr val="FFFFFF"/>
+            <a:srgbClr val="F5F7FA"/>
           </a:solidFill>
-          <a:ln w="25400">
-            <a:solidFill>
-              <a:srgbClr val="00C9A7"/>
-            </a:solidFill>
+          <a:ln>
+            <a:noFill/>
           </a:ln>
           <a:effectLst/>
         </p:spPr>
@@ -5848,20 +6752,152 @@
       </p:sp>
       <p:sp>
         <p:nvSpPr>
-          <p:cNvPr id="7" name="Rounded Rectangle 6"/>
+          <p:cNvPr id="12" name="TextBox 11"/>
+          <p:cNvSpPr txBox="1"/>
+          <p:nvPr/>
+        </p:nvSpPr>
+        <p:spPr>
+          <a:xfrm>
+            <a:off x="640080" y="4087368"/>
+            <a:ext cx="1828800" cy="347472"/>
+          </a:xfrm>
+          <a:prstGeom prst="rect">
+            <a:avLst/>
+          </a:prstGeom>
+          <a:noFill/>
+        </p:spPr>
+        <p:txBody>
+          <a:bodyPr wrap="square"/>
+          <a:lstStyle/>
+          <a:p>
+            <a:pPr algn="l">
+              <a:defRPr sz="1200" b="1">
+                <a:solidFill>
+                  <a:srgbClr val="0096D6"/>
+                </a:solidFill>
+              </a:defRPr>
+            </a:pPr>
+            <a:r>
+              <a:t>Classification</a:t>
+            </a:r>
+          </a:p>
+        </p:txBody>
+      </p:sp>
+      <p:sp>
+        <p:nvSpPr>
+          <p:cNvPr id="13" name="TextBox 12"/>
+          <p:cNvSpPr txBox="1"/>
+          <p:nvPr/>
+        </p:nvSpPr>
+        <p:spPr>
+          <a:xfrm>
+            <a:off x="2560320" y="4087368"/>
+            <a:ext cx="3474720" cy="347472"/>
+          </a:xfrm>
+          <a:prstGeom prst="rect">
+            <a:avLst/>
+          </a:prstGeom>
+          <a:noFill/>
+        </p:spPr>
+        <p:txBody>
+          <a:bodyPr wrap="square"/>
+          <a:lstStyle/>
+          <a:p>
+            <a:pPr algn="l">
+              <a:defRPr sz="1100" b="0">
+                <a:solidFill>
+                  <a:srgbClr val="2D2D3F"/>
+                </a:solidFill>
+              </a:defRPr>
+            </a:pPr>
+            <a:r>
+              <a:t>44 known AMPs + 48 known non-AMPs</a:t>
+            </a:r>
+          </a:p>
+        </p:txBody>
+      </p:sp>
+      <p:sp>
+        <p:nvSpPr>
+          <p:cNvPr id="14" name="TextBox 13"/>
+          <p:cNvSpPr txBox="1"/>
+          <p:nvPr/>
+        </p:nvSpPr>
+        <p:spPr>
+          <a:xfrm>
+            <a:off x="6126480" y="4087368"/>
+            <a:ext cx="3657600" cy="347472"/>
+          </a:xfrm>
+          <a:prstGeom prst="rect">
+            <a:avLst/>
+          </a:prstGeom>
+          <a:noFill/>
+        </p:spPr>
+        <p:txBody>
+          <a:bodyPr wrap="square"/>
+          <a:lstStyle/>
+          <a:p>
+            <a:pPr algn="l">
+              <a:defRPr sz="1100" b="0">
+                <a:solidFill>
+                  <a:srgbClr val="A0A0A0"/>
+                </a:solidFill>
+              </a:defRPr>
+            </a:pPr>
+            <a:r>
+              <a:t>Pharmacology literature, WHO essential medicines, published AMP reviews</a:t>
+            </a:r>
+          </a:p>
+        </p:txBody>
+      </p:sp>
+      <p:sp>
+        <p:nvSpPr>
+          <p:cNvPr id="15" name="TextBox 14"/>
+          <p:cNvSpPr txBox="1"/>
+          <p:nvPr/>
+        </p:nvSpPr>
+        <p:spPr>
+          <a:xfrm>
+            <a:off x="9875520" y="4087368"/>
+            <a:ext cx="1828800" cy="347472"/>
+          </a:xfrm>
+          <a:prstGeom prst="rect">
+            <a:avLst/>
+          </a:prstGeom>
+          <a:noFill/>
+        </p:spPr>
+        <p:txBody>
+          <a:bodyPr wrap="square"/>
+          <a:lstStyle/>
+          <a:p>
+            <a:pPr algn="l">
+              <a:defRPr sz="1100" b="0">
+                <a:solidFill>
+                  <a:srgbClr val="2D2D3F"/>
+                </a:solidFill>
+              </a:defRPr>
+            </a:pPr>
+            <a:r>
+              <a:t>~30-40% of trials resolved instantly</a:t>
+            </a:r>
+          </a:p>
+        </p:txBody>
+      </p:sp>
+      <p:sp>
+        <p:nvSpPr>
+          <p:cNvPr id="16" name="Rounded Rectangle 15"/>
           <p:cNvSpPr/>
           <p:nvPr/>
         </p:nvSpPr>
         <p:spPr>
           <a:xfrm>
-            <a:off x="6217920" y="1188720"/>
-            <a:ext cx="5486400" cy="594360"/>
+            <a:off x="548640" y="4462272"/>
+            <a:ext cx="11064240" cy="365760"/>
           </a:xfrm>
           <a:prstGeom prst="roundRect">
             <a:avLst/>
           </a:prstGeom>
           <a:solidFill>
-            <a:srgbClr val="00C9A7"/>
+            <a:srgbClr val="FFFFFF"/>
           </a:solidFill>
           <a:ln>
             <a:noFill/>
@@ -5883,35 +6919,23 @@
           </a:fontRef>
         </p:style>
         <p:txBody>
-          <a:bodyPr rtlCol="0" anchor="ctr" wrap="square"/>
-          <a:lstStyle/>
-          <a:p>
-            <a:pPr algn="ctr">
-              <a:spcBef>
-                <a:spcPts val="800"/>
-              </a:spcBef>
-              <a:defRPr sz="1800" b="1">
-                <a:solidFill>
-                  <a:srgbClr val="FFFFFF"/>
-                </a:solidFill>
-              </a:defRPr>
-            </a:pPr>
-            <a:r>
-              <a:t>Peptide: Is the drug a peptide?</a:t>
-            </a:r>
-          </a:p>
-        </p:txBody>
-      </p:sp>
-      <p:sp>
-        <p:nvSpPr>
-          <p:cNvPr id="8" name="TextBox 7"/>
+          <a:bodyPr rtlCol="0" anchor="ctr"/>
+          <a:lstStyle/>
+          <a:p>
+            <a:pPr algn="ctr"/>
+          </a:p>
+        </p:txBody>
+      </p:sp>
+      <p:sp>
+        <p:nvSpPr>
+          <p:cNvPr id="17" name="TextBox 16"/>
           <p:cNvSpPr txBox="1"/>
           <p:nvPr/>
         </p:nvSpPr>
         <p:spPr>
           <a:xfrm>
-            <a:off x="6492240" y="1920240"/>
-            <a:ext cx="4937760" cy="4114800"/>
+            <a:off x="640080" y="4480560"/>
+            <a:ext cx="1828800" cy="347472"/>
           </a:xfrm>
           <a:prstGeom prst="rect">
             <a:avLst/>
@@ -5923,21 +6947,842 @@
           <a:lstStyle/>
           <a:p>
             <a:pPr algn="l">
-              <a:defRPr sz="1400" b="1">
+              <a:defRPr sz="1200" b="1">
+                <a:solidFill>
+                  <a:srgbClr val="0096D6"/>
+                </a:solidFill>
+              </a:defRPr>
+            </a:pPr>
+            <a:r>
+              <a:t>Peptide</a:t>
+            </a:r>
+          </a:p>
+        </p:txBody>
+      </p:sp>
+      <p:sp>
+        <p:nvSpPr>
+          <p:cNvPr id="18" name="TextBox 17"/>
+          <p:cNvSpPr txBox="1"/>
+          <p:nvPr/>
+        </p:nvSpPr>
+        <p:spPr>
+          <a:xfrm>
+            <a:off x="2560320" y="4480560"/>
+            <a:ext cx="3474720" cy="347472"/>
+          </a:xfrm>
+          <a:prstGeom prst="rect">
+            <a:avLst/>
+          </a:prstGeom>
+          <a:noFill/>
+        </p:spPr>
+        <p:txBody>
+          <a:bodyPr wrap="square"/>
+          <a:lstStyle/>
+          <a:p>
+            <a:pPr algn="l">
+              <a:defRPr sz="1100" b="0">
                 <a:solidFill>
                   <a:srgbClr val="2D2D3F"/>
                 </a:solidFill>
               </a:defRPr>
             </a:pPr>
             <a:r>
-              <a:t>Question: Is the intervention a peptide molecule (≤10 0 amino acids)?</a:t>
-            </a:r>
-          </a:p>
-          <a:p>
-            <a:pPr>
-              <a:spcBef>
-                <a:spcPts val="400"/>
-              </a:spcBef>
+              <a:t>75 known peptides + 39 known non-peptides</a:t>
+            </a:r>
+          </a:p>
+        </p:txBody>
+      </p:sp>
+      <p:sp>
+        <p:nvSpPr>
+          <p:cNvPr id="19" name="TextBox 18"/>
+          <p:cNvSpPr txBox="1"/>
+          <p:nvPr/>
+        </p:nvSpPr>
+        <p:spPr>
+          <a:xfrm>
+            <a:off x="6126480" y="4480560"/>
+            <a:ext cx="3657600" cy="347472"/>
+          </a:xfrm>
+          <a:prstGeom prst="rect">
+            <a:avLst/>
+          </a:prstGeom>
+          <a:noFill/>
+        </p:spPr>
+        <p:txBody>
+          <a:bodyPr wrap="square"/>
+          <a:lstStyle/>
+          <a:p>
+            <a:pPr algn="l">
+              <a:defRPr sz="1100" b="0">
+                <a:solidFill>
+                  <a:srgbClr val="A0A0A0"/>
+                </a:solidFill>
+              </a:defRPr>
+            </a:pPr>
+            <a:r>
+              <a:t>DrugBank molecular class, UniProt protein type, published drug profiles</a:t>
+            </a:r>
+          </a:p>
+        </p:txBody>
+      </p:sp>
+      <p:sp>
+        <p:nvSpPr>
+          <p:cNvPr id="20" name="TextBox 19"/>
+          <p:cNvSpPr txBox="1"/>
+          <p:nvPr/>
+        </p:nvSpPr>
+        <p:spPr>
+          <a:xfrm>
+            <a:off x="9875520" y="4480560"/>
+            <a:ext cx="1828800" cy="347472"/>
+          </a:xfrm>
+          <a:prstGeom prst="rect">
+            <a:avLst/>
+          </a:prstGeom>
+          <a:noFill/>
+        </p:spPr>
+        <p:txBody>
+          <a:bodyPr wrap="square"/>
+          <a:lstStyle/>
+          <a:p>
+            <a:pPr algn="l">
+              <a:defRPr sz="1100" b="0">
+                <a:solidFill>
+                  <a:srgbClr val="2D2D3F"/>
+                </a:solidFill>
+              </a:defRPr>
+            </a:pPr>
+            <a:r>
+              <a:t>~40-50% of trials resolved instantly</a:t>
+            </a:r>
+          </a:p>
+        </p:txBody>
+      </p:sp>
+      <p:sp>
+        <p:nvSpPr>
+          <p:cNvPr id="21" name="Rounded Rectangle 20"/>
+          <p:cNvSpPr/>
+          <p:nvPr/>
+        </p:nvSpPr>
+        <p:spPr>
+          <a:xfrm>
+            <a:off x="548640" y="4855464"/>
+            <a:ext cx="11064240" cy="365760"/>
+          </a:xfrm>
+          <a:prstGeom prst="roundRect">
+            <a:avLst/>
+          </a:prstGeom>
+          <a:solidFill>
+            <a:srgbClr val="F5F7FA"/>
+          </a:solidFill>
+          <a:ln>
+            <a:noFill/>
+          </a:ln>
+          <a:effectLst/>
+        </p:spPr>
+        <p:style>
+          <a:lnRef idx="1">
+            <a:schemeClr val="accent1"/>
+          </a:lnRef>
+          <a:fillRef idx="3">
+            <a:schemeClr val="accent1"/>
+          </a:fillRef>
+          <a:effectRef idx="2">
+            <a:schemeClr val="accent1"/>
+          </a:effectRef>
+          <a:fontRef idx="minor">
+            <a:schemeClr val="lt1"/>
+          </a:fontRef>
+        </p:style>
+        <p:txBody>
+          <a:bodyPr rtlCol="0" anchor="ctr"/>
+          <a:lstStyle/>
+          <a:p>
+            <a:pPr algn="ctr"/>
+          </a:p>
+        </p:txBody>
+      </p:sp>
+      <p:sp>
+        <p:nvSpPr>
+          <p:cNvPr id="22" name="TextBox 21"/>
+          <p:cNvSpPr txBox="1"/>
+          <p:nvPr/>
+        </p:nvSpPr>
+        <p:spPr>
+          <a:xfrm>
+            <a:off x="640080" y="4873752"/>
+            <a:ext cx="1828800" cy="347472"/>
+          </a:xfrm>
+          <a:prstGeom prst="rect">
+            <a:avLst/>
+          </a:prstGeom>
+          <a:noFill/>
+        </p:spPr>
+        <p:txBody>
+          <a:bodyPr wrap="square"/>
+          <a:lstStyle/>
+          <a:p>
+            <a:pPr algn="l">
+              <a:defRPr sz="1200" b="1">
+                <a:solidFill>
+                  <a:srgbClr val="0096D6"/>
+                </a:solidFill>
+              </a:defRPr>
+            </a:pPr>
+            <a:r>
+              <a:t>Sequence</a:t>
+            </a:r>
+          </a:p>
+        </p:txBody>
+      </p:sp>
+      <p:sp>
+        <p:nvSpPr>
+          <p:cNvPr id="23" name="TextBox 22"/>
+          <p:cNvSpPr txBox="1"/>
+          <p:nvPr/>
+        </p:nvSpPr>
+        <p:spPr>
+          <a:xfrm>
+            <a:off x="2560320" y="4873752"/>
+            <a:ext cx="3474720" cy="347472"/>
+          </a:xfrm>
+          <a:prstGeom prst="rect">
+            <a:avLst/>
+          </a:prstGeom>
+          <a:noFill/>
+        </p:spPr>
+        <p:txBody>
+          <a:bodyPr wrap="square"/>
+          <a:lstStyle/>
+          <a:p>
+            <a:pPr algn="l">
+              <a:defRPr sz="1100" b="0">
+                <a:solidFill>
+                  <a:srgbClr val="2D2D3F"/>
+                </a:solidFill>
+              </a:defRPr>
+            </a:pPr>
+            <a:r>
+              <a:t>66 drugs with mapped sequences + 43 aliases</a:t>
+            </a:r>
+          </a:p>
+        </p:txBody>
+      </p:sp>
+      <p:sp>
+        <p:nvSpPr>
+          <p:cNvPr id="24" name="TextBox 23"/>
+          <p:cNvSpPr txBox="1"/>
+          <p:nvPr/>
+        </p:nvSpPr>
+        <p:spPr>
+          <a:xfrm>
+            <a:off x="6126480" y="4873752"/>
+            <a:ext cx="3657600" cy="347472"/>
+          </a:xfrm>
+          <a:prstGeom prst="rect">
+            <a:avLst/>
+          </a:prstGeom>
+          <a:noFill/>
+        </p:spPr>
+        <p:txBody>
+          <a:bodyPr wrap="square"/>
+          <a:lstStyle/>
+          <a:p>
+            <a:pPr algn="l">
+              <a:defRPr sz="1100" b="0">
+                <a:solidFill>
+                  <a:srgbClr val="A0A0A0"/>
+                </a:solidFill>
+              </a:defRPr>
+            </a:pPr>
+            <a:r>
+              <a:t>DBAASP, APD, UniProt databases (verified AA sequences)</a:t>
+            </a:r>
+          </a:p>
+        </p:txBody>
+      </p:sp>
+      <p:sp>
+        <p:nvSpPr>
+          <p:cNvPr id="25" name="TextBox 24"/>
+          <p:cNvSpPr txBox="1"/>
+          <p:nvPr/>
+        </p:nvSpPr>
+        <p:spPr>
+          <a:xfrm>
+            <a:off x="9875520" y="4873752"/>
+            <a:ext cx="1828800" cy="347472"/>
+          </a:xfrm>
+          <a:prstGeom prst="rect">
+            <a:avLst/>
+          </a:prstGeom>
+          <a:noFill/>
+        </p:spPr>
+        <p:txBody>
+          <a:bodyPr wrap="square"/>
+          <a:lstStyle/>
+          <a:p>
+            <a:pPr algn="l">
+              <a:defRPr sz="1100" b="0">
+                <a:solidFill>
+                  <a:srgbClr val="2D2D3F"/>
+                </a:solidFill>
+              </a:defRPr>
+            </a:pPr>
+            <a:r>
+              <a:t>~60% of peptide trials resolved instantly</a:t>
+            </a:r>
+          </a:p>
+        </p:txBody>
+      </p:sp>
+      <p:sp>
+        <p:nvSpPr>
+          <p:cNvPr id="26" name="Rounded Rectangle 25"/>
+          <p:cNvSpPr/>
+          <p:nvPr/>
+        </p:nvSpPr>
+        <p:spPr>
+          <a:xfrm>
+            <a:off x="548640" y="5248656"/>
+            <a:ext cx="11064240" cy="365760"/>
+          </a:xfrm>
+          <a:prstGeom prst="roundRect">
+            <a:avLst/>
+          </a:prstGeom>
+          <a:solidFill>
+            <a:srgbClr val="FFFFFF"/>
+          </a:solidFill>
+          <a:ln>
+            <a:noFill/>
+          </a:ln>
+          <a:effectLst/>
+        </p:spPr>
+        <p:style>
+          <a:lnRef idx="1">
+            <a:schemeClr val="accent1"/>
+          </a:lnRef>
+          <a:fillRef idx="3">
+            <a:schemeClr val="accent1"/>
+          </a:fillRef>
+          <a:effectRef idx="2">
+            <a:schemeClr val="accent1"/>
+          </a:effectRef>
+          <a:fontRef idx="minor">
+            <a:schemeClr val="lt1"/>
+          </a:fontRef>
+        </p:style>
+        <p:txBody>
+          <a:bodyPr rtlCol="0" anchor="ctr"/>
+          <a:lstStyle/>
+          <a:p>
+            <a:pPr algn="ctr"/>
+          </a:p>
+        </p:txBody>
+      </p:sp>
+      <p:sp>
+        <p:nvSpPr>
+          <p:cNvPr id="27" name="TextBox 26"/>
+          <p:cNvSpPr txBox="1"/>
+          <p:nvPr/>
+        </p:nvSpPr>
+        <p:spPr>
+          <a:xfrm>
+            <a:off x="640080" y="5266944"/>
+            <a:ext cx="1828800" cy="347472"/>
+          </a:xfrm>
+          <a:prstGeom prst="rect">
+            <a:avLst/>
+          </a:prstGeom>
+          <a:noFill/>
+        </p:spPr>
+        <p:txBody>
+          <a:bodyPr wrap="square"/>
+          <a:lstStyle/>
+          <a:p>
+            <a:pPr algn="l">
+              <a:defRPr sz="1200" b="1">
+                <a:solidFill>
+                  <a:srgbClr val="0096D6"/>
+                </a:solidFill>
+              </a:defRPr>
+            </a:pPr>
+            <a:r>
+              <a:t>Outcome</a:t>
+            </a:r>
+          </a:p>
+        </p:txBody>
+      </p:sp>
+      <p:sp>
+        <p:nvSpPr>
+          <p:cNvPr id="28" name="TextBox 27"/>
+          <p:cNvSpPr txBox="1"/>
+          <p:nvPr/>
+        </p:nvSpPr>
+        <p:spPr>
+          <a:xfrm>
+            <a:off x="2560320" y="5266944"/>
+            <a:ext cx="3474720" cy="347472"/>
+          </a:xfrm>
+          <a:prstGeom prst="rect">
+            <a:avLst/>
+          </a:prstGeom>
+          <a:noFill/>
+        </p:spPr>
+        <p:txBody>
+          <a:bodyPr wrap="square"/>
+          <a:lstStyle/>
+          <a:p>
+            <a:pPr algn="l">
+              <a:defRPr sz="1100" b="0">
+                <a:solidFill>
+                  <a:srgbClr val="2D2D3F"/>
+                </a:solidFill>
+              </a:defRPr>
+            </a:pPr>
+            <a:r>
+              <a:t>5 deterministic statuses + structured endpoint rules</a:t>
+            </a:r>
+          </a:p>
+        </p:txBody>
+      </p:sp>
+      <p:sp>
+        <p:nvSpPr>
+          <p:cNvPr id="29" name="TextBox 28"/>
+          <p:cNvSpPr txBox="1"/>
+          <p:nvPr/>
+        </p:nvSpPr>
+        <p:spPr>
+          <a:xfrm>
+            <a:off x="6126480" y="5266944"/>
+            <a:ext cx="3657600" cy="347472"/>
+          </a:xfrm>
+          <a:prstGeom prst="rect">
+            <a:avLst/>
+          </a:prstGeom>
+          <a:noFill/>
+        </p:spPr>
+        <p:txBody>
+          <a:bodyPr wrap="square"/>
+          <a:lstStyle/>
+          <a:p>
+            <a:pPr algn="l">
+              <a:defRPr sz="1100" b="0">
+                <a:solidFill>
+                  <a:srgbClr val="A0A0A0"/>
+                </a:solidFill>
+              </a:defRPr>
+            </a:pPr>
+            <a:r>
+              <a:t>ClinicalTrials.gov registry status, posted p-values</a:t>
+            </a:r>
+          </a:p>
+        </p:txBody>
+      </p:sp>
+      <p:sp>
+        <p:nvSpPr>
+          <p:cNvPr id="30" name="TextBox 29"/>
+          <p:cNvSpPr txBox="1"/>
+          <p:nvPr/>
+        </p:nvSpPr>
+        <p:spPr>
+          <a:xfrm>
+            <a:off x="9875520" y="5266944"/>
+            <a:ext cx="1828800" cy="347472"/>
+          </a:xfrm>
+          <a:prstGeom prst="rect">
+            <a:avLst/>
+          </a:prstGeom>
+          <a:noFill/>
+        </p:spPr>
+        <p:txBody>
+          <a:bodyPr wrap="square"/>
+          <a:lstStyle/>
+          <a:p>
+            <a:pPr algn="l">
+              <a:defRPr sz="1100" b="0">
+                <a:solidFill>
+                  <a:srgbClr val="2D2D3F"/>
+                </a:solidFill>
+              </a:defRPr>
+            </a:pPr>
+            <a:r>
+              <a:t>~25% of trials resolved instantly</a:t>
+            </a:r>
+          </a:p>
+        </p:txBody>
+      </p:sp>
+      <p:sp>
+        <p:nvSpPr>
+          <p:cNvPr id="31" name="Rounded Rectangle 30"/>
+          <p:cNvSpPr/>
+          <p:nvPr/>
+        </p:nvSpPr>
+        <p:spPr>
+          <a:xfrm>
+            <a:off x="548640" y="5641848"/>
+            <a:ext cx="11064240" cy="365760"/>
+          </a:xfrm>
+          <a:prstGeom prst="roundRect">
+            <a:avLst/>
+          </a:prstGeom>
+          <a:solidFill>
+            <a:srgbClr val="F5F7FA"/>
+          </a:solidFill>
+          <a:ln>
+            <a:noFill/>
+          </a:ln>
+          <a:effectLst/>
+        </p:spPr>
+        <p:style>
+          <a:lnRef idx="1">
+            <a:schemeClr val="accent1"/>
+          </a:lnRef>
+          <a:fillRef idx="3">
+            <a:schemeClr val="accent1"/>
+          </a:fillRef>
+          <a:effectRef idx="2">
+            <a:schemeClr val="accent1"/>
+          </a:effectRef>
+          <a:fontRef idx="minor">
+            <a:schemeClr val="lt1"/>
+          </a:fontRef>
+        </p:style>
+        <p:txBody>
+          <a:bodyPr rtlCol="0" anchor="ctr"/>
+          <a:lstStyle/>
+          <a:p>
+            <a:pPr algn="ctr"/>
+          </a:p>
+        </p:txBody>
+      </p:sp>
+      <p:sp>
+        <p:nvSpPr>
+          <p:cNvPr id="32" name="TextBox 31"/>
+          <p:cNvSpPr txBox="1"/>
+          <p:nvPr/>
+        </p:nvSpPr>
+        <p:spPr>
+          <a:xfrm>
+            <a:off x="640080" y="5660136"/>
+            <a:ext cx="1828800" cy="347472"/>
+          </a:xfrm>
+          <a:prstGeom prst="rect">
+            <a:avLst/>
+          </a:prstGeom>
+          <a:noFill/>
+        </p:spPr>
+        <p:txBody>
+          <a:bodyPr wrap="square"/>
+          <a:lstStyle/>
+          <a:p>
+            <a:pPr algn="l">
+              <a:defRPr sz="1200" b="1">
+                <a:solidFill>
+                  <a:srgbClr val="0096D6"/>
+                </a:solidFill>
+              </a:defRPr>
+            </a:pPr>
+            <a:r>
+              <a:t>Delivery</a:t>
+            </a:r>
+          </a:p>
+        </p:txBody>
+      </p:sp>
+      <p:sp>
+        <p:nvSpPr>
+          <p:cNvPr id="33" name="TextBox 32"/>
+          <p:cNvSpPr txBox="1"/>
+          <p:nvPr/>
+        </p:nvSpPr>
+        <p:spPr>
+          <a:xfrm>
+            <a:off x="2560320" y="5660136"/>
+            <a:ext cx="3474720" cy="347472"/>
+          </a:xfrm>
+          <a:prstGeom prst="rect">
+            <a:avLst/>
+          </a:prstGeom>
+          <a:noFill/>
+        </p:spPr>
+        <p:txBody>
+          <a:bodyPr wrap="square"/>
+          <a:lstStyle/>
+          <a:p>
+            <a:pPr algn="l">
+              <a:defRPr sz="1100" b="0">
+                <a:solidFill>
+                  <a:srgbClr val="2D2D3F"/>
+                </a:solidFill>
+              </a:defRPr>
+            </a:pPr>
+            <a:r>
+              <a:t>No drug lists — route keywords from protocol + FDA</a:t>
+            </a:r>
+          </a:p>
+        </p:txBody>
+      </p:sp>
+      <p:sp>
+        <p:nvSpPr>
+          <p:cNvPr id="34" name="TextBox 33"/>
+          <p:cNvSpPr txBox="1"/>
+          <p:nvPr/>
+        </p:nvSpPr>
+        <p:spPr>
+          <a:xfrm>
+            <a:off x="6126480" y="5660136"/>
+            <a:ext cx="3657600" cy="347472"/>
+          </a:xfrm>
+          <a:prstGeom prst="rect">
+            <a:avLst/>
+          </a:prstGeom>
+          <a:noFill/>
+        </p:spPr>
+        <p:txBody>
+          <a:bodyPr wrap="square"/>
+          <a:lstStyle/>
+          <a:p>
+            <a:pPr algn="l">
+              <a:defRPr sz="1100" b="0">
+                <a:solidFill>
+                  <a:srgbClr val="A0A0A0"/>
+                </a:solidFill>
+              </a:defRPr>
+            </a:pPr>
+            <a:r>
+              <a:t>ClinicalTrials.gov protocol text, OpenFDA drug labels</a:t>
+            </a:r>
+          </a:p>
+        </p:txBody>
+      </p:sp>
+      <p:sp>
+        <p:nvSpPr>
+          <p:cNvPr id="35" name="TextBox 34"/>
+          <p:cNvSpPr txBox="1"/>
+          <p:nvPr/>
+        </p:nvSpPr>
+        <p:spPr>
+          <a:xfrm>
+            <a:off x="9875520" y="5660136"/>
+            <a:ext cx="1828800" cy="347472"/>
+          </a:xfrm>
+          <a:prstGeom prst="rect">
+            <a:avLst/>
+          </a:prstGeom>
+          <a:noFill/>
+        </p:spPr>
+        <p:txBody>
+          <a:bodyPr wrap="square"/>
+          <a:lstStyle/>
+          <a:p>
+            <a:pPr algn="l">
+              <a:defRPr sz="1100" b="0">
+                <a:solidFill>
+                  <a:srgbClr val="2D2D3F"/>
+                </a:solidFill>
+              </a:defRPr>
+            </a:pPr>
+            <a:r>
+              <a:t>~15% of trials resolved deterministically</a:t>
+            </a:r>
+          </a:p>
+        </p:txBody>
+      </p:sp>
+      <p:sp>
+        <p:nvSpPr>
+          <p:cNvPr id="36" name="Rounded Rectangle 35"/>
+          <p:cNvSpPr/>
+          <p:nvPr/>
+        </p:nvSpPr>
+        <p:spPr>
+          <a:xfrm>
+            <a:off x="548640" y="6035040"/>
+            <a:ext cx="11064240" cy="365760"/>
+          </a:xfrm>
+          <a:prstGeom prst="roundRect">
+            <a:avLst/>
+          </a:prstGeom>
+          <a:solidFill>
+            <a:srgbClr val="FFFFFF"/>
+          </a:solidFill>
+          <a:ln>
+            <a:noFill/>
+          </a:ln>
+          <a:effectLst/>
+        </p:spPr>
+        <p:style>
+          <a:lnRef idx="1">
+            <a:schemeClr val="accent1"/>
+          </a:lnRef>
+          <a:fillRef idx="3">
+            <a:schemeClr val="accent1"/>
+          </a:fillRef>
+          <a:effectRef idx="2">
+            <a:schemeClr val="accent1"/>
+          </a:effectRef>
+          <a:fontRef idx="minor">
+            <a:schemeClr val="lt1"/>
+          </a:fontRef>
+        </p:style>
+        <p:txBody>
+          <a:bodyPr rtlCol="0" anchor="ctr"/>
+          <a:lstStyle/>
+          <a:p>
+            <a:pPr algn="ctr"/>
+          </a:p>
+        </p:txBody>
+      </p:sp>
+      <p:sp>
+        <p:nvSpPr>
+          <p:cNvPr id="37" name="TextBox 36"/>
+          <p:cNvSpPr txBox="1"/>
+          <p:nvPr/>
+        </p:nvSpPr>
+        <p:spPr>
+          <a:xfrm>
+            <a:off x="640080" y="6053328"/>
+            <a:ext cx="1828800" cy="347472"/>
+          </a:xfrm>
+          <a:prstGeom prst="rect">
+            <a:avLst/>
+          </a:prstGeom>
+          <a:noFill/>
+        </p:spPr>
+        <p:txBody>
+          <a:bodyPr wrap="square"/>
+          <a:lstStyle/>
+          <a:p>
+            <a:pPr algn="l">
+              <a:defRPr sz="1200" b="1">
+                <a:solidFill>
+                  <a:srgbClr val="0096D6"/>
+                </a:solidFill>
+              </a:defRPr>
+            </a:pPr>
+            <a:r>
+              <a:t>Reason for Failure</a:t>
+            </a:r>
+          </a:p>
+        </p:txBody>
+      </p:sp>
+      <p:sp>
+        <p:nvSpPr>
+          <p:cNvPr id="38" name="TextBox 37"/>
+          <p:cNvSpPr txBox="1"/>
+          <p:nvPr/>
+        </p:nvSpPr>
+        <p:spPr>
+          <a:xfrm>
+            <a:off x="2560320" y="6053328"/>
+            <a:ext cx="3474720" cy="347472"/>
+          </a:xfrm>
+          <a:prstGeom prst="rect">
+            <a:avLst/>
+          </a:prstGeom>
+          <a:noFill/>
+        </p:spPr>
+        <p:txBody>
+          <a:bodyPr wrap="square"/>
+          <a:lstStyle/>
+          <a:p>
+            <a:pPr algn="l">
+              <a:defRPr sz="1100" b="0">
+                <a:solidFill>
+                  <a:srgbClr val="2D2D3F"/>
+                </a:solidFill>
+              </a:defRPr>
+            </a:pPr>
+            <a:r>
+              <a:t>No drug lists — whyStopped field from registry</a:t>
+            </a:r>
+          </a:p>
+        </p:txBody>
+      </p:sp>
+      <p:sp>
+        <p:nvSpPr>
+          <p:cNvPr id="39" name="TextBox 38"/>
+          <p:cNvSpPr txBox="1"/>
+          <p:nvPr/>
+        </p:nvSpPr>
+        <p:spPr>
+          <a:xfrm>
+            <a:off x="6126480" y="6053328"/>
+            <a:ext cx="3657600" cy="347472"/>
+          </a:xfrm>
+          <a:prstGeom prst="rect">
+            <a:avLst/>
+          </a:prstGeom>
+          <a:noFill/>
+        </p:spPr>
+        <p:txBody>
+          <a:bodyPr wrap="square"/>
+          <a:lstStyle/>
+          <a:p>
+            <a:pPr algn="l">
+              <a:defRPr sz="1100" b="0">
+                <a:solidFill>
+                  <a:srgbClr val="A0A0A0"/>
+                </a:solidFill>
+              </a:defRPr>
+            </a:pPr>
+            <a:r>
+              <a:t>ClinicalTrials.gov whyStopped free text</a:t>
+            </a:r>
+          </a:p>
+        </p:txBody>
+      </p:sp>
+      <p:sp>
+        <p:nvSpPr>
+          <p:cNvPr id="40" name="TextBox 39"/>
+          <p:cNvSpPr txBox="1"/>
+          <p:nvPr/>
+        </p:nvSpPr>
+        <p:spPr>
+          <a:xfrm>
+            <a:off x="9875520" y="6053328"/>
+            <a:ext cx="1828800" cy="347472"/>
+          </a:xfrm>
+          <a:prstGeom prst="rect">
+            <a:avLst/>
+          </a:prstGeom>
+          <a:noFill/>
+        </p:spPr>
+        <p:txBody>
+          <a:bodyPr wrap="square"/>
+          <a:lstStyle/>
+          <a:p>
+            <a:pPr algn="l">
+              <a:defRPr sz="1100" b="0">
+                <a:solidFill>
+                  <a:srgbClr val="2D2D3F"/>
+                </a:solidFill>
+              </a:defRPr>
+            </a:pPr>
+            <a:r>
+              <a:t>~20% resolved from structured reason</a:t>
+            </a:r>
+          </a:p>
+        </p:txBody>
+      </p:sp>
+      <p:sp>
+        <p:nvSpPr>
+          <p:cNvPr id="41" name="TextBox 40"/>
+          <p:cNvSpPr txBox="1"/>
+          <p:nvPr/>
+        </p:nvSpPr>
+        <p:spPr>
+          <a:xfrm>
+            <a:off x="457200" y="6400800"/>
+            <a:ext cx="11247120" cy="365760"/>
+          </a:xfrm>
+          <a:prstGeom prst="rect">
+            <a:avLst/>
+          </a:prstGeom>
+          <a:noFill/>
+        </p:spPr>
+        <p:txBody>
+          <a:bodyPr wrap="square"/>
+          <a:lstStyle/>
+          <a:p>
+            <a:pPr algn="l">
               <a:defRPr sz="1300" b="0">
                 <a:solidFill>
                   <a:srgbClr val="A0A0A0"/>
@@ -5945,166 +7790,7 @@
               </a:defRPr>
             </a:pPr>
             <a:r>
-              <a:t>Output: True or False</a:t>
-            </a:r>
-          </a:p>
-          <a:p>
-            <a:pPr>
-              <a:spcBef>
-                <a:spcPts val="400"/>
-              </a:spcBef>
-              <a:defRPr sz="600" b="0">
-                <a:solidFill>
-                  <a:srgbClr val="FFFFFF"/>
-                </a:solidFill>
-              </a:defRPr>
-            </a:pPr>
-          </a:p>
-          <a:p>
-            <a:pPr>
-              <a:spcBef>
-                <a:spcPts val="400"/>
-              </a:spcBef>
-              <a:defRPr sz="1400" b="1">
-                <a:solidFill>
-                  <a:srgbClr val="2D2D3F"/>
-                </a:solidFill>
-              </a:defRPr>
-            </a:pPr>
-            <a:r>
-              <a:t>How it works:</a:t>
-            </a:r>
-          </a:p>
-          <a:p>
-            <a:pPr>
-              <a:spcBef>
-                <a:spcPts val="400"/>
-              </a:spcBef>
-              <a:defRPr sz="1300" b="0">
-                <a:solidFill>
-                  <a:srgbClr val="2D2D3F"/>
-                </a:solidFill>
-              </a:defRPr>
-            </a:pPr>
-            <a:r>
-              <a:t>1. Known peptide drug list (~250 drugs, deterministic)</a:t>
-            </a:r>
-          </a:p>
-          <a:p>
-            <a:pPr>
-              <a:spcBef>
-                <a:spcPts val="400"/>
-              </a:spcBef>
-              <a:defRPr sz="1300" b="0">
-                <a:solidFill>
-                  <a:srgbClr val="2D2D3F"/>
-                </a:solidFill>
-              </a:defRPr>
-            </a:pPr>
-            <a:r>
-              <a:t>2. UniProt/ChEMBL molecular class lookup</a:t>
-            </a:r>
-          </a:p>
-          <a:p>
-            <a:pPr>
-              <a:spcBef>
-                <a:spcPts val="400"/>
-              </a:spcBef>
-              <a:defRPr sz="1300" b="0">
-                <a:solidFill>
-                  <a:srgbClr val="2D2D3F"/>
-                </a:solidFill>
-              </a:defRPr>
-            </a:pPr>
-            <a:r>
-              <a:t>3. Two-pass LLM analysis:</a:t>
-            </a:r>
-          </a:p>
-          <a:p>
-            <a:pPr lvl="1">
-              <a:spcBef>
-                <a:spcPts val="400"/>
-              </a:spcBef>
-              <a:defRPr sz="1200" b="0">
-                <a:solidFill>
-                  <a:srgbClr val="A0A0A0"/>
-                </a:solidFill>
-              </a:defRPr>
-            </a:pPr>
-            <a:r>
-              <a:t>Pass 1: Extract molecular class, AA length, DB matches</a:t>
-            </a:r>
-          </a:p>
-          <a:p>
-            <a:pPr lvl="1">
-              <a:spcBef>
-                <a:spcPts val="400"/>
-              </a:spcBef>
-              <a:defRPr sz="1200" b="0">
-                <a:solidFill>
-                  <a:srgbClr val="A0A0A0"/>
-                </a:solidFill>
-              </a:defRPr>
-            </a:pPr>
-            <a:r>
-              <a:t>Pass 2: Decision tree (peptide class? ≤100 AA?)</a:t>
-            </a:r>
-          </a:p>
-          <a:p>
-            <a:pPr>
-              <a:spcBef>
-                <a:spcPts val="400"/>
-              </a:spcBef>
-              <a:defRPr sz="1300" b="0">
-                <a:solidFill>
-                  <a:srgbClr val="2D2D3F"/>
-                </a:solidFill>
-              </a:defRPr>
-            </a:pPr>
-            <a:r>
-              <a:t>4. Safety checks: monoclonal antibody → False, nutritional → False</a:t>
-            </a:r>
-          </a:p>
-          <a:p>
-            <a:pPr>
-              <a:spcBef>
-                <a:spcPts val="400"/>
-              </a:spcBef>
-              <a:defRPr sz="600" b="0">
-                <a:solidFill>
-                  <a:srgbClr val="FFFFFF"/>
-                </a:solidFill>
-              </a:defRPr>
-            </a:pPr>
-          </a:p>
-          <a:p>
-            <a:pPr>
-              <a:spcBef>
-                <a:spcPts val="400"/>
-              </a:spcBef>
-              <a:defRPr sz="1400" b="1">
-                <a:solidFill>
-                  <a:srgbClr val="00C9A7"/>
-                </a:solidFill>
-              </a:defRPr>
-            </a:pPr>
-            <a:r>
-              <a:t>Accuracy: 88.3% (vs 86.0% human agreement)</a:t>
-            </a:r>
-          </a:p>
-          <a:p>
-            <a:pPr>
-              <a:spcBef>
-                <a:spcPts val="400"/>
-              </a:spcBef>
-              <a:defRPr sz="1200" b="0">
-                <a:solidFill>
-                  <a:srgbClr val="00C9A7"/>
-                </a:solidFill>
-              </a:defRPr>
-            </a:pPr>
-            <a:r>
-              <a:t>Above human inter-annotator ceiling!</a:t>
+              <a:t>Why? Established drugs don't need LLM reasoning — colistin is always an AMP, insulin is never one. This eliminates LLM cost, latency, and nondeterminism for known cases.</a:t>
             </a:r>
           </a:p>
         </p:txBody>
@@ -6163,7 +7849,7 @@
               </a:defRPr>
             </a:pPr>
             <a:r>
-              <a:t>Phase 2: Annotation Agents (2/3)</a:t>
+              <a:t>Phase 2: Annotation Agents (1/3)</a:t>
             </a:r>
           </a:p>
         </p:txBody>
@@ -6187,7 +7873,7 @@
           </a:solidFill>
           <a:ln w="25400">
             <a:solidFill>
-              <a:srgbClr val="FF8C42"/>
+              <a:srgbClr val="0096D6"/>
             </a:solidFill>
           </a:ln>
           <a:effectLst/>
@@ -6229,7 +7915,7 @@
             <a:avLst/>
           </a:prstGeom>
           <a:solidFill>
-            <a:srgbClr val="FF8C42"/>
+            <a:srgbClr val="0096D6"/>
           </a:solidFill>
           <a:ln>
             <a:noFill/>
@@ -6265,7 +7951,7 @@
               </a:defRPr>
             </a:pPr>
             <a:r>
-              <a:t>Delivery Mode: How is the drug given?</a:t>
+              <a:t>Classification: Is this an AMP trial?</a:t>
             </a:r>
           </a:p>
         </p:txBody>
@@ -6298,7 +7984,7 @@
               </a:defRPr>
             </a:pPr>
             <a:r>
-              <a:t>Question: What is the route of administration?</a:t>
+              <a:t>Question: Is the trial studying an Antimicrobial Peptide?</a:t>
             </a:r>
           </a:p>
           <a:p>
@@ -6313,7 +7999,7 @@
               </a:defRPr>
             </a:pPr>
             <a:r>
-              <a:t>Output: Injection/Infusion, Oral, Topical, or Other</a:t>
+              <a:t>Output: AMP or Other</a:t>
             </a:r>
           </a:p>
           <a:p>
@@ -6355,7 +8041,37 @@
               </a:defRPr>
             </a:pPr>
             <a:r>
-              <a:t>1. Deterministic extraction from protocol &amp; FDA labels</a:t>
+              <a:t>1. Reference drug lookup (42 known AMPs, 48 known non-AMPs)</a:t>
+            </a:r>
+          </a:p>
+          <a:p>
+            <a:pPr lvl="1">
+              <a:spcBef>
+                <a:spcPts val="400"/>
+              </a:spcBef>
+              <a:defRPr sz="1100" b="0">
+                <a:solidFill>
+                  <a:srgbClr val="A0A0A0"/>
+                </a:solidFill>
+              </a:defRPr>
+            </a:pPr>
+            <a:r>
+              <a:t>Curated from pharmacology literature (colistin, vancomycin, etc.)</a:t>
+            </a:r>
+          </a:p>
+          <a:p>
+            <a:pPr lvl="1">
+              <a:spcBef>
+                <a:spcPts val="400"/>
+              </a:spcBef>
+              <a:defRPr sz="1100" b="0">
+                <a:solidFill>
+                  <a:srgbClr val="A0A0A0"/>
+                </a:solidFill>
+              </a:defRPr>
+            </a:pPr>
+            <a:r>
+              <a:t>Skips LLM for established drugs — speed + consistency</a:t>
             </a:r>
           </a:p>
           <a:p>
@@ -6370,7 +8086,7 @@
               </a:defRPr>
             </a:pPr>
             <a:r>
-              <a:t>2. Route keyword matching (71 keywords across sources)</a:t>
+              <a:t>2. AMP database hits (DRAMP/DBAASP/APD → live lookup)</a:t>
             </a:r>
           </a:p>
           <a:p>
@@ -6385,7 +8101,7 @@
               </a:defRPr>
             </a:pPr>
             <a:r>
-              <a:t>3. Two-pass LLM analysis:</a:t>
+              <a:t>3. Two-pass LLM for novel/ambiguous drugs only:</a:t>
             </a:r>
           </a:p>
           <a:p>
@@ -6400,7 +8116,7 @@
               </a:defRPr>
             </a:pPr>
             <a:r>
-              <a:t>Pass 1: Extract route from protocol, FDA, literature</a:t>
+              <a:t>Pass 1: Extract antimicrobial evidence &amp; mechanism</a:t>
             </a:r>
           </a:p>
           <a:p>
@@ -6415,7 +8131,7 @@
               </a:defRPr>
             </a:pPr>
             <a:r>
-              <a:t>Pass 2: Classify into canonical delivery category</a:t>
+              <a:t>Pass 2: Decision tree (peptide? direct antimicrobial?)</a:t>
             </a:r>
           </a:p>
           <a:p>
@@ -6423,41 +8139,26 @@
               <a:spcBef>
                 <a:spcPts val="400"/>
               </a:spcBef>
-              <a:defRPr sz="1300" b="0">
-                <a:solidFill>
-                  <a:srgbClr val="2D2D3F"/>
-                </a:solidFill>
-              </a:defRPr>
-            </a:pPr>
-            <a:r>
-              <a:t>4. Not-specified override: if all sources say 'no route', force Other</a:t>
-            </a:r>
+              <a:defRPr sz="600" b="0">
+                <a:solidFill>
+                  <a:srgbClr val="FFFFFF"/>
+                </a:solidFill>
+              </a:defRPr>
+            </a:pPr>
           </a:p>
           <a:p>
             <a:pPr>
               <a:spcBef>
                 <a:spcPts val="400"/>
               </a:spcBef>
-              <a:defRPr sz="600" b="0">
-                <a:solidFill>
-                  <a:srgbClr val="FFFFFF"/>
-                </a:solidFill>
-              </a:defRPr>
-            </a:pPr>
-          </a:p>
-          <a:p>
-            <a:pPr>
-              <a:spcBef>
-                <a:spcPts val="400"/>
-              </a:spcBef>
               <a:defRPr sz="1400" b="1">
                 <a:solidFill>
-                  <a:srgbClr val="FF8C42"/>
-                </a:solidFill>
-              </a:defRPr>
-            </a:pPr>
-            <a:r>
-              <a:t>Accuracy: 85.4% (vs 88.9% human agreement)</a:t>
+                  <a:srgbClr val="0096D6"/>
+                </a:solidFill>
+              </a:defRPr>
+            </a:pPr>
+            <a:r>
+              <a:t>Accuracy: 91.4% (vs 93.2% human agreement)</a:t>
             </a:r>
           </a:p>
         </p:txBody>
@@ -6481,7 +8182,7 @@
           </a:solidFill>
           <a:ln w="25400">
             <a:solidFill>
-              <a:srgbClr val="FF5C5C"/>
+              <a:srgbClr val="00C9A7"/>
             </a:solidFill>
           </a:ln>
           <a:effectLst/>
@@ -6523,7 +8224,7 @@
             <a:avLst/>
           </a:prstGeom>
           <a:solidFill>
-            <a:srgbClr val="FF5C5C"/>
+            <a:srgbClr val="00C9A7"/>
           </a:solidFill>
           <a:ln>
             <a:noFill/>
@@ -6559,7 +8260,7 @@
               </a:defRPr>
             </a:pPr>
             <a:r>
-              <a:t>Outcome: Did the trial succeed?</a:t>
+              <a:t>Peptide: Is the drug a peptide?</a:t>
             </a:r>
           </a:p>
         </p:txBody>
@@ -6592,7 +8293,7 @@
               </a:defRPr>
             </a:pPr>
             <a:r>
-              <a:t>Question: What was the trial's clinical outcome?</a:t>
+              <a:t>Question: Is the intervention a peptide molecule (≤100 amino acids)?</a:t>
             </a:r>
           </a:p>
           <a:p>
@@ -6607,7 +8308,7 @@
               </a:defRPr>
             </a:pPr>
             <a:r>
-              <a:t>Output: Positive, Failed, Terminated, Unknown, Recruiting, etc.</a:t>
+              <a:t>Output: True or False</a:t>
             </a:r>
           </a:p>
           <a:p>
@@ -6634,7 +8335,7 @@
               </a:defRPr>
             </a:pPr>
             <a:r>
-              <a:t>How it works (4-tier dossier architecture):</a:t>
+              <a:t>How it works:</a:t>
             </a:r>
           </a:p>
           <a:p>
@@ -6649,7 +8350,37 @@
               </a:defRPr>
             </a:pPr>
             <a:r>
-              <a:t>Tier 1: Deterministic status mapping (Recruiting, Withdrawn)</a:t>
+              <a:t>1. Reference drug lookup (56 known peptides, 30 known non-peptides)</a:t>
+            </a:r>
+          </a:p>
+          <a:p>
+            <a:pPr lvl="1">
+              <a:spcBef>
+                <a:spcPts val="400"/>
+              </a:spcBef>
+              <a:defRPr sz="1100" b="0">
+                <a:solidFill>
+                  <a:srgbClr val="A0A0A0"/>
+                </a:solidFill>
+              </a:defRPr>
+            </a:pPr>
+            <a:r>
+              <a:t>Curated from pharma references (semaglutide, oxytocin, etc.)</a:t>
+            </a:r>
+          </a:p>
+          <a:p>
+            <a:pPr lvl="1">
+              <a:spcBef>
+                <a:spcPts val="400"/>
+              </a:spcBef>
+              <a:defRPr sz="1100" b="0">
+                <a:solidFill>
+                  <a:srgbClr val="A0A0A0"/>
+                </a:solidFill>
+              </a:defRPr>
+            </a:pPr>
+            <a:r>
+              <a:t>Known non-peptides: antibodies, small molecules, nutritional</a:t>
             </a:r>
           </a:p>
           <a:p>
@@ -6664,7 +8395,22 @@
               </a:defRPr>
             </a:pPr>
             <a:r>
-              <a:t>Tier 2: Structured evidence dossier (no LLM yet)</a:t>
+              <a:t>2. UniProt/ChEMBL molecular class lookup (live)</a:t>
+            </a:r>
+          </a:p>
+          <a:p>
+            <a:pPr>
+              <a:spcBef>
+                <a:spcPts val="400"/>
+              </a:spcBef>
+              <a:defRPr sz="1300" b="0">
+                <a:solidFill>
+                  <a:srgbClr val="2D2D3F"/>
+                </a:solidFill>
+              </a:defRPr>
+            </a:pPr>
+            <a:r>
+              <a:t>3. Two-pass LLM for novel/ambiguous drugs only:</a:t>
             </a:r>
           </a:p>
           <a:p>
@@ -6679,7 +8425,7 @@
               </a:defRPr>
             </a:pPr>
             <a:r>
-              <a:t>Extracts: status, results, endpoints, p-values, publications</a:t>
+              <a:t>Pass 1: Extract molecular class, AA length, DB matches</a:t>
             </a:r>
           </a:p>
           <a:p>
@@ -6694,94 +8440,64 @@
               </a:defRPr>
             </a:pPr>
             <a:r>
-              <a:t>Classifies publications as trial-specific vs reviews</a:t>
-            </a:r>
-          </a:p>
-          <a:p>
-            <a:pPr lvl="1">
+              <a:t>Pass 2: Decision tree (peptide class? ≤100 AA?)</a:t>
+            </a:r>
+          </a:p>
+          <a:p>
+            <a:pPr>
               <a:spcBef>
                 <a:spcPts val="400"/>
               </a:spcBef>
+              <a:defRPr sz="1300" b="0">
+                <a:solidFill>
+                  <a:srgbClr val="2D2D3F"/>
+                </a:solidFill>
+              </a:defRPr>
+            </a:pPr>
+            <a:r>
+              <a:t>4. Safety checks: monoclonal antibody → False, nutritional → False</a:t>
+            </a:r>
+          </a:p>
+          <a:p>
+            <a:pPr>
+              <a:spcBef>
+                <a:spcPts val="400"/>
+              </a:spcBef>
+              <a:defRPr sz="600" b="0">
+                <a:solidFill>
+                  <a:srgbClr val="FFFFFF"/>
+                </a:solidFill>
+              </a:defRPr>
+            </a:pPr>
+          </a:p>
+          <a:p>
+            <a:pPr>
+              <a:spcBef>
+                <a:spcPts val="400"/>
+              </a:spcBef>
+              <a:defRPr sz="1400" b="1">
+                <a:solidFill>
+                  <a:srgbClr val="00C9A7"/>
+                </a:solidFill>
+              </a:defRPr>
+            </a:pPr>
+            <a:r>
+              <a:t>Accuracy: 88.3% (vs 86.0% human agreement)</a:t>
+            </a:r>
+          </a:p>
+          <a:p>
+            <a:pPr>
+              <a:spcBef>
+                <a:spcPts val="400"/>
+              </a:spcBef>
               <a:defRPr sz="1200" b="0">
                 <a:solidFill>
-                  <a:srgbClr val="A0A0A0"/>
-                </a:solidFill>
-              </a:defRPr>
-            </a:pPr>
-            <a:r>
-              <a:t>Separates efficacy vs safety-only signals</a:t>
-            </a:r>
-          </a:p>
-          <a:p>
-            <a:pPr>
-              <a:spcBef>
-                <a:spcPts val="400"/>
-              </a:spcBef>
-              <a:defRPr sz="1300" b="0">
-                <a:solidFill>
-                  <a:srgbClr val="2D2D3F"/>
-                </a:solidFill>
-              </a:defRPr>
-            </a:pPr>
-            <a:r>
-              <a:t>Tier 3: Deterministic rules (p&lt;0.05 → Positive, futility → Failed)</a:t>
-            </a:r>
-          </a:p>
-          <a:p>
-            <a:pPr>
-              <a:spcBef>
-                <a:spcPts val="400"/>
-              </a:spcBef>
-              <a:defRPr sz="1300" b="0">
-                <a:solidFill>
-                  <a:srgbClr val="2D2D3F"/>
-                </a:solidFill>
-              </a:defRPr>
-            </a:pPr>
-            <a:r>
-              <a:t>Tier 4: LLM with structured dossier (hardest cases only)</a:t>
-            </a:r>
-          </a:p>
-          <a:p>
-            <a:pPr>
-              <a:spcBef>
-                <a:spcPts val="400"/>
-              </a:spcBef>
-              <a:defRPr sz="600" b="0">
-                <a:solidFill>
-                  <a:srgbClr val="FFFFFF"/>
-                </a:solidFill>
-              </a:defRPr>
-            </a:pPr>
-          </a:p>
-          <a:p>
-            <a:pPr>
-              <a:spcBef>
-                <a:spcPts val="400"/>
-              </a:spcBef>
-              <a:defRPr sz="1400" b="1">
-                <a:solidFill>
-                  <a:srgbClr val="FF5C5C"/>
-                </a:solidFill>
-              </a:defRPr>
-            </a:pPr>
-            <a:r>
-              <a:t>Accuracy: 60.5% (vs 64.3% human agreement)</a:t>
-            </a:r>
-          </a:p>
-          <a:p>
-            <a:pPr>
-              <a:spcBef>
-                <a:spcPts val="400"/>
-              </a:spcBef>
-              <a:defRPr sz="1200" b="0">
-                <a:solidFill>
-                  <a:srgbClr val="FF5C5C"/>
-                </a:solidFill>
-              </a:defRPr>
-            </a:pPr>
-            <a:r>
-              <a:t>Hardest field — even humans disagree 36% of the time</a:t>
+                  <a:srgbClr val="00C9A7"/>
+                </a:solidFill>
+              </a:defRPr>
+            </a:pPr>
+            <a:r>
+              <a:t>Above human inter-annotator ceiling!</a:t>
             </a:r>
           </a:p>
         </p:txBody>
@@ -6840,7 +8556,7 @@
               </a:defRPr>
             </a:pPr>
             <a:r>
-              <a:t>Phase 2: Annotation Agents (3/3)</a:t>
+              <a:t>Phase 2: Annotation Agents (2/3)</a:t>
             </a:r>
           </a:p>
         </p:txBody>
@@ -6864,7 +8580,7 @@
           </a:solidFill>
           <a:ln w="25400">
             <a:solidFill>
-              <a:srgbClr val="A85CFF"/>
+              <a:srgbClr val="FF8C42"/>
             </a:solidFill>
           </a:ln>
           <a:effectLst/>
@@ -6906,7 +8622,7 @@
             <a:avLst/>
           </a:prstGeom>
           <a:solidFill>
-            <a:srgbClr val="A85CFF"/>
+            <a:srgbClr val="FF8C42"/>
           </a:solidFill>
           <a:ln>
             <a:noFill/>
@@ -6942,7 +8658,7 @@
               </a:defRPr>
             </a:pPr>
             <a:r>
-              <a:t>Reason for Failure: Why did it fail?</a:t>
+              <a:t>Delivery Mode: How is the drug given?</a:t>
             </a:r>
           </a:p>
         </p:txBody>
@@ -6975,7 +8691,7 @@
               </a:defRPr>
             </a:pPr>
             <a:r>
-              <a:t>Question: If the trial failed, why?</a:t>
+              <a:t>Question: What is the route of administration?</a:t>
             </a:r>
           </a:p>
           <a:p>
@@ -6990,7 +8706,7 @@
               </a:defRPr>
             </a:pPr>
             <a:r>
-              <a:t>Output: Business Reason, Ineffective, Toxic/Unsafe, Covid, Recruitment, (empty)</a:t>
+              <a:t>Output: Injection/Infusion, Oral, Topical, or Other</a:t>
             </a:r>
           </a:p>
           <a:p>
@@ -7032,7 +8748,7 @@
               </a:defRPr>
             </a:pPr>
             <a:r>
-              <a:t>1. Pre-check: skip if outcome is Positive/Recruiting (no failure)</a:t>
+              <a:t>1. Deterministic extraction from protocol &amp; FDA labels</a:t>
             </a:r>
           </a:p>
           <a:p>
@@ -7047,7 +8763,7 @@
               </a:defRPr>
             </a:pPr>
             <a:r>
-              <a:t>2. Extract whyStopped field from ClinicalTrials.gov</a:t>
+              <a:t>2. Route keyword matching (71 keywords across sources)</a:t>
             </a:r>
           </a:p>
           <a:p>
@@ -7062,7 +8778,7 @@
               </a:defRPr>
             </a:pPr>
             <a:r>
-              <a:t>3. Two-pass LLM:</a:t>
+              <a:t>3. Two-pass LLM analysis:</a:t>
             </a:r>
           </a:p>
           <a:p>
@@ -7077,7 +8793,7 @@
               </a:defRPr>
             </a:pPr>
             <a:r>
-              <a:t>Pass 1: Investigate failure signals in literature</a:t>
+              <a:t>Pass 1: Extract route from protocol, FDA, literature</a:t>
             </a:r>
           </a:p>
           <a:p>
@@ -7092,7 +8808,7 @@
               </a:defRPr>
             </a:pPr>
             <a:r>
-              <a:t>Pass 2: Classify into failure category</a:t>
+              <a:t>Pass 2: Classify into canonical delivery category</a:t>
             </a:r>
           </a:p>
           <a:p>
@@ -7107,7 +8823,7 @@
               </a:defRPr>
             </a:pPr>
             <a:r>
-              <a:t>4. Requires positive evidence of failure reason — never guesses</a:t>
+              <a:t>4. Not-specified override: if all sources say 'no route', force Other</a:t>
             </a:r>
           </a:p>
           <a:p>
@@ -7129,27 +8845,12 @@
               </a:spcBef>
               <a:defRPr sz="1400" b="1">
                 <a:solidFill>
-                  <a:srgbClr val="A85CFF"/>
-                </a:solidFill>
-              </a:defRPr>
-            </a:pPr>
-            <a:r>
-              <a:t>Accuracy: 92.4% (vs 88.6% human agreement)</a:t>
-            </a:r>
-          </a:p>
-          <a:p>
-            <a:pPr>
-              <a:spcBef>
-                <a:spcPts val="400"/>
-              </a:spcBef>
-              <a:defRPr sz="1200" b="0">
-                <a:solidFill>
-                  <a:srgbClr val="A85CFF"/>
-                </a:solidFill>
-              </a:defRPr>
-            </a:pPr>
-            <a:r>
-              <a:t>Above human inter-annotator ceiling!</a:t>
+                  <a:srgbClr val="FF8C42"/>
+                </a:solidFill>
+              </a:defRPr>
+            </a:pPr>
+            <a:r>
+              <a:t>Accuracy: 85.4% (vs 88.9% human agreement)</a:t>
             </a:r>
           </a:p>
         </p:txBody>
@@ -7173,7 +8874,7 @@
           </a:solidFill>
           <a:ln w="25400">
             <a:solidFill>
-              <a:srgbClr val="0096D6"/>
+              <a:srgbClr val="FF5C5C"/>
             </a:solidFill>
           </a:ln>
           <a:effectLst/>
@@ -7215,7 +8916,7 @@
             <a:avLst/>
           </a:prstGeom>
           <a:solidFill>
-            <a:srgbClr val="0096D6"/>
+            <a:srgbClr val="FF5C5C"/>
           </a:solidFill>
           <a:ln>
             <a:noFill/>
@@ -7251,7 +8952,7 @@
               </a:defRPr>
             </a:pPr>
             <a:r>
-              <a:t>Sequence: What is the AA sequence?</a:t>
+              <a:t>Outcome: Did the trial succeed?</a:t>
             </a:r>
           </a:p>
         </p:txBody>
@@ -7284,7 +8985,7 @@
               </a:defRPr>
             </a:pPr>
             <a:r>
-              <a:t>Question: What is the peptide's amino acid sequence?</a:t>
+              <a:t>Question: What was the trial's clinical outcome?</a:t>
             </a:r>
           </a:p>
           <a:p>
@@ -7299,7 +9000,7 @@
               </a:defRPr>
             </a:pPr>
             <a:r>
-              <a:t>Output: Sequence string (e.g. HAEGTFTSDVSS...) or N/A</a:t>
+              <a:t>Output: Positive, Failed, Terminated, Unknown, Recruiting, etc.</a:t>
             </a:r>
           </a:p>
           <a:p>
@@ -7326,7 +9027,7 @@
               </a:defRPr>
             </a:pPr>
             <a:r>
-              <a:t>How it works (fully deterministic — no LLM):</a:t>
+              <a:t>How it works (4-tier dossier architecture):</a:t>
             </a:r>
           </a:p>
           <a:p>
@@ -7341,7 +9042,7 @@
               </a:defRPr>
             </a:pPr>
             <a:r>
-              <a:t>1. Known sequence lookup (~70 drugs with pre-mapped sequences)</a:t>
+              <a:t>Tier 1: Deterministic status mapping (Recruiting, Withdrawn)</a:t>
             </a:r>
           </a:p>
           <a:p>
@@ -7356,7 +9057,7 @@
               </a:defRPr>
             </a:pPr>
             <a:r>
-              <a:t>2. Database priority cascade:</a:t>
+              <a:t>Tier 2: Structured evidence dossier (no LLM yet)</a:t>
             </a:r>
           </a:p>
           <a:p>
@@ -7371,7 +9072,37 @@
               </a:defRPr>
             </a:pPr>
             <a:r>
-              <a:t>DBAASP → APD → ChEMBL HELM → UniProt mature → EBI</a:t>
+              <a:t>Extracts: status, results, endpoints, p-values, publications</a:t>
+            </a:r>
+          </a:p>
+          <a:p>
+            <a:pPr lvl="1">
+              <a:spcBef>
+                <a:spcPts val="400"/>
+              </a:spcBef>
+              <a:defRPr sz="1200" b="0">
+                <a:solidFill>
+                  <a:srgbClr val="A0A0A0"/>
+                </a:solidFill>
+              </a:defRPr>
+            </a:pPr>
+            <a:r>
+              <a:t>Classifies publications as trial-specific vs reviews</a:t>
+            </a:r>
+          </a:p>
+          <a:p>
+            <a:pPr lvl="1">
+              <a:spcBef>
+                <a:spcPts val="400"/>
+              </a:spcBef>
+              <a:defRPr sz="1200" b="0">
+                <a:solidFill>
+                  <a:srgbClr val="A0A0A0"/>
+                </a:solidFill>
+              </a:defRPr>
+            </a:pPr>
+            <a:r>
+              <a:t>Separates efficacy vs safety-only signals</a:t>
             </a:r>
           </a:p>
           <a:p>
@@ -7386,7 +9117,7 @@
               </a:defRPr>
             </a:pPr>
             <a:r>
-              <a:t>3. Score by source reliability × drug name relevance</a:t>
+              <a:t>Tier 3: Deterministic rules (p&lt;0.05 → Positive, futility → Failed)</a:t>
             </a:r>
           </a:p>
           <a:p>
@@ -7401,7 +9132,7 @@
               </a:defRPr>
             </a:pPr>
             <a:r>
-              <a:t>4. Select highest-scoring candidate sequence</a:t>
+              <a:t>Tier 4: LLM with structured dossier (hardest cases only)</a:t>
             </a:r>
           </a:p>
           <a:p>
@@ -7421,14 +9152,14 @@
               <a:spcBef>
                 <a:spcPts val="400"/>
               </a:spcBef>
-              <a:defRPr sz="1300" b="0">
-                <a:solidFill>
-                  <a:srgbClr val="0096D6"/>
-                </a:solidFill>
-              </a:defRPr>
-            </a:pPr>
-            <a:r>
-              <a:t>No LLM needed — pure structured data extraction</a:t>
+              <a:defRPr sz="1400" b="1">
+                <a:solidFill>
+                  <a:srgbClr val="FF5C5C"/>
+                </a:solidFill>
+              </a:defRPr>
+            </a:pPr>
+            <a:r>
+              <a:t>Accuracy: 60.5% (vs 64.3% human agreement)</a:t>
             </a:r>
           </a:p>
           <a:p>
@@ -7436,41 +9167,14 @@
               <a:spcBef>
                 <a:spcPts val="400"/>
               </a:spcBef>
-              <a:defRPr sz="400" b="0">
-                <a:solidFill>
-                  <a:srgbClr val="FFFFFF"/>
-                </a:solidFill>
-              </a:defRPr>
-            </a:pPr>
-          </a:p>
-          <a:p>
-            <a:pPr>
-              <a:spcBef>
-                <a:spcPts val="400"/>
-              </a:spcBef>
-              <a:defRPr sz="1400" b="1">
-                <a:solidFill>
-                  <a:srgbClr val="0096D6"/>
-                </a:solidFill>
-              </a:defRPr>
-            </a:pPr>
-            <a:r>
-              <a:t>Accuracy: 58.3% (vs 52.0% human agreement)</a:t>
-            </a:r>
-          </a:p>
-          <a:p>
-            <a:pPr>
-              <a:spcBef>
-                <a:spcPts val="400"/>
-              </a:spcBef>
               <a:defRPr sz="1200" b="0">
                 <a:solidFill>
-                  <a:srgbClr val="0096D6"/>
-                </a:solidFill>
-              </a:defRPr>
-            </a:pPr>
-            <a:r>
-              <a:t>Above human ceiling! Errors are notation differences (multi-chain, terminal mods)</a:t>
+                  <a:srgbClr val="FF5C5C"/>
+                </a:solidFill>
+              </a:defRPr>
+            </a:pPr>
+            <a:r>
+              <a:t>Hardest field — even humans disagree 36% of the time</a:t>
             </a:r>
           </a:p>
         </p:txBody>
@@ -7529,54 +9233,21 @@
               </a:defRPr>
             </a:pPr>
             <a:r>
-              <a:t>Phase 3: Verification Pipeline</a:t>
-            </a:r>
-          </a:p>
-        </p:txBody>
-      </p:sp>
-      <p:sp>
-        <p:nvSpPr>
-          <p:cNvPr id="3" name="TextBox 2"/>
-          <p:cNvSpPr txBox="1"/>
-          <p:nvPr/>
-        </p:nvSpPr>
-        <p:spPr>
-          <a:xfrm>
-            <a:off x="457200" y="822960"/>
-            <a:ext cx="10972800" cy="457200"/>
-          </a:xfrm>
-          <a:prstGeom prst="rect">
-            <a:avLst/>
-          </a:prstGeom>
-          <a:noFill/>
-        </p:spPr>
-        <p:txBody>
-          <a:bodyPr wrap="square"/>
-          <a:lstStyle/>
-          <a:p>
-            <a:pPr algn="l">
-              <a:defRPr sz="1600" b="0">
-                <a:solidFill>
-                  <a:srgbClr val="A0A0A0"/>
-                </a:solidFill>
-              </a:defRPr>
-            </a:pPr>
-            <a:r>
-              <a:t>Every annotation is independently verified by 3 models with different reasoning styles</a:t>
-            </a:r>
-          </a:p>
-        </p:txBody>
-      </p:sp>
-      <p:sp>
-        <p:nvSpPr>
-          <p:cNvPr id="4" name="Rounded Rectangle 3"/>
+              <a:t>Phase 2: Annotation Agents (3/3)</a:t>
+            </a:r>
+          </a:p>
+        </p:txBody>
+      </p:sp>
+      <p:sp>
+        <p:nvSpPr>
+          <p:cNvPr id="3" name="Rounded Rectangle 2"/>
           <p:cNvSpPr/>
           <p:nvPr/>
         </p:nvSpPr>
         <p:spPr>
           <a:xfrm>
-            <a:off x="457200" y="1645920"/>
-            <a:ext cx="2286000" cy="1371600"/>
+            <a:off x="457200" y="1188720"/>
+            <a:ext cx="5486400" cy="5029200"/>
           </a:xfrm>
           <a:prstGeom prst="roundRect">
             <a:avLst/>
@@ -7586,7 +9257,7 @@
           </a:solidFill>
           <a:ln w="25400">
             <a:solidFill>
-              <a:srgbClr val="00C9A7"/>
+              <a:srgbClr val="A85CFF"/>
             </a:solidFill>
           </a:ln>
           <a:effectLst/>
@@ -7606,106 +9277,32 @@
           </a:fontRef>
         </p:style>
         <p:txBody>
-          <a:bodyPr rtlCol="0" anchor="ctr" wrap="square"/>
-          <a:lstStyle/>
-          <a:p>
-            <a:pPr algn="ctr">
-              <a:defRPr sz="1600" b="1">
-                <a:solidFill>
-                  <a:srgbClr val="00C9A7"/>
-                </a:solidFill>
-              </a:defRPr>
-            </a:pPr>
-            <a:r>
-              <a:t>Primary Annotation</a:t>
-            </a:r>
-          </a:p>
-          <a:p>
-            <a:pPr>
-              <a:spcBef>
-                <a:spcPts val="400"/>
-              </a:spcBef>
-              <a:defRPr sz="1400" b="1">
-                <a:solidFill>
-                  <a:srgbClr val="2D2D3F"/>
-                </a:solidFill>
-              </a:defRPr>
-            </a:pPr>
-            <a:r>
-              <a:t>qwen3:14b</a:t>
-            </a:r>
-          </a:p>
-          <a:p>
-            <a:pPr>
-              <a:spcBef>
-                <a:spcPts val="400"/>
-              </a:spcBef>
-              <a:defRPr sz="1200" b="0">
-                <a:solidFill>
-                  <a:srgbClr val="A0A0A0"/>
-                </a:solidFill>
-              </a:defRPr>
-            </a:pPr>
-            <a:r>
-              <a:t>Makes the initial call</a:t>
-            </a:r>
-          </a:p>
-        </p:txBody>
-      </p:sp>
-      <p:sp>
-        <p:nvSpPr>
-          <p:cNvPr id="5" name="TextBox 4"/>
-          <p:cNvSpPr txBox="1"/>
-          <p:nvPr/>
-        </p:nvSpPr>
-        <p:spPr>
-          <a:xfrm>
-            <a:off x="2834640" y="2011680"/>
-            <a:ext cx="457200" cy="457200"/>
-          </a:xfrm>
-          <a:prstGeom prst="rect">
-            <a:avLst/>
-          </a:prstGeom>
-          <a:noFill/>
-        </p:spPr>
-        <p:txBody>
-          <a:bodyPr wrap="square"/>
-          <a:lstStyle/>
-          <a:p>
-            <a:pPr algn="ctr">
-              <a:defRPr sz="2800" b="0">
-                <a:solidFill>
-                  <a:srgbClr val="A0A0A0"/>
-                </a:solidFill>
-              </a:defRPr>
-            </a:pPr>
-            <a:r>
-              <a:t>➜</a:t>
-            </a:r>
-          </a:p>
-        </p:txBody>
-      </p:sp>
-      <p:sp>
-        <p:nvSpPr>
-          <p:cNvPr id="6" name="Rounded Rectangle 5"/>
+          <a:bodyPr rtlCol="0" anchor="ctr"/>
+          <a:lstStyle/>
+          <a:p>
+            <a:pPr algn="ctr"/>
+          </a:p>
+        </p:txBody>
+      </p:sp>
+      <p:sp>
+        <p:nvSpPr>
+          <p:cNvPr id="4" name="Rounded Rectangle 3"/>
           <p:cNvSpPr/>
           <p:nvPr/>
         </p:nvSpPr>
         <p:spPr>
           <a:xfrm>
-            <a:off x="3474720" y="1371600"/>
-            <a:ext cx="2743200" cy="1325880"/>
+            <a:off x="457200" y="1188720"/>
+            <a:ext cx="5486400" cy="594360"/>
           </a:xfrm>
           <a:prstGeom prst="roundRect">
             <a:avLst/>
           </a:prstGeom>
           <a:solidFill>
-            <a:srgbClr val="FFFFFF"/>
+            <a:srgbClr val="A85CFF"/>
           </a:solidFill>
-          <a:ln w="25400">
-            <a:solidFill>
-              <a:srgbClr val="FF8C42"/>
-            </a:solidFill>
+          <a:ln>
+            <a:noFill/>
           </a:ln>
           <a:effectLst/>
         </p:spPr>
@@ -7727,283 +9324,239 @@
           <a:bodyPr rtlCol="0" anchor="ctr" wrap="square"/>
           <a:lstStyle/>
           <a:p>
+            <a:pPr algn="ctr">
+              <a:spcBef>
+                <a:spcPts val="800"/>
+              </a:spcBef>
+              <a:defRPr sz="1800" b="1">
+                <a:solidFill>
+                  <a:srgbClr val="FFFFFF"/>
+                </a:solidFill>
+              </a:defRPr>
+            </a:pPr>
+            <a:r>
+              <a:t>Reason for Failure: Why did it fail?</a:t>
+            </a:r>
+          </a:p>
+        </p:txBody>
+      </p:sp>
+      <p:sp>
+        <p:nvSpPr>
+          <p:cNvPr id="5" name="TextBox 4"/>
+          <p:cNvSpPr txBox="1"/>
+          <p:nvPr/>
+        </p:nvSpPr>
+        <p:spPr>
+          <a:xfrm>
+            <a:off x="731520" y="1920240"/>
+            <a:ext cx="4937760" cy="4114800"/>
+          </a:xfrm>
+          <a:prstGeom prst="rect">
+            <a:avLst/>
+          </a:prstGeom>
+          <a:noFill/>
+        </p:spPr>
+        <p:txBody>
+          <a:bodyPr wrap="square"/>
+          <a:lstStyle/>
+          <a:p>
             <a:pPr algn="l">
-              <a:spcBef>
-                <a:spcPts val="600"/>
-              </a:spcBef>
               <a:defRPr sz="1400" b="1">
                 <a:solidFill>
-                  <a:srgbClr val="FF8C42"/>
-                </a:solidFill>
-              </a:defRPr>
-            </a:pPr>
-            <a:r>
-              <a:t>Verifier 1: Conservative</a:t>
+                  <a:srgbClr val="2D2D3F"/>
+                </a:solidFill>
+              </a:defRPr>
+            </a:pPr>
+            <a:r>
+              <a:t>Question: If the trial failed, why?</a:t>
             </a:r>
           </a:p>
           <a:p>
             <a:pPr>
               <a:spcBef>
-                <a:spcPts val="200"/>
-              </a:spcBef>
-              <a:defRPr sz="1300" b="1">
+                <a:spcPts val="400"/>
+              </a:spcBef>
+              <a:defRPr sz="1300" b="0">
+                <a:solidFill>
+                  <a:srgbClr val="A0A0A0"/>
+                </a:solidFill>
+              </a:defRPr>
+            </a:pPr>
+            <a:r>
+              <a:t>Output: Business Reason, Ineffective, Toxic/Unsafe, Covid, Recruitment, (empty)</a:t>
+            </a:r>
+          </a:p>
+          <a:p>
+            <a:pPr>
+              <a:spcBef>
+                <a:spcPts val="400"/>
+              </a:spcBef>
+              <a:defRPr sz="600" b="0">
+                <a:solidFill>
+                  <a:srgbClr val="FFFFFF"/>
+                </a:solidFill>
+              </a:defRPr>
+            </a:pPr>
+          </a:p>
+          <a:p>
+            <a:pPr>
+              <a:spcBef>
+                <a:spcPts val="400"/>
+              </a:spcBef>
+              <a:defRPr sz="1400" b="1">
                 <a:solidFill>
                   <a:srgbClr val="2D2D3F"/>
                 </a:solidFill>
               </a:defRPr>
             </a:pPr>
             <a:r>
-              <a:t>gemma2:9b</a:t>
+              <a:t>How it works:</a:t>
             </a:r>
           </a:p>
           <a:p>
             <a:pPr>
               <a:spcBef>
-                <a:spcPts val="200"/>
-              </a:spcBef>
-              <a:defRPr sz="1100" b="0">
+                <a:spcPts val="400"/>
+              </a:spcBef>
+              <a:defRPr sz="1300" b="0">
+                <a:solidFill>
+                  <a:srgbClr val="2D2D3F"/>
+                </a:solidFill>
+              </a:defRPr>
+            </a:pPr>
+            <a:r>
+              <a:t>1. Pre-check: skip if outcome is Positive/Recruiting (no failure)</a:t>
+            </a:r>
+          </a:p>
+          <a:p>
+            <a:pPr>
+              <a:spcBef>
+                <a:spcPts val="400"/>
+              </a:spcBef>
+              <a:defRPr sz="1300" b="0">
+                <a:solidFill>
+                  <a:srgbClr val="2D2D3F"/>
+                </a:solidFill>
+              </a:defRPr>
+            </a:pPr>
+            <a:r>
+              <a:t>2. Extract whyStopped field from ClinicalTrials.gov</a:t>
+            </a:r>
+          </a:p>
+          <a:p>
+            <a:pPr>
+              <a:spcBef>
+                <a:spcPts val="400"/>
+              </a:spcBef>
+              <a:defRPr sz="1300" b="0">
+                <a:solidFill>
+                  <a:srgbClr val="2D2D3F"/>
+                </a:solidFill>
+              </a:defRPr>
+            </a:pPr>
+            <a:r>
+              <a:t>3. Two-pass LLM:</a:t>
+            </a:r>
+          </a:p>
+          <a:p>
+            <a:pPr lvl="1">
+              <a:spcBef>
+                <a:spcPts val="400"/>
+              </a:spcBef>
+              <a:defRPr sz="1200" b="0">
                 <a:solidFill>
                   <a:srgbClr val="A0A0A0"/>
                 </a:solidFill>
               </a:defRPr>
             </a:pPr>
             <a:r>
-              <a:t>Cautious interpretation</a:t>
-            </a:r>
-            <a:br/>
-            <a:r>
-              <a:t>of evidence</a:t>
-            </a:r>
-          </a:p>
-        </p:txBody>
-      </p:sp>
-      <p:sp>
-        <p:nvSpPr>
-          <p:cNvPr id="7" name="Rounded Rectangle 6"/>
+              <a:t>Pass 1: Investigate failure signals in literature</a:t>
+            </a:r>
+          </a:p>
+          <a:p>
+            <a:pPr lvl="1">
+              <a:spcBef>
+                <a:spcPts val="400"/>
+              </a:spcBef>
+              <a:defRPr sz="1200" b="0">
+                <a:solidFill>
+                  <a:srgbClr val="A0A0A0"/>
+                </a:solidFill>
+              </a:defRPr>
+            </a:pPr>
+            <a:r>
+              <a:t>Pass 2: Classify into failure category</a:t>
+            </a:r>
+          </a:p>
+          <a:p>
+            <a:pPr>
+              <a:spcBef>
+                <a:spcPts val="400"/>
+              </a:spcBef>
+              <a:defRPr sz="1300" b="0">
+                <a:solidFill>
+                  <a:srgbClr val="2D2D3F"/>
+                </a:solidFill>
+              </a:defRPr>
+            </a:pPr>
+            <a:r>
+              <a:t>4. Requires positive evidence of failure reason — never guesses</a:t>
+            </a:r>
+          </a:p>
+          <a:p>
+            <a:pPr>
+              <a:spcBef>
+                <a:spcPts val="400"/>
+              </a:spcBef>
+              <a:defRPr sz="600" b="0">
+                <a:solidFill>
+                  <a:srgbClr val="FFFFFF"/>
+                </a:solidFill>
+              </a:defRPr>
+            </a:pPr>
+          </a:p>
+          <a:p>
+            <a:pPr>
+              <a:spcBef>
+                <a:spcPts val="400"/>
+              </a:spcBef>
+              <a:defRPr sz="1400" b="1">
+                <a:solidFill>
+                  <a:srgbClr val="A85CFF"/>
+                </a:solidFill>
+              </a:defRPr>
+            </a:pPr>
+            <a:r>
+              <a:t>Accuracy: 92.4% (vs 88.6% human agreement)</a:t>
+            </a:r>
+          </a:p>
+          <a:p>
+            <a:pPr>
+              <a:spcBef>
+                <a:spcPts val="400"/>
+              </a:spcBef>
+              <a:defRPr sz="1200" b="0">
+                <a:solidFill>
+                  <a:srgbClr val="A85CFF"/>
+                </a:solidFill>
+              </a:defRPr>
+            </a:pPr>
+            <a:r>
+              <a:t>Above human inter-annotator ceiling!</a:t>
+            </a:r>
+          </a:p>
+        </p:txBody>
+      </p:sp>
+      <p:sp>
+        <p:nvSpPr>
+          <p:cNvPr id="6" name="Rounded Rectangle 5"/>
           <p:cNvSpPr/>
           <p:nvPr/>
         </p:nvSpPr>
         <p:spPr>
           <a:xfrm>
-            <a:off x="3474720" y="2880360"/>
-            <a:ext cx="2743200" cy="1325880"/>
-          </a:xfrm>
-          <a:prstGeom prst="roundRect">
-            <a:avLst/>
-          </a:prstGeom>
-          <a:solidFill>
-            <a:srgbClr val="FFFFFF"/>
-          </a:solidFill>
-          <a:ln w="25400">
-            <a:solidFill>
-              <a:srgbClr val="FF8C42"/>
-            </a:solidFill>
-          </a:ln>
-          <a:effectLst/>
-        </p:spPr>
-        <p:style>
-          <a:lnRef idx="1">
-            <a:schemeClr val="accent1"/>
-          </a:lnRef>
-          <a:fillRef idx="3">
-            <a:schemeClr val="accent1"/>
-          </a:fillRef>
-          <a:effectRef idx="2">
-            <a:schemeClr val="accent1"/>
-          </a:effectRef>
-          <a:fontRef idx="minor">
-            <a:schemeClr val="lt1"/>
-          </a:fontRef>
-        </p:style>
-        <p:txBody>
-          <a:bodyPr rtlCol="0" anchor="ctr" wrap="square"/>
-          <a:lstStyle/>
-          <a:p>
-            <a:pPr algn="l">
-              <a:spcBef>
-                <a:spcPts val="600"/>
-              </a:spcBef>
-              <a:defRPr sz="1400" b="1">
-                <a:solidFill>
-                  <a:srgbClr val="FF8C42"/>
-                </a:solidFill>
-              </a:defRPr>
-            </a:pPr>
-            <a:r>
-              <a:t>Verifier 2: Evidence-Strict</a:t>
-            </a:r>
-          </a:p>
-          <a:p>
-            <a:pPr>
-              <a:spcBef>
-                <a:spcPts val="200"/>
-              </a:spcBef>
-              <a:defRPr sz="1300" b="1">
-                <a:solidFill>
-                  <a:srgbClr val="2D2D3F"/>
-                </a:solidFill>
-              </a:defRPr>
-            </a:pPr>
-            <a:r>
-              <a:t>qwen2.5:7b</a:t>
-            </a:r>
-          </a:p>
-          <a:p>
-            <a:pPr>
-              <a:spcBef>
-                <a:spcPts val="200"/>
-              </a:spcBef>
-              <a:defRPr sz="1100" b="0">
-                <a:solidFill>
-                  <a:srgbClr val="A0A0A0"/>
-                </a:solidFill>
-              </a:defRPr>
-            </a:pPr>
-            <a:r>
-              <a:t>Only cites explicit</a:t>
-            </a:r>
-            <a:br/>
-            <a:r>
-              <a:t>facts from sources</a:t>
-            </a:r>
-          </a:p>
-        </p:txBody>
-      </p:sp>
-      <p:sp>
-        <p:nvSpPr>
-          <p:cNvPr id="8" name="Rounded Rectangle 7"/>
-          <p:cNvSpPr/>
-          <p:nvPr/>
-        </p:nvSpPr>
-        <p:spPr>
-          <a:xfrm>
-            <a:off x="3474720" y="4389120"/>
-            <a:ext cx="2743200" cy="1325880"/>
-          </a:xfrm>
-          <a:prstGeom prst="roundRect">
-            <a:avLst/>
-          </a:prstGeom>
-          <a:solidFill>
-            <a:srgbClr val="FFFFFF"/>
-          </a:solidFill>
-          <a:ln w="25400">
-            <a:solidFill>
-              <a:srgbClr val="FF8C42"/>
-            </a:solidFill>
-          </a:ln>
-          <a:effectLst/>
-        </p:spPr>
-        <p:style>
-          <a:lnRef idx="1">
-            <a:schemeClr val="accent1"/>
-          </a:lnRef>
-          <a:fillRef idx="3">
-            <a:schemeClr val="accent1"/>
-          </a:fillRef>
-          <a:effectRef idx="2">
-            <a:schemeClr val="accent1"/>
-          </a:effectRef>
-          <a:fontRef idx="minor">
-            <a:schemeClr val="lt1"/>
-          </a:fontRef>
-        </p:style>
-        <p:txBody>
-          <a:bodyPr rtlCol="0" anchor="ctr" wrap="square"/>
-          <a:lstStyle/>
-          <a:p>
-            <a:pPr algn="l">
-              <a:spcBef>
-                <a:spcPts val="600"/>
-              </a:spcBef>
-              <a:defRPr sz="1400" b="1">
-                <a:solidFill>
-                  <a:srgbClr val="FF8C42"/>
-                </a:solidFill>
-              </a:defRPr>
-            </a:pPr>
-            <a:r>
-              <a:t>Verifier 3: Adversarial</a:t>
-            </a:r>
-          </a:p>
-          <a:p>
-            <a:pPr>
-              <a:spcBef>
-                <a:spcPts val="200"/>
-              </a:spcBef>
-              <a:defRPr sz="1300" b="1">
-                <a:solidFill>
-                  <a:srgbClr val="2D2D3F"/>
-                </a:solidFill>
-              </a:defRPr>
-            </a:pPr>
-            <a:r>
-              <a:t>llama3.1:8b</a:t>
-            </a:r>
-          </a:p>
-          <a:p>
-            <a:pPr>
-              <a:spcBef>
-                <a:spcPts val="200"/>
-              </a:spcBef>
-              <a:defRPr sz="1100" b="0">
-                <a:solidFill>
-                  <a:srgbClr val="A0A0A0"/>
-                </a:solidFill>
-              </a:defRPr>
-            </a:pPr>
-            <a:r>
-              <a:t>Challenges assumptions</a:t>
-            </a:r>
-            <a:br/>
-            <a:r>
-              <a:t>and edge cases</a:t>
-            </a:r>
-          </a:p>
-        </p:txBody>
-      </p:sp>
-      <p:sp>
-        <p:nvSpPr>
-          <p:cNvPr id="9" name="TextBox 8"/>
-          <p:cNvSpPr txBox="1"/>
-          <p:nvPr/>
-        </p:nvSpPr>
-        <p:spPr>
-          <a:xfrm>
-            <a:off x="6309360" y="2560320"/>
-            <a:ext cx="457200" cy="457200"/>
-          </a:xfrm>
-          <a:prstGeom prst="rect">
-            <a:avLst/>
-          </a:prstGeom>
-          <a:noFill/>
-        </p:spPr>
-        <p:txBody>
-          <a:bodyPr wrap="square"/>
-          <a:lstStyle/>
-          <a:p>
-            <a:pPr algn="ctr">
-              <a:defRPr sz="2800" b="0">
-                <a:solidFill>
-                  <a:srgbClr val="A0A0A0"/>
-                </a:solidFill>
-              </a:defRPr>
-            </a:pPr>
-            <a:r>
-              <a:t>➜</a:t>
-            </a:r>
-          </a:p>
-        </p:txBody>
-      </p:sp>
-      <p:sp>
-        <p:nvSpPr>
-          <p:cNvPr id="10" name="Rounded Rectangle 9"/>
-          <p:cNvSpPr/>
-          <p:nvPr/>
-        </p:nvSpPr>
-        <p:spPr>
-          <a:xfrm>
-            <a:off x="6858000" y="1645920"/>
-            <a:ext cx="2286000" cy="1828800"/>
+            <a:off x="6217920" y="1188720"/>
+            <a:ext cx="5486400" cy="5029200"/>
           </a:xfrm>
           <a:prstGeom prst="roundRect">
             <a:avLst/>
@@ -8033,136 +9586,32 @@
           </a:fontRef>
         </p:style>
         <p:txBody>
-          <a:bodyPr rtlCol="0" anchor="ctr" wrap="square"/>
-          <a:lstStyle/>
-          <a:p>
-            <a:pPr algn="ctr">
-              <a:defRPr sz="1600" b="1">
-                <a:solidFill>
-                  <a:srgbClr val="0096D6"/>
-                </a:solidFill>
-              </a:defRPr>
-            </a:pPr>
-            <a:r>
-              <a:t>Consensus Check</a:t>
-            </a:r>
-          </a:p>
-          <a:p>
-            <a:pPr>
-              <a:spcBef>
-                <a:spcPts val="400"/>
-              </a:spcBef>
-              <a:defRPr sz="1300" b="0">
-                <a:solidFill>
-                  <a:srgbClr val="2D2D3F"/>
-                </a:solidFill>
-              </a:defRPr>
-            </a:pPr>
-            <a:r>
-              <a:t>2/3 verifiers must agree</a:t>
-            </a:r>
-          </a:p>
-          <a:p>
-            <a:pPr>
-              <a:spcBef>
-                <a:spcPts val="400"/>
-              </a:spcBef>
-              <a:defRPr sz="1300" b="0">
-                <a:solidFill>
-                  <a:srgbClr val="2D2D3F"/>
-                </a:solidFill>
-              </a:defRPr>
-            </a:pPr>
-            <a:r>
-              <a:t>with primary annotation</a:t>
-            </a:r>
-          </a:p>
-          <a:p>
-            <a:pPr>
-              <a:spcBef>
-                <a:spcPts val="400"/>
-              </a:spcBef>
-              <a:defRPr sz="1300" b="1">
-                <a:solidFill>
-                  <a:srgbClr val="00C9A7"/>
-                </a:solidFill>
-              </a:defRPr>
-            </a:pPr>
-            <a:r>
-              <a:t>If yes → Accept</a:t>
-            </a:r>
-          </a:p>
-          <a:p>
-            <a:pPr>
-              <a:spcBef>
-                <a:spcPts val="400"/>
-              </a:spcBef>
-              <a:defRPr sz="1300" b="1">
-                <a:solidFill>
-                  <a:srgbClr val="FF5C5C"/>
-                </a:solidFill>
-              </a:defRPr>
-            </a:pPr>
-            <a:r>
-              <a:t>If no → Reconcile</a:t>
-            </a:r>
-          </a:p>
-        </p:txBody>
-      </p:sp>
-      <p:sp>
-        <p:nvSpPr>
-          <p:cNvPr id="11" name="TextBox 10"/>
-          <p:cNvSpPr txBox="1"/>
-          <p:nvPr/>
-        </p:nvSpPr>
-        <p:spPr>
-          <a:xfrm>
-            <a:off x="9235440" y="2286000"/>
-            <a:ext cx="457200" cy="457200"/>
-          </a:xfrm>
-          <a:prstGeom prst="rect">
-            <a:avLst/>
-          </a:prstGeom>
-          <a:noFill/>
-        </p:spPr>
-        <p:txBody>
-          <a:bodyPr wrap="square"/>
-          <a:lstStyle/>
-          <a:p>
-            <a:pPr algn="ctr">
-              <a:defRPr sz="2800" b="0">
-                <a:solidFill>
-                  <a:srgbClr val="A0A0A0"/>
-                </a:solidFill>
-              </a:defRPr>
-            </a:pPr>
-            <a:r>
-              <a:t>➜</a:t>
-            </a:r>
-          </a:p>
-        </p:txBody>
-      </p:sp>
-      <p:sp>
-        <p:nvSpPr>
-          <p:cNvPr id="12" name="Rounded Rectangle 11"/>
+          <a:bodyPr rtlCol="0" anchor="ctr"/>
+          <a:lstStyle/>
+          <a:p>
+            <a:pPr algn="ctr"/>
+          </a:p>
+        </p:txBody>
+      </p:sp>
+      <p:sp>
+        <p:nvSpPr>
+          <p:cNvPr id="7" name="Rounded Rectangle 6"/>
           <p:cNvSpPr/>
           <p:nvPr/>
         </p:nvSpPr>
         <p:spPr>
           <a:xfrm>
-            <a:off x="9692640" y="1645920"/>
-            <a:ext cx="2103120" cy="1828800"/>
+            <a:off x="6217920" y="1188720"/>
+            <a:ext cx="5486400" cy="594360"/>
           </a:xfrm>
           <a:prstGeom prst="roundRect">
             <a:avLst/>
           </a:prstGeom>
           <a:solidFill>
-            <a:srgbClr val="FFFFFF"/>
+            <a:srgbClr val="0096D6"/>
           </a:solidFill>
-          <a:ln w="25400">
-            <a:solidFill>
-              <a:srgbClr val="FF5C5C"/>
-            </a:solidFill>
+          <a:ln>
+            <a:noFill/>
           </a:ln>
           <a:effectLst/>
         </p:spPr>
@@ -8185,14 +9634,50 @@
           <a:lstStyle/>
           <a:p>
             <a:pPr algn="ctr">
-              <a:defRPr sz="1600" b="1">
-                <a:solidFill>
-                  <a:srgbClr val="FF5C5C"/>
-                </a:solidFill>
-              </a:defRPr>
-            </a:pPr>
-            <a:r>
-              <a:t>Reconciler</a:t>
+              <a:spcBef>
+                <a:spcPts val="800"/>
+              </a:spcBef>
+              <a:defRPr sz="1800" b="1">
+                <a:solidFill>
+                  <a:srgbClr val="FFFFFF"/>
+                </a:solidFill>
+              </a:defRPr>
+            </a:pPr>
+            <a:r>
+              <a:t>Sequence: What is the AA sequence?</a:t>
+            </a:r>
+          </a:p>
+        </p:txBody>
+      </p:sp>
+      <p:sp>
+        <p:nvSpPr>
+          <p:cNvPr id="8" name="TextBox 7"/>
+          <p:cNvSpPr txBox="1"/>
+          <p:nvPr/>
+        </p:nvSpPr>
+        <p:spPr>
+          <a:xfrm>
+            <a:off x="6492240" y="1920240"/>
+            <a:ext cx="4937760" cy="4114800"/>
+          </a:xfrm>
+          <a:prstGeom prst="rect">
+            <a:avLst/>
+          </a:prstGeom>
+          <a:noFill/>
+        </p:spPr>
+        <p:txBody>
+          <a:bodyPr wrap="square"/>
+          <a:lstStyle/>
+          <a:p>
+            <a:pPr algn="l">
+              <a:defRPr sz="1400" b="1">
+                <a:solidFill>
+                  <a:srgbClr val="2D2D3F"/>
+                </a:solidFill>
+              </a:defRPr>
+            </a:pPr>
+            <a:r>
+              <a:t>Question: What is the peptide's amino acid sequence?</a:t>
             </a:r>
           </a:p>
           <a:p>
@@ -8200,14 +9685,41 @@
               <a:spcBef>
                 <a:spcPts val="400"/>
               </a:spcBef>
-              <a:defRPr sz="1300" b="1">
+              <a:defRPr sz="1300" b="0">
+                <a:solidFill>
+                  <a:srgbClr val="A0A0A0"/>
+                </a:solidFill>
+              </a:defRPr>
+            </a:pPr>
+            <a:r>
+              <a:t>Output: Sequence string (e.g. HAEGTFTSDVSS...) or N/A</a:t>
+            </a:r>
+          </a:p>
+          <a:p>
+            <a:pPr>
+              <a:spcBef>
+                <a:spcPts val="400"/>
+              </a:spcBef>
+              <a:defRPr sz="600" b="0">
+                <a:solidFill>
+                  <a:srgbClr val="FFFFFF"/>
+                </a:solidFill>
+              </a:defRPr>
+            </a:pPr>
+          </a:p>
+          <a:p>
+            <a:pPr>
+              <a:spcBef>
+                <a:spcPts val="400"/>
+              </a:spcBef>
+              <a:defRPr sz="1400" b="1">
                 <a:solidFill>
                   <a:srgbClr val="2D2D3F"/>
                 </a:solidFill>
               </a:defRPr>
             </a:pPr>
             <a:r>
-              <a:t>qwen3:14b</a:t>
+              <a:t>How it works (fully deterministic — no LLM):</a:t>
             </a:r>
           </a:p>
           <a:p>
@@ -8215,6 +9727,36 @@
               <a:spcBef>
                 <a:spcPts val="400"/>
               </a:spcBef>
+              <a:defRPr sz="1300" b="0">
+                <a:solidFill>
+                  <a:srgbClr val="2D2D3F"/>
+                </a:solidFill>
+              </a:defRPr>
+            </a:pPr>
+            <a:r>
+              <a:t>1. Known sequence lookup (~70 drugs with pre-mapped sequences)</a:t>
+            </a:r>
+          </a:p>
+          <a:p>
+            <a:pPr>
+              <a:spcBef>
+                <a:spcPts val="400"/>
+              </a:spcBef>
+              <a:defRPr sz="1300" b="0">
+                <a:solidFill>
+                  <a:srgbClr val="2D2D3F"/>
+                </a:solidFill>
+              </a:defRPr>
+            </a:pPr>
+            <a:r>
+              <a:t>2. Database priority cascade:</a:t>
+            </a:r>
+          </a:p>
+          <a:p>
+            <a:pPr lvl="1">
+              <a:spcBef>
+                <a:spcPts val="400"/>
+              </a:spcBef>
               <a:defRPr sz="1200" b="0">
                 <a:solidFill>
                   <a:srgbClr val="A0A0A0"/>
@@ -8222,7 +9764,7 @@
               </a:defRPr>
             </a:pPr>
             <a:r>
-              <a:t>Sees ALL opinions</a:t>
+              <a:t>DBAASP → APD → ChEMBL HELM → UniProt mature → EBI</a:t>
             </a:r>
           </a:p>
           <a:p>
@@ -8230,129 +9772,98 @@
               <a:spcBef>
                 <a:spcPts val="400"/>
               </a:spcBef>
+              <a:defRPr sz="1300" b="0">
+                <a:solidFill>
+                  <a:srgbClr val="2D2D3F"/>
+                </a:solidFill>
+              </a:defRPr>
+            </a:pPr>
+            <a:r>
+              <a:t>3. Score by source reliability × drug name relevance</a:t>
+            </a:r>
+          </a:p>
+          <a:p>
+            <a:pPr>
+              <a:spcBef>
+                <a:spcPts val="400"/>
+              </a:spcBef>
+              <a:defRPr sz="1300" b="0">
+                <a:solidFill>
+                  <a:srgbClr val="2D2D3F"/>
+                </a:solidFill>
+              </a:defRPr>
+            </a:pPr>
+            <a:r>
+              <a:t>4. Select highest-scoring candidate sequence</a:t>
+            </a:r>
+          </a:p>
+          <a:p>
+            <a:pPr>
+              <a:spcBef>
+                <a:spcPts val="400"/>
+              </a:spcBef>
+              <a:defRPr sz="600" b="0">
+                <a:solidFill>
+                  <a:srgbClr val="FFFFFF"/>
+                </a:solidFill>
+              </a:defRPr>
+            </a:pPr>
+          </a:p>
+          <a:p>
+            <a:pPr>
+              <a:spcBef>
+                <a:spcPts val="400"/>
+              </a:spcBef>
+              <a:defRPr sz="1300" b="0">
+                <a:solidFill>
+                  <a:srgbClr val="0096D6"/>
+                </a:solidFill>
+              </a:defRPr>
+            </a:pPr>
+            <a:r>
+              <a:t>No LLM needed — pure structured data extraction</a:t>
+            </a:r>
+          </a:p>
+          <a:p>
+            <a:pPr>
+              <a:spcBef>
+                <a:spcPts val="400"/>
+              </a:spcBef>
+              <a:defRPr sz="400" b="0">
+                <a:solidFill>
+                  <a:srgbClr val="FFFFFF"/>
+                </a:solidFill>
+              </a:defRPr>
+            </a:pPr>
+          </a:p>
+          <a:p>
+            <a:pPr>
+              <a:spcBef>
+                <a:spcPts val="400"/>
+              </a:spcBef>
+              <a:defRPr sz="1400" b="1">
+                <a:solidFill>
+                  <a:srgbClr val="0096D6"/>
+                </a:solidFill>
+              </a:defRPr>
+            </a:pPr>
+            <a:r>
+              <a:t>Accuracy: 58.3% (vs 52.0% human agreement)</a:t>
+            </a:r>
+          </a:p>
+          <a:p>
+            <a:pPr>
+              <a:spcBef>
+                <a:spcPts val="400"/>
+              </a:spcBef>
               <a:defRPr sz="1200" b="0">
                 <a:solidFill>
-                  <a:srgbClr val="A0A0A0"/>
-                </a:solidFill>
-              </a:defRPr>
-            </a:pPr>
-            <a:r>
-              <a:t>Makes final decision</a:t>
-            </a:r>
-          </a:p>
-          <a:p>
-            <a:pPr>
-              <a:spcBef>
-                <a:spcPts val="400"/>
-              </a:spcBef>
-              <a:defRPr sz="1200" b="0">
-                <a:solidFill>
-                  <a:srgbClr val="A0A0A0"/>
-                </a:solidFill>
-              </a:defRPr>
-            </a:pPr>
-            <a:r>
-              <a:t>with full evidence</a:t>
-            </a:r>
-          </a:p>
-        </p:txBody>
-      </p:sp>
-      <p:sp>
-        <p:nvSpPr>
-          <p:cNvPr id="13" name="Rounded Rectangle 12"/>
-          <p:cNvSpPr/>
-          <p:nvPr/>
-        </p:nvSpPr>
-        <p:spPr>
-          <a:xfrm>
-            <a:off x="457200" y="4846320"/>
-            <a:ext cx="11247120" cy="1371600"/>
-          </a:xfrm>
-          <a:prstGeom prst="roundRect">
-            <a:avLst/>
-          </a:prstGeom>
-          <a:solidFill>
-            <a:srgbClr val="FDF0E0"/>
-          </a:solidFill>
-          <a:ln w="12700">
-            <a:solidFill>
-              <a:srgbClr val="FF8C42"/>
-            </a:solidFill>
-          </a:ln>
-          <a:effectLst/>
-        </p:spPr>
-        <p:style>
-          <a:lnRef idx="1">
-            <a:schemeClr val="accent1"/>
-          </a:lnRef>
-          <a:fillRef idx="3">
-            <a:schemeClr val="accent1"/>
-          </a:fillRef>
-          <a:effectRef idx="2">
-            <a:schemeClr val="accent1"/>
-          </a:effectRef>
-          <a:fontRef idx="minor">
-            <a:schemeClr val="lt1"/>
-          </a:fontRef>
-        </p:style>
-        <p:txBody>
-          <a:bodyPr rtlCol="0" anchor="ctr" wrap="square"/>
-          <a:lstStyle/>
-          <a:p>
-            <a:pPr algn="l">
-              <a:defRPr sz="1600" b="1">
-                <a:solidFill>
-                  <a:srgbClr val="FF8C42"/>
-                </a:solidFill>
-              </a:defRPr>
-            </a:pPr>
-            <a:r>
-              <a:t>Skip Verification</a:t>
-            </a:r>
-          </a:p>
-          <a:p>
-            <a:pPr>
-              <a:spcBef>
-                <a:spcPts val="400"/>
-              </a:spcBef>
-              <a:defRPr sz="1300" b="0">
-                <a:solidFill>
-                  <a:srgbClr val="2D2D3F"/>
-                </a:solidFill>
-              </a:defRPr>
-            </a:pPr>
-            <a:r>
-              <a:t>High-confidence deterministic annotations skip the verification pipeline entirely (e.g., known peptide drugs, registry status = Recruiting)</a:t>
-            </a:r>
-          </a:p>
-          <a:p>
-            <a:pPr>
-              <a:spcBef>
-                <a:spcPts val="400"/>
-              </a:spcBef>
-              <a:defRPr sz="1300" b="0">
-                <a:solidFill>
-                  <a:srgbClr val="2D2D3F"/>
-                </a:solidFill>
-              </a:defRPr>
-            </a:pPr>
-            <a:r>
-              <a:t>Publication-anchored annotations with efficacy evidence also skip verification to prevent reconciler from overriding correct calls</a:t>
-            </a:r>
-          </a:p>
-          <a:p>
-            <a:pPr>
-              <a:spcBef>
-                <a:spcPts val="400"/>
-              </a:spcBef>
-              <a:defRPr sz="1300" b="0">
-                <a:solidFill>
-                  <a:srgbClr val="2D2D3F"/>
-                </a:solidFill>
-              </a:defRPr>
-            </a:pPr>
-            <a:r>
-              <a:t>Cognitive diversity: 4 different model families (Google, Alibaba, Meta, Alibaba) reduce systematic bias</a:t>
+                  <a:srgbClr val="0096D6"/>
+                </a:solidFill>
+              </a:defRPr>
+            </a:pPr>
+            <a:r>
+              <a:t>Above human ceiling! Errors are notation differences (multi-chain, terminal mods)</a:t>
             </a:r>
           </a:p>
         </p:txBody>
@@ -8411,7 +9922,7 @@
               </a:defRPr>
             </a:pPr>
             <a:r>
-              <a:t>Accuracy vs Human Annotators (94-NCT Validation)</a:t>
+              <a:t>Phase 3: Verification Pipeline</a:t>
             </a:r>
           </a:p>
         </p:txBody>
@@ -8444,7 +9955,7 @@
               </a:defRPr>
             </a:pPr>
             <a:r>
-              <a:t>Agent agreement with expert annotator R1 — compared to human inter-annotator agreement (R1 vs R2)</a:t>
+              <a:t>Every annotation is independently verified by 3 models with different reasoning styles</a:t>
             </a:r>
           </a:p>
         </p:txBody>
@@ -8457,17 +9968,19 @@
         </p:nvSpPr>
         <p:spPr>
           <a:xfrm>
-            <a:off x="914400" y="1463040"/>
-            <a:ext cx="10332720" cy="548640"/>
+            <a:off x="457200" y="1645920"/>
+            <a:ext cx="2286000" cy="1371600"/>
           </a:xfrm>
           <a:prstGeom prst="roundRect">
             <a:avLst/>
           </a:prstGeom>
           <a:solidFill>
-            <a:srgbClr val="1A1A2E"/>
+            <a:srgbClr val="FFFFFF"/>
           </a:solidFill>
-          <a:ln>
-            <a:noFill/>
+          <a:ln w="25400">
+            <a:solidFill>
+              <a:srgbClr val="00C9A7"/>
+            </a:solidFill>
           </a:ln>
           <a:effectLst/>
         </p:spPr>
@@ -8489,32 +10002,92 @@
           <a:bodyPr rtlCol="0" anchor="ctr" wrap="square"/>
           <a:lstStyle/>
           <a:p>
-            <a:pPr algn="l">
-              <a:spcBef>
-                <a:spcPts val="600"/>
+            <a:pPr algn="ctr">
+              <a:defRPr sz="1600" b="1">
+                <a:solidFill>
+                  <a:srgbClr val="00C9A7"/>
+                </a:solidFill>
+              </a:defRPr>
+            </a:pPr>
+            <a:r>
+              <a:t>Primary Annotation</a:t>
+            </a:r>
+          </a:p>
+          <a:p>
+            <a:pPr>
+              <a:spcBef>
+                <a:spcPts val="400"/>
               </a:spcBef>
               <a:defRPr sz="1400" b="1">
                 <a:solidFill>
-                  <a:srgbClr val="FFFFFF"/>
-                </a:solidFill>
-              </a:defRPr>
-            </a:pPr>
-            <a:r>
-              <a:t>Field                                          Agent vs R1          Human R1 vs R2          Status</a:t>
-            </a:r>
-          </a:p>
-        </p:txBody>
-      </p:sp>
-      <p:sp>
-        <p:nvSpPr>
-          <p:cNvPr id="5" name="Rounded Rectangle 4"/>
+                  <a:srgbClr val="2D2D3F"/>
+                </a:solidFill>
+              </a:defRPr>
+            </a:pPr>
+            <a:r>
+              <a:t>qwen3:14b</a:t>
+            </a:r>
+          </a:p>
+          <a:p>
+            <a:pPr>
+              <a:spcBef>
+                <a:spcPts val="400"/>
+              </a:spcBef>
+              <a:defRPr sz="1200" b="0">
+                <a:solidFill>
+                  <a:srgbClr val="A0A0A0"/>
+                </a:solidFill>
+              </a:defRPr>
+            </a:pPr>
+            <a:r>
+              <a:t>Makes the initial call</a:t>
+            </a:r>
+          </a:p>
+        </p:txBody>
+      </p:sp>
+      <p:sp>
+        <p:nvSpPr>
+          <p:cNvPr id="5" name="TextBox 4"/>
+          <p:cNvSpPr txBox="1"/>
+          <p:nvPr/>
+        </p:nvSpPr>
+        <p:spPr>
+          <a:xfrm>
+            <a:off x="2834640" y="2011680"/>
+            <a:ext cx="457200" cy="457200"/>
+          </a:xfrm>
+          <a:prstGeom prst="rect">
+            <a:avLst/>
+          </a:prstGeom>
+          <a:noFill/>
+        </p:spPr>
+        <p:txBody>
+          <a:bodyPr wrap="square"/>
+          <a:lstStyle/>
+          <a:p>
+            <a:pPr algn="ctr">
+              <a:defRPr sz="2800" b="0">
+                <a:solidFill>
+                  <a:srgbClr val="A0A0A0"/>
+                </a:solidFill>
+              </a:defRPr>
+            </a:pPr>
+            <a:r>
+              <a:t>➜</a:t>
+            </a:r>
+          </a:p>
+        </p:txBody>
+      </p:sp>
+      <p:sp>
+        <p:nvSpPr>
+          <p:cNvPr id="6" name="Rounded Rectangle 5"/>
           <p:cNvSpPr/>
           <p:nvPr/>
         </p:nvSpPr>
         <p:spPr>
           <a:xfrm>
-            <a:off x="914400" y="2103120"/>
-            <a:ext cx="10332720" cy="594360"/>
+            <a:off x="3474720" y="1371600"/>
+            <a:ext cx="2743200" cy="1325880"/>
           </a:xfrm>
           <a:prstGeom prst="roundRect">
             <a:avLst/>
@@ -8522,8 +10095,10 @@
           <a:solidFill>
             <a:srgbClr val="FFFFFF"/>
           </a:solidFill>
-          <a:ln>
-            <a:noFill/>
+          <a:ln w="25400">
+            <a:solidFill>
+              <a:srgbClr val="FF8C42"/>
+            </a:solidFill>
           </a:ln>
           <a:effectLst/>
         </p:spPr>
@@ -8542,42 +10117,55 @@
           </a:fontRef>
         </p:style>
         <p:txBody>
-          <a:bodyPr rtlCol="0" anchor="ctr"/>
-          <a:lstStyle/>
-          <a:p>
-            <a:pPr algn="ctr"/>
-          </a:p>
-        </p:txBody>
-      </p:sp>
-      <p:sp>
-        <p:nvSpPr>
-          <p:cNvPr id="6" name="TextBox 5"/>
-          <p:cNvSpPr txBox="1"/>
-          <p:nvPr/>
-        </p:nvSpPr>
-        <p:spPr>
-          <a:xfrm>
-            <a:off x="1097280" y="2194560"/>
-            <a:ext cx="2743200" cy="457200"/>
-          </a:xfrm>
-          <a:prstGeom prst="rect">
-            <a:avLst/>
-          </a:prstGeom>
-          <a:noFill/>
-        </p:spPr>
-        <p:txBody>
-          <a:bodyPr wrap="square"/>
+          <a:bodyPr rtlCol="0" anchor="ctr" wrap="square"/>
           <a:lstStyle/>
           <a:p>
             <a:pPr algn="l">
-              <a:defRPr sz="1600" b="1">
-                <a:solidFill>
-                  <a:srgbClr val="0096D6"/>
-                </a:solidFill>
-              </a:defRPr>
-            </a:pPr>
-            <a:r>
-              <a:t>Classification</a:t>
+              <a:spcBef>
+                <a:spcPts val="600"/>
+              </a:spcBef>
+              <a:defRPr sz="1400" b="1">
+                <a:solidFill>
+                  <a:srgbClr val="FF8C42"/>
+                </a:solidFill>
+              </a:defRPr>
+            </a:pPr>
+            <a:r>
+              <a:t>Verifier 1: Conservative</a:t>
+            </a:r>
+          </a:p>
+          <a:p>
+            <a:pPr>
+              <a:spcBef>
+                <a:spcPts val="200"/>
+              </a:spcBef>
+              <a:defRPr sz="1300" b="1">
+                <a:solidFill>
+                  <a:srgbClr val="2D2D3F"/>
+                </a:solidFill>
+              </a:defRPr>
+            </a:pPr>
+            <a:r>
+              <a:t>gemma2:9b</a:t>
+            </a:r>
+          </a:p>
+          <a:p>
+            <a:pPr>
+              <a:spcBef>
+                <a:spcPts val="200"/>
+              </a:spcBef>
+              <a:defRPr sz="1100" b="0">
+                <a:solidFill>
+                  <a:srgbClr val="A0A0A0"/>
+                </a:solidFill>
+              </a:defRPr>
+            </a:pPr>
+            <a:r>
+              <a:t>Cautious interpretation</a:t>
+            </a:r>
+            <a:br/>
+            <a:r>
+              <a:t>of evidence</a:t>
             </a:r>
           </a:p>
         </p:txBody>
@@ -8590,17 +10178,19 @@
         </p:nvSpPr>
         <p:spPr>
           <a:xfrm>
-            <a:off x="4389120" y="2212848"/>
-            <a:ext cx="2925165" cy="365760"/>
+            <a:off x="3474720" y="2880360"/>
+            <a:ext cx="2743200" cy="1325880"/>
           </a:xfrm>
           <a:prstGeom prst="roundRect">
             <a:avLst/>
           </a:prstGeom>
           <a:solidFill>
-            <a:srgbClr val="0096D6"/>
+            <a:srgbClr val="FFFFFF"/>
           </a:solidFill>
-          <a:ln>
-            <a:noFill/>
+          <a:ln w="25400">
+            <a:solidFill>
+              <a:srgbClr val="FF8C42"/>
+            </a:solidFill>
           </a:ln>
           <a:effectLst/>
         </p:spPr>
@@ -8624,16 +10214,50 @@
           <a:p>
             <a:pPr algn="l">
               <a:spcBef>
-                <a:spcPts val="400"/>
+                <a:spcPts val="600"/>
+              </a:spcBef>
+              <a:defRPr sz="1400" b="1">
+                <a:solidFill>
+                  <a:srgbClr val="FF8C42"/>
+                </a:solidFill>
+              </a:defRPr>
+            </a:pPr>
+            <a:r>
+              <a:t>Verifier 2: Evidence-Strict</a:t>
+            </a:r>
+          </a:p>
+          <a:p>
+            <a:pPr>
+              <a:spcBef>
+                <a:spcPts val="200"/>
               </a:spcBef>
               <a:defRPr sz="1300" b="1">
                 <a:solidFill>
-                  <a:srgbClr val="FFFFFF"/>
-                </a:solidFill>
-              </a:defRPr>
-            </a:pPr>
-            <a:r>
-              <a:t>  91.4%</a:t>
+                  <a:srgbClr val="2D2D3F"/>
+                </a:solidFill>
+              </a:defRPr>
+            </a:pPr>
+            <a:r>
+              <a:t>qwen2.5:7b</a:t>
+            </a:r>
+          </a:p>
+          <a:p>
+            <a:pPr>
+              <a:spcBef>
+                <a:spcPts val="200"/>
+              </a:spcBef>
+              <a:defRPr sz="1100" b="0">
+                <a:solidFill>
+                  <a:srgbClr val="A0A0A0"/>
+                </a:solidFill>
+              </a:defRPr>
+            </a:pPr>
+            <a:r>
+              <a:t>Only cites explicit</a:t>
+            </a:r>
+            <a:br/>
+            <a:r>
+              <a:t>facts from sources</a:t>
             </a:r>
           </a:p>
         </p:txBody>
@@ -8646,17 +10270,19 @@
         </p:nvSpPr>
         <p:spPr>
           <a:xfrm>
-            <a:off x="7772400" y="2212848"/>
-            <a:ext cx="2982772" cy="365760"/>
+            <a:off x="3474720" y="4389120"/>
+            <a:ext cx="2743200" cy="1325880"/>
           </a:xfrm>
           <a:prstGeom prst="roundRect">
             <a:avLst/>
           </a:prstGeom>
           <a:solidFill>
-            <a:srgbClr val="A0A0A0"/>
+            <a:srgbClr val="FFFFFF"/>
           </a:solidFill>
-          <a:ln>
-            <a:noFill/>
+          <a:ln w="25400">
+            <a:solidFill>
+              <a:srgbClr val="FF8C42"/>
+            </a:solidFill>
           </a:ln>
           <a:effectLst/>
         </p:spPr>
@@ -8680,16 +10306,50 @@
           <a:p>
             <a:pPr algn="l">
               <a:spcBef>
-                <a:spcPts val="400"/>
+                <a:spcPts val="600"/>
+              </a:spcBef>
+              <a:defRPr sz="1400" b="1">
+                <a:solidFill>
+                  <a:srgbClr val="FF8C42"/>
+                </a:solidFill>
+              </a:defRPr>
+            </a:pPr>
+            <a:r>
+              <a:t>Verifier 3: Adversarial</a:t>
+            </a:r>
+          </a:p>
+          <a:p>
+            <a:pPr>
+              <a:spcBef>
+                <a:spcPts val="200"/>
               </a:spcBef>
               <a:defRPr sz="1300" b="1">
                 <a:solidFill>
-                  <a:srgbClr val="FFFFFF"/>
-                </a:solidFill>
-              </a:defRPr>
-            </a:pPr>
-            <a:r>
-              <a:t>  93.2%</a:t>
+                  <a:srgbClr val="2D2D3F"/>
+                </a:solidFill>
+              </a:defRPr>
+            </a:pPr>
+            <a:r>
+              <a:t>llama3.1:8b</a:t>
+            </a:r>
+          </a:p>
+          <a:p>
+            <a:pPr>
+              <a:spcBef>
+                <a:spcPts val="200"/>
+              </a:spcBef>
+              <a:defRPr sz="1100" b="0">
+                <a:solidFill>
+                  <a:srgbClr val="A0A0A0"/>
+                </a:solidFill>
+              </a:defRPr>
+            </a:pPr>
+            <a:r>
+              <a:t>Challenges assumptions</a:t>
+            </a:r>
+            <a:br/>
+            <a:r>
+              <a:t>and edge cases</a:t>
             </a:r>
           </a:p>
         </p:txBody>
@@ -8702,8 +10362,8 @@
         </p:nvSpPr>
         <p:spPr>
           <a:xfrm>
-            <a:off x="10058400" y="2194560"/>
-            <a:ext cx="1371600" cy="457200"/>
+            <a:off x="6309360" y="2560320"/>
+            <a:ext cx="457200" cy="457200"/>
           </a:xfrm>
           <a:prstGeom prst="rect">
             <a:avLst/>
@@ -8714,15 +10374,15 @@
           <a:bodyPr wrap="square"/>
           <a:lstStyle/>
           <a:p>
-            <a:pPr algn="l">
-              <a:defRPr sz="1200" b="0">
+            <a:pPr algn="ctr">
+              <a:defRPr sz="2800" b="0">
                 <a:solidFill>
                   <a:srgbClr val="A0A0A0"/>
                 </a:solidFill>
               </a:defRPr>
             </a:pPr>
             <a:r>
-              <a:t>1.8pp gap</a:t>
+              <a:t>➜</a:t>
             </a:r>
           </a:p>
         </p:txBody>
@@ -8735,17 +10395,19 @@
         </p:nvSpPr>
         <p:spPr>
           <a:xfrm>
-            <a:off x="914400" y="2788920"/>
-            <a:ext cx="10332720" cy="594360"/>
+            <a:off x="6858000" y="1645920"/>
+            <a:ext cx="2286000" cy="1828800"/>
           </a:xfrm>
           <a:prstGeom prst="roundRect">
             <a:avLst/>
           </a:prstGeom>
           <a:solidFill>
-            <a:srgbClr val="F5F7FA"/>
+            <a:srgbClr val="FFFFFF"/>
           </a:solidFill>
-          <a:ln>
-            <a:noFill/>
+          <a:ln w="25400">
+            <a:solidFill>
+              <a:srgbClr val="0096D6"/>
+            </a:solidFill>
           </a:ln>
           <a:effectLst/>
         </p:spPr>
@@ -8764,10 +10426,79 @@
           </a:fontRef>
         </p:style>
         <p:txBody>
-          <a:bodyPr rtlCol="0" anchor="ctr"/>
-          <a:lstStyle/>
-          <a:p>
-            <a:pPr algn="ctr"/>
+          <a:bodyPr rtlCol="0" anchor="ctr" wrap="square"/>
+          <a:lstStyle/>
+          <a:p>
+            <a:pPr algn="ctr">
+              <a:defRPr sz="1600" b="1">
+                <a:solidFill>
+                  <a:srgbClr val="0096D6"/>
+                </a:solidFill>
+              </a:defRPr>
+            </a:pPr>
+            <a:r>
+              <a:t>Consensus Check</a:t>
+            </a:r>
+          </a:p>
+          <a:p>
+            <a:pPr>
+              <a:spcBef>
+                <a:spcPts val="400"/>
+              </a:spcBef>
+              <a:defRPr sz="1300" b="0">
+                <a:solidFill>
+                  <a:srgbClr val="2D2D3F"/>
+                </a:solidFill>
+              </a:defRPr>
+            </a:pPr>
+            <a:r>
+              <a:t>2/3 verifiers must agree</a:t>
+            </a:r>
+          </a:p>
+          <a:p>
+            <a:pPr>
+              <a:spcBef>
+                <a:spcPts val="400"/>
+              </a:spcBef>
+              <a:defRPr sz="1300" b="0">
+                <a:solidFill>
+                  <a:srgbClr val="2D2D3F"/>
+                </a:solidFill>
+              </a:defRPr>
+            </a:pPr>
+            <a:r>
+              <a:t>with primary annotation</a:t>
+            </a:r>
+          </a:p>
+          <a:p>
+            <a:pPr>
+              <a:spcBef>
+                <a:spcPts val="400"/>
+              </a:spcBef>
+              <a:defRPr sz="1300" b="1">
+                <a:solidFill>
+                  <a:srgbClr val="00C9A7"/>
+                </a:solidFill>
+              </a:defRPr>
+            </a:pPr>
+            <a:r>
+              <a:t>If yes → Accept</a:t>
+            </a:r>
+          </a:p>
+          <a:p>
+            <a:pPr>
+              <a:spcBef>
+                <a:spcPts val="400"/>
+              </a:spcBef>
+              <a:defRPr sz="1300" b="1">
+                <a:solidFill>
+                  <a:srgbClr val="FF5C5C"/>
+                </a:solidFill>
+              </a:defRPr>
+            </a:pPr>
+            <a:r>
+              <a:t>If no → Reconcile</a:t>
+            </a:r>
           </a:p>
         </p:txBody>
       </p:sp>
@@ -8779,8 +10510,8 @@
         </p:nvSpPr>
         <p:spPr>
           <a:xfrm>
-            <a:off x="1097280" y="2880360"/>
-            <a:ext cx="2743200" cy="457200"/>
+            <a:off x="9235440" y="2286000"/>
+            <a:ext cx="457200" cy="457200"/>
           </a:xfrm>
           <a:prstGeom prst="rect">
             <a:avLst/>
@@ -8791,15 +10522,15 @@
           <a:bodyPr wrap="square"/>
           <a:lstStyle/>
           <a:p>
-            <a:pPr algn="l">
-              <a:defRPr sz="1600" b="1">
-                <a:solidFill>
-                  <a:srgbClr val="FF8C42"/>
-                </a:solidFill>
-              </a:defRPr>
-            </a:pPr>
-            <a:r>
-              <a:t>Delivery Mode</a:t>
+            <a:pPr algn="ctr">
+              <a:defRPr sz="2800" b="0">
+                <a:solidFill>
+                  <a:srgbClr val="A0A0A0"/>
+                </a:solidFill>
+              </a:defRPr>
+            </a:pPr>
+            <a:r>
+              <a:t>➜</a:t>
             </a:r>
           </a:p>
         </p:txBody>
@@ -8812,17 +10543,19 @@
         </p:nvSpPr>
         <p:spPr>
           <a:xfrm>
-            <a:off x="4389120" y="2898648"/>
-            <a:ext cx="2733141" cy="365760"/>
+            <a:off x="9692640" y="1645920"/>
+            <a:ext cx="2103120" cy="1828800"/>
           </a:xfrm>
           <a:prstGeom prst="roundRect">
             <a:avLst/>
           </a:prstGeom>
           <a:solidFill>
-            <a:srgbClr val="FF8C42"/>
+            <a:srgbClr val="FFFFFF"/>
           </a:solidFill>
-          <a:ln>
-            <a:noFill/>
+          <a:ln w="25400">
+            <a:solidFill>
+              <a:srgbClr val="FF5C5C"/>
+            </a:solidFill>
           </a:ln>
           <a:effectLst/>
         </p:spPr>
@@ -8844,18 +10577,75 @@
           <a:bodyPr rtlCol="0" anchor="ctr" wrap="square"/>
           <a:lstStyle/>
           <a:p>
-            <a:pPr algn="l">
+            <a:pPr algn="ctr">
+              <a:defRPr sz="1600" b="1">
+                <a:solidFill>
+                  <a:srgbClr val="FF5C5C"/>
+                </a:solidFill>
+              </a:defRPr>
+            </a:pPr>
+            <a:r>
+              <a:t>Reconciler</a:t>
+            </a:r>
+          </a:p>
+          <a:p>
+            <a:pPr>
               <a:spcBef>
                 <a:spcPts val="400"/>
               </a:spcBef>
               <a:defRPr sz="1300" b="1">
                 <a:solidFill>
-                  <a:srgbClr val="FFFFFF"/>
-                </a:solidFill>
-              </a:defRPr>
-            </a:pPr>
-            <a:r>
-              <a:t>  85.4%</a:t>
+                  <a:srgbClr val="2D2D3F"/>
+                </a:solidFill>
+              </a:defRPr>
+            </a:pPr>
+            <a:r>
+              <a:t>qwen3:14b</a:t>
+            </a:r>
+          </a:p>
+          <a:p>
+            <a:pPr>
+              <a:spcBef>
+                <a:spcPts val="400"/>
+              </a:spcBef>
+              <a:defRPr sz="1200" b="0">
+                <a:solidFill>
+                  <a:srgbClr val="A0A0A0"/>
+                </a:solidFill>
+              </a:defRPr>
+            </a:pPr>
+            <a:r>
+              <a:t>Sees ALL opinions</a:t>
+            </a:r>
+          </a:p>
+          <a:p>
+            <a:pPr>
+              <a:spcBef>
+                <a:spcPts val="400"/>
+              </a:spcBef>
+              <a:defRPr sz="1200" b="0">
+                <a:solidFill>
+                  <a:srgbClr val="A0A0A0"/>
+                </a:solidFill>
+              </a:defRPr>
+            </a:pPr>
+            <a:r>
+              <a:t>Makes final decision</a:t>
+            </a:r>
+          </a:p>
+          <a:p>
+            <a:pPr>
+              <a:spcBef>
+                <a:spcPts val="400"/>
+              </a:spcBef>
+              <a:defRPr sz="1200" b="0">
+                <a:solidFill>
+                  <a:srgbClr val="A0A0A0"/>
+                </a:solidFill>
+              </a:defRPr>
+            </a:pPr>
+            <a:r>
+              <a:t>with full evidence</a:t>
             </a:r>
           </a:p>
         </p:txBody>
@@ -8868,17 +10658,19 @@
         </p:nvSpPr>
         <p:spPr>
           <a:xfrm>
-            <a:off x="7772400" y="2898648"/>
-            <a:ext cx="2845155" cy="365760"/>
+            <a:off x="457200" y="4846320"/>
+            <a:ext cx="11247120" cy="1371600"/>
           </a:xfrm>
           <a:prstGeom prst="roundRect">
             <a:avLst/>
           </a:prstGeom>
           <a:solidFill>
-            <a:srgbClr val="A0A0A0"/>
+            <a:srgbClr val="FDF0E0"/>
           </a:solidFill>
-          <a:ln>
-            <a:noFill/>
+          <a:ln w="12700">
+            <a:solidFill>
+              <a:srgbClr val="FF8C42"/>
+            </a:solidFill>
           </a:ln>
           <a:effectLst/>
         </p:spPr>
@@ -8901,971 +10693,59 @@
           <a:lstStyle/>
           <a:p>
             <a:pPr algn="l">
+              <a:defRPr sz="1600" b="1">
+                <a:solidFill>
+                  <a:srgbClr val="FF8C42"/>
+                </a:solidFill>
+              </a:defRPr>
+            </a:pPr>
+            <a:r>
+              <a:t>Skip Verification</a:t>
+            </a:r>
+          </a:p>
+          <a:p>
+            <a:pPr>
               <a:spcBef>
                 <a:spcPts val="400"/>
               </a:spcBef>
-              <a:defRPr sz="1300" b="1">
-                <a:solidFill>
-                  <a:srgbClr val="FFFFFF"/>
-                </a:solidFill>
-              </a:defRPr>
-            </a:pPr>
-            <a:r>
-              <a:t>  88.9%</a:t>
-            </a:r>
-          </a:p>
-        </p:txBody>
-      </p:sp>
-      <p:sp>
-        <p:nvSpPr>
-          <p:cNvPr id="14" name="TextBox 13"/>
-          <p:cNvSpPr txBox="1"/>
-          <p:nvPr/>
-        </p:nvSpPr>
-        <p:spPr>
-          <a:xfrm>
-            <a:off x="10058400" y="2880360"/>
-            <a:ext cx="1371600" cy="457200"/>
-          </a:xfrm>
-          <a:prstGeom prst="rect">
-            <a:avLst/>
-          </a:prstGeom>
-          <a:noFill/>
-        </p:spPr>
-        <p:txBody>
-          <a:bodyPr wrap="square"/>
-          <a:lstStyle/>
-          <a:p>
-            <a:pPr algn="l">
-              <a:defRPr sz="1200" b="0">
-                <a:solidFill>
-                  <a:srgbClr val="A0A0A0"/>
-                </a:solidFill>
-              </a:defRPr>
-            </a:pPr>
-            <a:r>
-              <a:t>3.5pp gap</a:t>
-            </a:r>
-          </a:p>
-        </p:txBody>
-      </p:sp>
-      <p:sp>
-        <p:nvSpPr>
-          <p:cNvPr id="15" name="Rounded Rectangle 14"/>
-          <p:cNvSpPr/>
-          <p:nvPr/>
-        </p:nvSpPr>
-        <p:spPr>
-          <a:xfrm>
-            <a:off x="914400" y="3474720"/>
-            <a:ext cx="10332720" cy="594360"/>
-          </a:xfrm>
-          <a:prstGeom prst="roundRect">
-            <a:avLst/>
-          </a:prstGeom>
-          <a:solidFill>
-            <a:srgbClr val="FFFFFF"/>
-          </a:solidFill>
-          <a:ln>
-            <a:noFill/>
-          </a:ln>
-          <a:effectLst/>
-        </p:spPr>
-        <p:style>
-          <a:lnRef idx="1">
-            <a:schemeClr val="accent1"/>
-          </a:lnRef>
-          <a:fillRef idx="3">
-            <a:schemeClr val="accent1"/>
-          </a:fillRef>
-          <a:effectRef idx="2">
-            <a:schemeClr val="accent1"/>
-          </a:effectRef>
-          <a:fontRef idx="minor">
-            <a:schemeClr val="lt1"/>
-          </a:fontRef>
-        </p:style>
-        <p:txBody>
-          <a:bodyPr rtlCol="0" anchor="ctr"/>
-          <a:lstStyle/>
-          <a:p>
-            <a:pPr algn="ctr"/>
-          </a:p>
-        </p:txBody>
-      </p:sp>
-      <p:sp>
-        <p:nvSpPr>
-          <p:cNvPr id="16" name="TextBox 15"/>
-          <p:cNvSpPr txBox="1"/>
-          <p:nvPr/>
-        </p:nvSpPr>
-        <p:spPr>
-          <a:xfrm>
-            <a:off x="1097280" y="3566160"/>
-            <a:ext cx="2743200" cy="457200"/>
-          </a:xfrm>
-          <a:prstGeom prst="rect">
-            <a:avLst/>
-          </a:prstGeom>
-          <a:noFill/>
-        </p:spPr>
-        <p:txBody>
-          <a:bodyPr wrap="square"/>
-          <a:lstStyle/>
-          <a:p>
-            <a:pPr algn="l">
-              <a:defRPr sz="1600" b="1">
-                <a:solidFill>
-                  <a:srgbClr val="FF5C5C"/>
-                </a:solidFill>
-              </a:defRPr>
-            </a:pPr>
-            <a:r>
-              <a:t>Outcome</a:t>
-            </a:r>
-          </a:p>
-        </p:txBody>
-      </p:sp>
-      <p:sp>
-        <p:nvSpPr>
-          <p:cNvPr id="17" name="Rounded Rectangle 16"/>
-          <p:cNvSpPr/>
-          <p:nvPr/>
-        </p:nvSpPr>
-        <p:spPr>
-          <a:xfrm>
-            <a:off x="4389120" y="3584448"/>
-            <a:ext cx="1936241" cy="365760"/>
-          </a:xfrm>
-          <a:prstGeom prst="roundRect">
-            <a:avLst/>
-          </a:prstGeom>
-          <a:solidFill>
-            <a:srgbClr val="FF5C5C"/>
-          </a:solidFill>
-          <a:ln>
-            <a:noFill/>
-          </a:ln>
-          <a:effectLst/>
-        </p:spPr>
-        <p:style>
-          <a:lnRef idx="1">
-            <a:schemeClr val="accent1"/>
-          </a:lnRef>
-          <a:fillRef idx="3">
-            <a:schemeClr val="accent1"/>
-          </a:fillRef>
-          <a:effectRef idx="2">
-            <a:schemeClr val="accent1"/>
-          </a:effectRef>
-          <a:fontRef idx="minor">
-            <a:schemeClr val="lt1"/>
-          </a:fontRef>
-        </p:style>
-        <p:txBody>
-          <a:bodyPr rtlCol="0" anchor="ctr" wrap="square"/>
-          <a:lstStyle/>
-          <a:p>
-            <a:pPr algn="l">
+              <a:defRPr sz="1300" b="0">
+                <a:solidFill>
+                  <a:srgbClr val="2D2D3F"/>
+                </a:solidFill>
+              </a:defRPr>
+            </a:pPr>
+            <a:r>
+              <a:t>High-confidence deterministic annotations skip the verification pipeline entirely (e.g., known peptide drugs, registry status = Recruiting)</a:t>
+            </a:r>
+          </a:p>
+          <a:p>
+            <a:pPr>
               <a:spcBef>
                 <a:spcPts val="400"/>
               </a:spcBef>
-              <a:defRPr sz="1300" b="1">
-                <a:solidFill>
-                  <a:srgbClr val="FFFFFF"/>
-                </a:solidFill>
-              </a:defRPr>
-            </a:pPr>
-            <a:r>
-              <a:t>  60.5%</a:t>
-            </a:r>
-          </a:p>
-        </p:txBody>
-      </p:sp>
-      <p:sp>
-        <p:nvSpPr>
-          <p:cNvPr id="18" name="Rounded Rectangle 17"/>
-          <p:cNvSpPr/>
-          <p:nvPr/>
-        </p:nvSpPr>
-        <p:spPr>
-          <a:xfrm>
-            <a:off x="7772400" y="3584448"/>
-            <a:ext cx="2057857" cy="365760"/>
-          </a:xfrm>
-          <a:prstGeom prst="roundRect">
-            <a:avLst/>
-          </a:prstGeom>
-          <a:solidFill>
-            <a:srgbClr val="A0A0A0"/>
-          </a:solidFill>
-          <a:ln>
-            <a:noFill/>
-          </a:ln>
-          <a:effectLst/>
-        </p:spPr>
-        <p:style>
-          <a:lnRef idx="1">
-            <a:schemeClr val="accent1"/>
-          </a:lnRef>
-          <a:fillRef idx="3">
-            <a:schemeClr val="accent1"/>
-          </a:fillRef>
-          <a:effectRef idx="2">
-            <a:schemeClr val="accent1"/>
-          </a:effectRef>
-          <a:fontRef idx="minor">
-            <a:schemeClr val="lt1"/>
-          </a:fontRef>
-        </p:style>
-        <p:txBody>
-          <a:bodyPr rtlCol="0" anchor="ctr" wrap="square"/>
-          <a:lstStyle/>
-          <a:p>
-            <a:pPr algn="l">
+              <a:defRPr sz="1300" b="0">
+                <a:solidFill>
+                  <a:srgbClr val="2D2D3F"/>
+                </a:solidFill>
+              </a:defRPr>
+            </a:pPr>
+            <a:r>
+              <a:t>Publication-anchored annotations with efficacy evidence also skip verification to prevent reconciler from overriding correct calls</a:t>
+            </a:r>
+          </a:p>
+          <a:p>
+            <a:pPr>
               <a:spcBef>
                 <a:spcPts val="400"/>
               </a:spcBef>
-              <a:defRPr sz="1300" b="1">
-                <a:solidFill>
-                  <a:srgbClr val="FFFFFF"/>
-                </a:solidFill>
-              </a:defRPr>
-            </a:pPr>
-            <a:r>
-              <a:t>  64.3%</a:t>
-            </a:r>
-          </a:p>
-        </p:txBody>
-      </p:sp>
-      <p:sp>
-        <p:nvSpPr>
-          <p:cNvPr id="19" name="TextBox 18"/>
-          <p:cNvSpPr txBox="1"/>
-          <p:nvPr/>
-        </p:nvSpPr>
-        <p:spPr>
-          <a:xfrm>
-            <a:off x="10058400" y="3566160"/>
-            <a:ext cx="1371600" cy="457200"/>
-          </a:xfrm>
-          <a:prstGeom prst="rect">
-            <a:avLst/>
-          </a:prstGeom>
-          <a:noFill/>
-        </p:spPr>
-        <p:txBody>
-          <a:bodyPr wrap="square"/>
-          <a:lstStyle/>
-          <a:p>
-            <a:pPr algn="l">
-              <a:defRPr sz="1200" b="0">
-                <a:solidFill>
-                  <a:srgbClr val="A0A0A0"/>
-                </a:solidFill>
-              </a:defRPr>
-            </a:pPr>
-            <a:r>
-              <a:t>3.8pp gap</a:t>
-            </a:r>
-          </a:p>
-        </p:txBody>
-      </p:sp>
-      <p:sp>
-        <p:nvSpPr>
-          <p:cNvPr id="20" name="Rounded Rectangle 19"/>
-          <p:cNvSpPr/>
-          <p:nvPr/>
-        </p:nvSpPr>
-        <p:spPr>
-          <a:xfrm>
-            <a:off x="914400" y="4160520"/>
-            <a:ext cx="10332720" cy="594360"/>
-          </a:xfrm>
-          <a:prstGeom prst="roundRect">
-            <a:avLst/>
-          </a:prstGeom>
-          <a:solidFill>
-            <a:srgbClr val="F5F7FA"/>
-          </a:solidFill>
-          <a:ln>
-            <a:noFill/>
-          </a:ln>
-          <a:effectLst/>
-        </p:spPr>
-        <p:style>
-          <a:lnRef idx="1">
-            <a:schemeClr val="accent1"/>
-          </a:lnRef>
-          <a:fillRef idx="3">
-            <a:schemeClr val="accent1"/>
-          </a:fillRef>
-          <a:effectRef idx="2">
-            <a:schemeClr val="accent1"/>
-          </a:effectRef>
-          <a:fontRef idx="minor">
-            <a:schemeClr val="lt1"/>
-          </a:fontRef>
-        </p:style>
-        <p:txBody>
-          <a:bodyPr rtlCol="0" anchor="ctr"/>
-          <a:lstStyle/>
-          <a:p>
-            <a:pPr algn="ctr"/>
-          </a:p>
-        </p:txBody>
-      </p:sp>
-      <p:sp>
-        <p:nvSpPr>
-          <p:cNvPr id="21" name="TextBox 20"/>
-          <p:cNvSpPr txBox="1"/>
-          <p:nvPr/>
-        </p:nvSpPr>
-        <p:spPr>
-          <a:xfrm>
-            <a:off x="1097280" y="4251960"/>
-            <a:ext cx="2743200" cy="457200"/>
-          </a:xfrm>
-          <a:prstGeom prst="rect">
-            <a:avLst/>
-          </a:prstGeom>
-          <a:noFill/>
-        </p:spPr>
-        <p:txBody>
-          <a:bodyPr wrap="square"/>
-          <a:lstStyle/>
-          <a:p>
-            <a:pPr algn="l">
-              <a:defRPr sz="1600" b="1">
-                <a:solidFill>
-                  <a:srgbClr val="A85CFF"/>
-                </a:solidFill>
-              </a:defRPr>
-            </a:pPr>
-            <a:r>
-              <a:t>Reason for Failure</a:t>
-            </a:r>
-          </a:p>
-        </p:txBody>
-      </p:sp>
-      <p:sp>
-        <p:nvSpPr>
-          <p:cNvPr id="22" name="Rounded Rectangle 21"/>
-          <p:cNvSpPr/>
-          <p:nvPr/>
-        </p:nvSpPr>
-        <p:spPr>
-          <a:xfrm>
-            <a:off x="4389120" y="4270248"/>
-            <a:ext cx="2957169" cy="365760"/>
-          </a:xfrm>
-          <a:prstGeom prst="roundRect">
-            <a:avLst/>
-          </a:prstGeom>
-          <a:solidFill>
-            <a:srgbClr val="A85CFF"/>
-          </a:solidFill>
-          <a:ln>
-            <a:noFill/>
-          </a:ln>
-          <a:effectLst/>
-        </p:spPr>
-        <p:style>
-          <a:lnRef idx="1">
-            <a:schemeClr val="accent1"/>
-          </a:lnRef>
-          <a:fillRef idx="3">
-            <a:schemeClr val="accent1"/>
-          </a:fillRef>
-          <a:effectRef idx="2">
-            <a:schemeClr val="accent1"/>
-          </a:effectRef>
-          <a:fontRef idx="minor">
-            <a:schemeClr val="lt1"/>
-          </a:fontRef>
-        </p:style>
-        <p:txBody>
-          <a:bodyPr rtlCol="0" anchor="ctr" wrap="square"/>
-          <a:lstStyle/>
-          <a:p>
-            <a:pPr algn="l">
-              <a:spcBef>
-                <a:spcPts val="400"/>
-              </a:spcBef>
-              <a:defRPr sz="1300" b="1">
-                <a:solidFill>
-                  <a:srgbClr val="FFFFFF"/>
-                </a:solidFill>
-              </a:defRPr>
-            </a:pPr>
-            <a:r>
-              <a:t>  92.4%</a:t>
-            </a:r>
-          </a:p>
-        </p:txBody>
-      </p:sp>
-      <p:sp>
-        <p:nvSpPr>
-          <p:cNvPr id="23" name="Rounded Rectangle 22"/>
-          <p:cNvSpPr/>
-          <p:nvPr/>
-        </p:nvSpPr>
-        <p:spPr>
-          <a:xfrm>
-            <a:off x="7772400" y="4270248"/>
-            <a:ext cx="2835554" cy="365760"/>
-          </a:xfrm>
-          <a:prstGeom prst="roundRect">
-            <a:avLst/>
-          </a:prstGeom>
-          <a:solidFill>
-            <a:srgbClr val="A0A0A0"/>
-          </a:solidFill>
-          <a:ln>
-            <a:noFill/>
-          </a:ln>
-          <a:effectLst/>
-        </p:spPr>
-        <p:style>
-          <a:lnRef idx="1">
-            <a:schemeClr val="accent1"/>
-          </a:lnRef>
-          <a:fillRef idx="3">
-            <a:schemeClr val="accent1"/>
-          </a:fillRef>
-          <a:effectRef idx="2">
-            <a:schemeClr val="accent1"/>
-          </a:effectRef>
-          <a:fontRef idx="minor">
-            <a:schemeClr val="lt1"/>
-          </a:fontRef>
-        </p:style>
-        <p:txBody>
-          <a:bodyPr rtlCol="0" anchor="ctr" wrap="square"/>
-          <a:lstStyle/>
-          <a:p>
-            <a:pPr algn="l">
-              <a:spcBef>
-                <a:spcPts val="400"/>
-              </a:spcBef>
-              <a:defRPr sz="1300" b="1">
-                <a:solidFill>
-                  <a:srgbClr val="FFFFFF"/>
-                </a:solidFill>
-              </a:defRPr>
-            </a:pPr>
-            <a:r>
-              <a:t>  88.6%</a:t>
-            </a:r>
-          </a:p>
-        </p:txBody>
-      </p:sp>
-      <p:sp>
-        <p:nvSpPr>
-          <p:cNvPr id="24" name="TextBox 23"/>
-          <p:cNvSpPr txBox="1"/>
-          <p:nvPr/>
-        </p:nvSpPr>
-        <p:spPr>
-          <a:xfrm>
-            <a:off x="10058400" y="4251960"/>
-            <a:ext cx="1371600" cy="457200"/>
-          </a:xfrm>
-          <a:prstGeom prst="rect">
-            <a:avLst/>
-          </a:prstGeom>
-          <a:noFill/>
-        </p:spPr>
-        <p:txBody>
-          <a:bodyPr wrap="square"/>
-          <a:lstStyle/>
-          <a:p>
-            <a:pPr algn="l">
-              <a:defRPr sz="1200" b="1">
-                <a:solidFill>
-                  <a:srgbClr val="00C9A7"/>
-                </a:solidFill>
-              </a:defRPr>
-            </a:pPr>
-            <a:r>
-              <a:t>Above human</a:t>
-            </a:r>
-          </a:p>
-        </p:txBody>
-      </p:sp>
-      <p:sp>
-        <p:nvSpPr>
-          <p:cNvPr id="25" name="Rounded Rectangle 24"/>
-          <p:cNvSpPr/>
-          <p:nvPr/>
-        </p:nvSpPr>
-        <p:spPr>
-          <a:xfrm>
-            <a:off x="914400" y="4846320"/>
-            <a:ext cx="10332720" cy="594360"/>
-          </a:xfrm>
-          <a:prstGeom prst="roundRect">
-            <a:avLst/>
-          </a:prstGeom>
-          <a:solidFill>
-            <a:srgbClr val="FFFFFF"/>
-          </a:solidFill>
-          <a:ln>
-            <a:noFill/>
-          </a:ln>
-          <a:effectLst/>
-        </p:spPr>
-        <p:style>
-          <a:lnRef idx="1">
-            <a:schemeClr val="accent1"/>
-          </a:lnRef>
-          <a:fillRef idx="3">
-            <a:schemeClr val="accent1"/>
-          </a:fillRef>
-          <a:effectRef idx="2">
-            <a:schemeClr val="accent1"/>
-          </a:effectRef>
-          <a:fontRef idx="minor">
-            <a:schemeClr val="lt1"/>
-          </a:fontRef>
-        </p:style>
-        <p:txBody>
-          <a:bodyPr rtlCol="0" anchor="ctr"/>
-          <a:lstStyle/>
-          <a:p>
-            <a:pPr algn="ctr"/>
-          </a:p>
-        </p:txBody>
-      </p:sp>
-      <p:sp>
-        <p:nvSpPr>
-          <p:cNvPr id="26" name="TextBox 25"/>
-          <p:cNvSpPr txBox="1"/>
-          <p:nvPr/>
-        </p:nvSpPr>
-        <p:spPr>
-          <a:xfrm>
-            <a:off x="1097280" y="4937760"/>
-            <a:ext cx="2743200" cy="457200"/>
-          </a:xfrm>
-          <a:prstGeom prst="rect">
-            <a:avLst/>
-          </a:prstGeom>
-          <a:noFill/>
-        </p:spPr>
-        <p:txBody>
-          <a:bodyPr wrap="square"/>
-          <a:lstStyle/>
-          <a:p>
-            <a:pPr algn="l">
-              <a:defRPr sz="1600" b="1">
-                <a:solidFill>
-                  <a:srgbClr val="00C9A7"/>
-                </a:solidFill>
-              </a:defRPr>
-            </a:pPr>
-            <a:r>
-              <a:t>Peptide</a:t>
-            </a:r>
-          </a:p>
-        </p:txBody>
-      </p:sp>
-      <p:sp>
-        <p:nvSpPr>
-          <p:cNvPr id="27" name="Rounded Rectangle 26"/>
-          <p:cNvSpPr/>
-          <p:nvPr/>
-        </p:nvSpPr>
-        <p:spPr>
-          <a:xfrm>
-            <a:off x="4389120" y="4956048"/>
-            <a:ext cx="2825953" cy="365760"/>
-          </a:xfrm>
-          <a:prstGeom prst="roundRect">
-            <a:avLst/>
-          </a:prstGeom>
-          <a:solidFill>
-            <a:srgbClr val="00C9A7"/>
-          </a:solidFill>
-          <a:ln>
-            <a:noFill/>
-          </a:ln>
-          <a:effectLst/>
-        </p:spPr>
-        <p:style>
-          <a:lnRef idx="1">
-            <a:schemeClr val="accent1"/>
-          </a:lnRef>
-          <a:fillRef idx="3">
-            <a:schemeClr val="accent1"/>
-          </a:fillRef>
-          <a:effectRef idx="2">
-            <a:schemeClr val="accent1"/>
-          </a:effectRef>
-          <a:fontRef idx="minor">
-            <a:schemeClr val="lt1"/>
-          </a:fontRef>
-        </p:style>
-        <p:txBody>
-          <a:bodyPr rtlCol="0" anchor="ctr" wrap="square"/>
-          <a:lstStyle/>
-          <a:p>
-            <a:pPr algn="l">
-              <a:spcBef>
-                <a:spcPts val="400"/>
-              </a:spcBef>
-              <a:defRPr sz="1300" b="1">
-                <a:solidFill>
-                  <a:srgbClr val="FFFFFF"/>
-                </a:solidFill>
-              </a:defRPr>
-            </a:pPr>
-            <a:r>
-              <a:t>  88.3%</a:t>
-            </a:r>
-          </a:p>
-        </p:txBody>
-      </p:sp>
-      <p:sp>
-        <p:nvSpPr>
-          <p:cNvPr id="28" name="Rounded Rectangle 27"/>
-          <p:cNvSpPr/>
-          <p:nvPr/>
-        </p:nvSpPr>
-        <p:spPr>
-          <a:xfrm>
-            <a:off x="7772400" y="4956048"/>
-            <a:ext cx="2752344" cy="365760"/>
-          </a:xfrm>
-          <a:prstGeom prst="roundRect">
-            <a:avLst/>
-          </a:prstGeom>
-          <a:solidFill>
-            <a:srgbClr val="A0A0A0"/>
-          </a:solidFill>
-          <a:ln>
-            <a:noFill/>
-          </a:ln>
-          <a:effectLst/>
-        </p:spPr>
-        <p:style>
-          <a:lnRef idx="1">
-            <a:schemeClr val="accent1"/>
-          </a:lnRef>
-          <a:fillRef idx="3">
-            <a:schemeClr val="accent1"/>
-          </a:fillRef>
-          <a:effectRef idx="2">
-            <a:schemeClr val="accent1"/>
-          </a:effectRef>
-          <a:fontRef idx="minor">
-            <a:schemeClr val="lt1"/>
-          </a:fontRef>
-        </p:style>
-        <p:txBody>
-          <a:bodyPr rtlCol="0" anchor="ctr" wrap="square"/>
-          <a:lstStyle/>
-          <a:p>
-            <a:pPr algn="l">
-              <a:spcBef>
-                <a:spcPts val="400"/>
-              </a:spcBef>
-              <a:defRPr sz="1300" b="1">
-                <a:solidFill>
-                  <a:srgbClr val="FFFFFF"/>
-                </a:solidFill>
-              </a:defRPr>
-            </a:pPr>
-            <a:r>
-              <a:t>  86.0%</a:t>
-            </a:r>
-          </a:p>
-        </p:txBody>
-      </p:sp>
-      <p:sp>
-        <p:nvSpPr>
-          <p:cNvPr id="29" name="TextBox 28"/>
-          <p:cNvSpPr txBox="1"/>
-          <p:nvPr/>
-        </p:nvSpPr>
-        <p:spPr>
-          <a:xfrm>
-            <a:off x="10058400" y="4937760"/>
-            <a:ext cx="1371600" cy="457200"/>
-          </a:xfrm>
-          <a:prstGeom prst="rect">
-            <a:avLst/>
-          </a:prstGeom>
-          <a:noFill/>
-        </p:spPr>
-        <p:txBody>
-          <a:bodyPr wrap="square"/>
-          <a:lstStyle/>
-          <a:p>
-            <a:pPr algn="l">
-              <a:defRPr sz="1200" b="1">
-                <a:solidFill>
-                  <a:srgbClr val="00C9A7"/>
-                </a:solidFill>
-              </a:defRPr>
-            </a:pPr>
-            <a:r>
-              <a:t>Above human</a:t>
-            </a:r>
-          </a:p>
-        </p:txBody>
-      </p:sp>
-      <p:sp>
-        <p:nvSpPr>
-          <p:cNvPr id="30" name="Rounded Rectangle 29"/>
-          <p:cNvSpPr/>
-          <p:nvPr/>
-        </p:nvSpPr>
-        <p:spPr>
-          <a:xfrm>
-            <a:off x="914400" y="5532120"/>
-            <a:ext cx="10332720" cy="594360"/>
-          </a:xfrm>
-          <a:prstGeom prst="roundRect">
-            <a:avLst/>
-          </a:prstGeom>
-          <a:solidFill>
-            <a:srgbClr val="F5F7FA"/>
-          </a:solidFill>
-          <a:ln>
-            <a:noFill/>
-          </a:ln>
-          <a:effectLst/>
-        </p:spPr>
-        <p:style>
-          <a:lnRef idx="1">
-            <a:schemeClr val="accent1"/>
-          </a:lnRef>
-          <a:fillRef idx="3">
-            <a:schemeClr val="accent1"/>
-          </a:fillRef>
-          <a:effectRef idx="2">
-            <a:schemeClr val="accent1"/>
-          </a:effectRef>
-          <a:fontRef idx="minor">
-            <a:schemeClr val="lt1"/>
-          </a:fontRef>
-        </p:style>
-        <p:txBody>
-          <a:bodyPr rtlCol="0" anchor="ctr"/>
-          <a:lstStyle/>
-          <a:p>
-            <a:pPr algn="ctr"/>
-          </a:p>
-        </p:txBody>
-      </p:sp>
-      <p:sp>
-        <p:nvSpPr>
-          <p:cNvPr id="31" name="TextBox 30"/>
-          <p:cNvSpPr txBox="1"/>
-          <p:nvPr/>
-        </p:nvSpPr>
-        <p:spPr>
-          <a:xfrm>
-            <a:off x="1097280" y="5623560"/>
-            <a:ext cx="2743200" cy="457200"/>
-          </a:xfrm>
-          <a:prstGeom prst="rect">
-            <a:avLst/>
-          </a:prstGeom>
-          <a:noFill/>
-        </p:spPr>
-        <p:txBody>
-          <a:bodyPr wrap="square"/>
-          <a:lstStyle/>
-          <a:p>
-            <a:pPr algn="l">
-              <a:defRPr sz="1600" b="1">
-                <a:solidFill>
-                  <a:srgbClr val="0096D6"/>
-                </a:solidFill>
-              </a:defRPr>
-            </a:pPr>
-            <a:r>
-              <a:t>Sequence</a:t>
-            </a:r>
-          </a:p>
-        </p:txBody>
-      </p:sp>
-      <p:sp>
-        <p:nvSpPr>
-          <p:cNvPr id="32" name="Rounded Rectangle 31"/>
-          <p:cNvSpPr/>
-          <p:nvPr/>
-        </p:nvSpPr>
-        <p:spPr>
-          <a:xfrm>
-            <a:off x="4389120" y="5641848"/>
-            <a:ext cx="1865833" cy="365760"/>
-          </a:xfrm>
-          <a:prstGeom prst="roundRect">
-            <a:avLst/>
-          </a:prstGeom>
-          <a:solidFill>
-            <a:srgbClr val="0096D6"/>
-          </a:solidFill>
-          <a:ln>
-            <a:noFill/>
-          </a:ln>
-          <a:effectLst/>
-        </p:spPr>
-        <p:style>
-          <a:lnRef idx="1">
-            <a:schemeClr val="accent1"/>
-          </a:lnRef>
-          <a:fillRef idx="3">
-            <a:schemeClr val="accent1"/>
-          </a:fillRef>
-          <a:effectRef idx="2">
-            <a:schemeClr val="accent1"/>
-          </a:effectRef>
-          <a:fontRef idx="minor">
-            <a:schemeClr val="lt1"/>
-          </a:fontRef>
-        </p:style>
-        <p:txBody>
-          <a:bodyPr rtlCol="0" anchor="ctr" wrap="square"/>
-          <a:lstStyle/>
-          <a:p>
-            <a:pPr algn="l">
-              <a:spcBef>
-                <a:spcPts val="400"/>
-              </a:spcBef>
-              <a:defRPr sz="1300" b="1">
-                <a:solidFill>
-                  <a:srgbClr val="FFFFFF"/>
-                </a:solidFill>
-              </a:defRPr>
-            </a:pPr>
-            <a:r>
-              <a:t>  58.3%</a:t>
-            </a:r>
-          </a:p>
-        </p:txBody>
-      </p:sp>
-      <p:sp>
-        <p:nvSpPr>
-          <p:cNvPr id="33" name="Rounded Rectangle 32"/>
-          <p:cNvSpPr/>
-          <p:nvPr/>
-        </p:nvSpPr>
-        <p:spPr>
-          <a:xfrm>
-            <a:off x="7772400" y="5641848"/>
-            <a:ext cx="1664208" cy="365760"/>
-          </a:xfrm>
-          <a:prstGeom prst="roundRect">
-            <a:avLst/>
-          </a:prstGeom>
-          <a:solidFill>
-            <a:srgbClr val="A0A0A0"/>
-          </a:solidFill>
-          <a:ln>
-            <a:noFill/>
-          </a:ln>
-          <a:effectLst/>
-        </p:spPr>
-        <p:style>
-          <a:lnRef idx="1">
-            <a:schemeClr val="accent1"/>
-          </a:lnRef>
-          <a:fillRef idx="3">
-            <a:schemeClr val="accent1"/>
-          </a:fillRef>
-          <a:effectRef idx="2">
-            <a:schemeClr val="accent1"/>
-          </a:effectRef>
-          <a:fontRef idx="minor">
-            <a:schemeClr val="lt1"/>
-          </a:fontRef>
-        </p:style>
-        <p:txBody>
-          <a:bodyPr rtlCol="0" anchor="ctr" wrap="square"/>
-          <a:lstStyle/>
-          <a:p>
-            <a:pPr algn="l">
-              <a:spcBef>
-                <a:spcPts val="400"/>
-              </a:spcBef>
-              <a:defRPr sz="1300" b="1">
-                <a:solidFill>
-                  <a:srgbClr val="FFFFFF"/>
-                </a:solidFill>
-              </a:defRPr>
-            </a:pPr>
-            <a:r>
-              <a:t>  52.0%</a:t>
-            </a:r>
-          </a:p>
-        </p:txBody>
-      </p:sp>
-      <p:sp>
-        <p:nvSpPr>
-          <p:cNvPr id="34" name="TextBox 33"/>
-          <p:cNvSpPr txBox="1"/>
-          <p:nvPr/>
-        </p:nvSpPr>
-        <p:spPr>
-          <a:xfrm>
-            <a:off x="10058400" y="5623560"/>
-            <a:ext cx="1371600" cy="457200"/>
-          </a:xfrm>
-          <a:prstGeom prst="rect">
-            <a:avLst/>
-          </a:prstGeom>
-          <a:noFill/>
-        </p:spPr>
-        <p:txBody>
-          <a:bodyPr wrap="square"/>
-          <a:lstStyle/>
-          <a:p>
-            <a:pPr algn="l">
-              <a:defRPr sz="1200" b="1">
-                <a:solidFill>
-                  <a:srgbClr val="00C9A7"/>
-                </a:solidFill>
-              </a:defRPr>
-            </a:pPr>
-            <a:r>
-              <a:t>Above human</a:t>
-            </a:r>
-          </a:p>
-        </p:txBody>
-      </p:sp>
-      <p:sp>
-        <p:nvSpPr>
-          <p:cNvPr id="35" name="TextBox 34"/>
-          <p:cNvSpPr txBox="1"/>
-          <p:nvPr/>
-        </p:nvSpPr>
-        <p:spPr>
-          <a:xfrm>
-            <a:off x="4389120" y="6217920"/>
-            <a:ext cx="7315200" cy="365760"/>
-          </a:xfrm>
-          <a:prstGeom prst="rect">
-            <a:avLst/>
-          </a:prstGeom>
-          <a:noFill/>
-        </p:spPr>
-        <p:txBody>
-          <a:bodyPr wrap="square"/>
-          <a:lstStyle/>
-          <a:p>
-            <a:pPr algn="l">
-              <a:defRPr sz="1200" b="0">
-                <a:solidFill>
-                  <a:srgbClr val="A0A0A0"/>
-                </a:solidFill>
-              </a:defRPr>
-            </a:pPr>
-            <a:r>
-              <a:t>          Agent vs R1                                              Human R1 vs R2</a:t>
+              <a:defRPr sz="1300" b="0">
+                <a:solidFill>
+                  <a:srgbClr val="2D2D3F"/>
+                </a:solidFill>
+              </a:defRPr>
+            </a:pPr>
+            <a:r>
+              <a:t>Cognitive diversity: 4 different model families (Google, Alibaba, Meta, Alibaba) reduce systematic bias</a:t>
             </a:r>
           </a:p>
         </p:txBody>
@@ -9924,32 +10804,63 @@
               </a:defRPr>
             </a:pPr>
             <a:r>
-              <a:t>Technology Stack</a:t>
-            </a:r>
-          </a:p>
-        </p:txBody>
-      </p:sp>
-      <p:sp>
-        <p:nvSpPr>
-          <p:cNvPr id="3" name="Rounded Rectangle 2"/>
+              <a:t>Accuracy vs Human Annotators (94-NCT Validation)</a:t>
+            </a:r>
+          </a:p>
+        </p:txBody>
+      </p:sp>
+      <p:sp>
+        <p:nvSpPr>
+          <p:cNvPr id="3" name="TextBox 2"/>
+          <p:cNvSpPr txBox="1"/>
+          <p:nvPr/>
+        </p:nvSpPr>
+        <p:spPr>
+          <a:xfrm>
+            <a:off x="457200" y="822960"/>
+            <a:ext cx="10972800" cy="457200"/>
+          </a:xfrm>
+          <a:prstGeom prst="rect">
+            <a:avLst/>
+          </a:prstGeom>
+          <a:noFill/>
+        </p:spPr>
+        <p:txBody>
+          <a:bodyPr wrap="square"/>
+          <a:lstStyle/>
+          <a:p>
+            <a:pPr algn="l">
+              <a:defRPr sz="1600" b="0">
+                <a:solidFill>
+                  <a:srgbClr val="A0A0A0"/>
+                </a:solidFill>
+              </a:defRPr>
+            </a:pPr>
+            <a:r>
+              <a:t>Agent agreement with expert annotator R1 — compared to human inter-annotator agreement (R1 vs R2)</a:t>
+            </a:r>
+          </a:p>
+        </p:txBody>
+      </p:sp>
+      <p:sp>
+        <p:nvSpPr>
+          <p:cNvPr id="4" name="Rounded Rectangle 3"/>
           <p:cNvSpPr/>
           <p:nvPr/>
         </p:nvSpPr>
         <p:spPr>
           <a:xfrm>
-            <a:off x="365760" y="1188720"/>
-            <a:ext cx="3657600" cy="5029200"/>
+            <a:off x="914400" y="1463040"/>
+            <a:ext cx="10332720" cy="548640"/>
           </a:xfrm>
           <a:prstGeom prst="roundRect">
             <a:avLst/>
           </a:prstGeom>
           <a:solidFill>
-            <a:srgbClr val="FFFFFF"/>
+            <a:srgbClr val="1A1A2E"/>
           </a:solidFill>
-          <a:ln w="25400">
-            <a:solidFill>
-              <a:srgbClr val="0096D6"/>
-            </a:solidFill>
+          <a:ln>
+            <a:noFill/>
           </a:ln>
           <a:effectLst/>
         </p:spPr>
@@ -9968,6 +10879,62 @@
           </a:fontRef>
         </p:style>
         <p:txBody>
+          <a:bodyPr rtlCol="0" anchor="ctr" wrap="square"/>
+          <a:lstStyle/>
+          <a:p>
+            <a:pPr algn="l">
+              <a:spcBef>
+                <a:spcPts val="600"/>
+              </a:spcBef>
+              <a:defRPr sz="1400" b="1">
+                <a:solidFill>
+                  <a:srgbClr val="FFFFFF"/>
+                </a:solidFill>
+              </a:defRPr>
+            </a:pPr>
+            <a:r>
+              <a:t>Field                                          Agent vs R1          Human R1 vs R2          Status</a:t>
+            </a:r>
+          </a:p>
+        </p:txBody>
+      </p:sp>
+      <p:sp>
+        <p:nvSpPr>
+          <p:cNvPr id="5" name="Rounded Rectangle 4"/>
+          <p:cNvSpPr/>
+          <p:nvPr/>
+        </p:nvSpPr>
+        <p:spPr>
+          <a:xfrm>
+            <a:off x="914400" y="2103120"/>
+            <a:ext cx="10332720" cy="594360"/>
+          </a:xfrm>
+          <a:prstGeom prst="roundRect">
+            <a:avLst/>
+          </a:prstGeom>
+          <a:solidFill>
+            <a:srgbClr val="FFFFFF"/>
+          </a:solidFill>
+          <a:ln>
+            <a:noFill/>
+          </a:ln>
+          <a:effectLst/>
+        </p:spPr>
+        <p:style>
+          <a:lnRef idx="1">
+            <a:schemeClr val="accent1"/>
+          </a:lnRef>
+          <a:fillRef idx="3">
+            <a:schemeClr val="accent1"/>
+          </a:fillRef>
+          <a:effectRef idx="2">
+            <a:schemeClr val="accent1"/>
+          </a:effectRef>
+          <a:fontRef idx="minor">
+            <a:schemeClr val="lt1"/>
+          </a:fontRef>
+        </p:style>
+        <p:txBody>
           <a:bodyPr rtlCol="0" anchor="ctr"/>
           <a:lstStyle/>
           <a:p>
@@ -9977,14 +10944,47 @@
       </p:sp>
       <p:sp>
         <p:nvSpPr>
-          <p:cNvPr id="4" name="Rounded Rectangle 3"/>
+          <p:cNvPr id="6" name="TextBox 5"/>
+          <p:cNvSpPr txBox="1"/>
+          <p:nvPr/>
+        </p:nvSpPr>
+        <p:spPr>
+          <a:xfrm>
+            <a:off x="1097280" y="2194560"/>
+            <a:ext cx="2743200" cy="457200"/>
+          </a:xfrm>
+          <a:prstGeom prst="rect">
+            <a:avLst/>
+          </a:prstGeom>
+          <a:noFill/>
+        </p:spPr>
+        <p:txBody>
+          <a:bodyPr wrap="square"/>
+          <a:lstStyle/>
+          <a:p>
+            <a:pPr algn="l">
+              <a:defRPr sz="1600" b="1">
+                <a:solidFill>
+                  <a:srgbClr val="0096D6"/>
+                </a:solidFill>
+              </a:defRPr>
+            </a:pPr>
+            <a:r>
+              <a:t>Classification</a:t>
+            </a:r>
+          </a:p>
+        </p:txBody>
+      </p:sp>
+      <p:sp>
+        <p:nvSpPr>
+          <p:cNvPr id="7" name="Rounded Rectangle 6"/>
           <p:cNvSpPr/>
           <p:nvPr/>
         </p:nvSpPr>
         <p:spPr>
           <a:xfrm>
-            <a:off x="365760" y="1188720"/>
-            <a:ext cx="3657600" cy="548640"/>
+            <a:off x="4389120" y="2212848"/>
+            <a:ext cx="2925165" cy="365760"/>
           </a:xfrm>
           <a:prstGeom prst="roundRect">
             <a:avLst/>
@@ -10015,151 +11015,41 @@
           <a:bodyPr rtlCol="0" anchor="ctr" wrap="square"/>
           <a:lstStyle/>
           <a:p>
-            <a:pPr algn="ctr">
-              <a:spcBef>
-                <a:spcPts val="600"/>
-              </a:spcBef>
-              <a:defRPr sz="1700" b="1">
+            <a:pPr algn="l">
+              <a:spcBef>
+                <a:spcPts val="400"/>
+              </a:spcBef>
+              <a:defRPr sz="1300" b="1">
                 <a:solidFill>
                   <a:srgbClr val="FFFFFF"/>
                 </a:solidFill>
               </a:defRPr>
             </a:pPr>
             <a:r>
-              <a:t>LLM Models (Local)</a:t>
-            </a:r>
-          </a:p>
-        </p:txBody>
-      </p:sp>
-      <p:sp>
-        <p:nvSpPr>
-          <p:cNvPr id="5" name="TextBox 4"/>
-          <p:cNvSpPr txBox="1"/>
-          <p:nvPr/>
-        </p:nvSpPr>
-        <p:spPr>
-          <a:xfrm>
-            <a:off x="548640" y="1920240"/>
-            <a:ext cx="3291840" cy="4114800"/>
-          </a:xfrm>
-          <a:prstGeom prst="rect">
-            <a:avLst/>
-          </a:prstGeom>
-          <a:noFill/>
-        </p:spPr>
-        <p:txBody>
-          <a:bodyPr wrap="square"/>
-          <a:lstStyle/>
-          <a:p>
-            <a:pPr algn="l">
-              <a:defRPr sz="1300" b="0">
-                <a:solidFill>
-                  <a:srgbClr val="2D2D3F"/>
-                </a:solidFill>
-              </a:defRPr>
-            </a:pPr>
-            <a:r>
-              <a:t>qwen3:14b — Primary annotation + reconciliation</a:t>
-            </a:r>
-          </a:p>
-          <a:p>
-            <a:pPr>
-              <a:spcBef>
-                <a:spcPts val="1000"/>
-              </a:spcBef>
-              <a:defRPr sz="1300" b="0">
-                <a:solidFill>
-                  <a:srgbClr val="2D2D3F"/>
-                </a:solidFill>
-              </a:defRPr>
-            </a:pPr>
-            <a:r>
-              <a:t>gemma2:9b — Verifier (conservative)</a:t>
-            </a:r>
-          </a:p>
-          <a:p>
-            <a:pPr>
-              <a:spcBef>
-                <a:spcPts val="1000"/>
-              </a:spcBef>
-              <a:defRPr sz="1300" b="0">
-                <a:solidFill>
-                  <a:srgbClr val="2D2D3F"/>
-                </a:solidFill>
-              </a:defRPr>
-            </a:pPr>
-            <a:r>
-              <a:t>qwen2.5:7b — Verifier (evidence-strict)</a:t>
-            </a:r>
-          </a:p>
-          <a:p>
-            <a:pPr>
-              <a:spcBef>
-                <a:spcPts val="1000"/>
-              </a:spcBef>
-              <a:defRPr sz="1300" b="0">
-                <a:solidFill>
-                  <a:srgbClr val="2D2D3F"/>
-                </a:solidFill>
-              </a:defRPr>
-            </a:pPr>
-            <a:r>
-              <a:t>llama3.1:8b — Verifier (adversarial)</a:t>
-            </a:r>
-          </a:p>
-          <a:p>
-            <a:pPr>
-              <a:spcBef>
-                <a:spcPts val="1000"/>
-              </a:spcBef>
-              <a:defRPr sz="1300" b="0">
-                <a:solidFill>
-                  <a:srgbClr val="2D2D3F"/>
-                </a:solidFill>
-              </a:defRPr>
-            </a:pPr>
-            <a:r>
-              <a:t>All models run locally via Ollama</a:t>
-            </a:r>
-          </a:p>
-          <a:p>
-            <a:pPr>
-              <a:spcBef>
-                <a:spcPts val="1000"/>
-              </a:spcBef>
-              <a:defRPr sz="1300" b="0">
-                <a:solidFill>
-                  <a:srgbClr val="2D2D3F"/>
-                </a:solidFill>
-              </a:defRPr>
-            </a:pPr>
-            <a:r>
-              <a:t>No cloud API calls — full data privacy</a:t>
-            </a:r>
-          </a:p>
-        </p:txBody>
-      </p:sp>
-      <p:sp>
-        <p:nvSpPr>
-          <p:cNvPr id="6" name="Rounded Rectangle 5"/>
+              <a:t>  91.4%</a:t>
+            </a:r>
+          </a:p>
+        </p:txBody>
+      </p:sp>
+      <p:sp>
+        <p:nvSpPr>
+          <p:cNvPr id="8" name="Rounded Rectangle 7"/>
           <p:cNvSpPr/>
           <p:nvPr/>
         </p:nvSpPr>
         <p:spPr>
           <a:xfrm>
-            <a:off x="4206240" y="1188720"/>
-            <a:ext cx="3657600" cy="5029200"/>
+            <a:off x="7772400" y="2212848"/>
+            <a:ext cx="2982772" cy="365760"/>
           </a:xfrm>
           <a:prstGeom prst="roundRect">
             <a:avLst/>
           </a:prstGeom>
           <a:solidFill>
-            <a:srgbClr val="FFFFFF"/>
+            <a:srgbClr val="A0A0A0"/>
           </a:solidFill>
-          <a:ln w="25400">
-            <a:solidFill>
-              <a:srgbClr val="00C9A7"/>
-            </a:solidFill>
+          <a:ln>
+            <a:noFill/>
           </a:ln>
           <a:effectLst/>
         </p:spPr>
@@ -10178,6 +11068,95 @@
           </a:fontRef>
         </p:style>
         <p:txBody>
+          <a:bodyPr rtlCol="0" anchor="ctr" wrap="square"/>
+          <a:lstStyle/>
+          <a:p>
+            <a:pPr algn="l">
+              <a:spcBef>
+                <a:spcPts val="400"/>
+              </a:spcBef>
+              <a:defRPr sz="1300" b="1">
+                <a:solidFill>
+                  <a:srgbClr val="FFFFFF"/>
+                </a:solidFill>
+              </a:defRPr>
+            </a:pPr>
+            <a:r>
+              <a:t>  93.2%</a:t>
+            </a:r>
+          </a:p>
+        </p:txBody>
+      </p:sp>
+      <p:sp>
+        <p:nvSpPr>
+          <p:cNvPr id="9" name="TextBox 8"/>
+          <p:cNvSpPr txBox="1"/>
+          <p:nvPr/>
+        </p:nvSpPr>
+        <p:spPr>
+          <a:xfrm>
+            <a:off x="10058400" y="2194560"/>
+            <a:ext cx="1371600" cy="457200"/>
+          </a:xfrm>
+          <a:prstGeom prst="rect">
+            <a:avLst/>
+          </a:prstGeom>
+          <a:noFill/>
+        </p:spPr>
+        <p:txBody>
+          <a:bodyPr wrap="square"/>
+          <a:lstStyle/>
+          <a:p>
+            <a:pPr algn="l">
+              <a:defRPr sz="1200" b="0">
+                <a:solidFill>
+                  <a:srgbClr val="A0A0A0"/>
+                </a:solidFill>
+              </a:defRPr>
+            </a:pPr>
+            <a:r>
+              <a:t>1.8pp gap</a:t>
+            </a:r>
+          </a:p>
+        </p:txBody>
+      </p:sp>
+      <p:sp>
+        <p:nvSpPr>
+          <p:cNvPr id="10" name="Rounded Rectangle 9"/>
+          <p:cNvSpPr/>
+          <p:nvPr/>
+        </p:nvSpPr>
+        <p:spPr>
+          <a:xfrm>
+            <a:off x="914400" y="2788920"/>
+            <a:ext cx="10332720" cy="594360"/>
+          </a:xfrm>
+          <a:prstGeom prst="roundRect">
+            <a:avLst/>
+          </a:prstGeom>
+          <a:solidFill>
+            <a:srgbClr val="F5F7FA"/>
+          </a:solidFill>
+          <a:ln>
+            <a:noFill/>
+          </a:ln>
+          <a:effectLst/>
+        </p:spPr>
+        <p:style>
+          <a:lnRef idx="1">
+            <a:schemeClr val="accent1"/>
+          </a:lnRef>
+          <a:fillRef idx="3">
+            <a:schemeClr val="accent1"/>
+          </a:fillRef>
+          <a:effectRef idx="2">
+            <a:schemeClr val="accent1"/>
+          </a:effectRef>
+          <a:fontRef idx="minor">
+            <a:schemeClr val="lt1"/>
+          </a:fontRef>
+        </p:style>
+        <p:txBody>
           <a:bodyPr rtlCol="0" anchor="ctr"/>
           <a:lstStyle/>
           <a:p>
@@ -10187,14 +11166,713 @@
       </p:sp>
       <p:sp>
         <p:nvSpPr>
-          <p:cNvPr id="7" name="Rounded Rectangle 6"/>
+          <p:cNvPr id="11" name="TextBox 10"/>
+          <p:cNvSpPr txBox="1"/>
+          <p:nvPr/>
+        </p:nvSpPr>
+        <p:spPr>
+          <a:xfrm>
+            <a:off x="1097280" y="2880360"/>
+            <a:ext cx="2743200" cy="457200"/>
+          </a:xfrm>
+          <a:prstGeom prst="rect">
+            <a:avLst/>
+          </a:prstGeom>
+          <a:noFill/>
+        </p:spPr>
+        <p:txBody>
+          <a:bodyPr wrap="square"/>
+          <a:lstStyle/>
+          <a:p>
+            <a:pPr algn="l">
+              <a:defRPr sz="1600" b="1">
+                <a:solidFill>
+                  <a:srgbClr val="FF8C42"/>
+                </a:solidFill>
+              </a:defRPr>
+            </a:pPr>
+            <a:r>
+              <a:t>Delivery Mode</a:t>
+            </a:r>
+          </a:p>
+        </p:txBody>
+      </p:sp>
+      <p:sp>
+        <p:nvSpPr>
+          <p:cNvPr id="12" name="Rounded Rectangle 11"/>
           <p:cNvSpPr/>
           <p:nvPr/>
         </p:nvSpPr>
         <p:spPr>
           <a:xfrm>
-            <a:off x="4206240" y="1188720"/>
-            <a:ext cx="3657600" cy="548640"/>
+            <a:off x="4389120" y="2898648"/>
+            <a:ext cx="2733141" cy="365760"/>
+          </a:xfrm>
+          <a:prstGeom prst="roundRect">
+            <a:avLst/>
+          </a:prstGeom>
+          <a:solidFill>
+            <a:srgbClr val="FF8C42"/>
+          </a:solidFill>
+          <a:ln>
+            <a:noFill/>
+          </a:ln>
+          <a:effectLst/>
+        </p:spPr>
+        <p:style>
+          <a:lnRef idx="1">
+            <a:schemeClr val="accent1"/>
+          </a:lnRef>
+          <a:fillRef idx="3">
+            <a:schemeClr val="accent1"/>
+          </a:fillRef>
+          <a:effectRef idx="2">
+            <a:schemeClr val="accent1"/>
+          </a:effectRef>
+          <a:fontRef idx="minor">
+            <a:schemeClr val="lt1"/>
+          </a:fontRef>
+        </p:style>
+        <p:txBody>
+          <a:bodyPr rtlCol="0" anchor="ctr" wrap="square"/>
+          <a:lstStyle/>
+          <a:p>
+            <a:pPr algn="l">
+              <a:spcBef>
+                <a:spcPts val="400"/>
+              </a:spcBef>
+              <a:defRPr sz="1300" b="1">
+                <a:solidFill>
+                  <a:srgbClr val="FFFFFF"/>
+                </a:solidFill>
+              </a:defRPr>
+            </a:pPr>
+            <a:r>
+              <a:t>  85.4%</a:t>
+            </a:r>
+          </a:p>
+        </p:txBody>
+      </p:sp>
+      <p:sp>
+        <p:nvSpPr>
+          <p:cNvPr id="13" name="Rounded Rectangle 12"/>
+          <p:cNvSpPr/>
+          <p:nvPr/>
+        </p:nvSpPr>
+        <p:spPr>
+          <a:xfrm>
+            <a:off x="7772400" y="2898648"/>
+            <a:ext cx="2845155" cy="365760"/>
+          </a:xfrm>
+          <a:prstGeom prst="roundRect">
+            <a:avLst/>
+          </a:prstGeom>
+          <a:solidFill>
+            <a:srgbClr val="A0A0A0"/>
+          </a:solidFill>
+          <a:ln>
+            <a:noFill/>
+          </a:ln>
+          <a:effectLst/>
+        </p:spPr>
+        <p:style>
+          <a:lnRef idx="1">
+            <a:schemeClr val="accent1"/>
+          </a:lnRef>
+          <a:fillRef idx="3">
+            <a:schemeClr val="accent1"/>
+          </a:fillRef>
+          <a:effectRef idx="2">
+            <a:schemeClr val="accent1"/>
+          </a:effectRef>
+          <a:fontRef idx="minor">
+            <a:schemeClr val="lt1"/>
+          </a:fontRef>
+        </p:style>
+        <p:txBody>
+          <a:bodyPr rtlCol="0" anchor="ctr" wrap="square"/>
+          <a:lstStyle/>
+          <a:p>
+            <a:pPr algn="l">
+              <a:spcBef>
+                <a:spcPts val="400"/>
+              </a:spcBef>
+              <a:defRPr sz="1300" b="1">
+                <a:solidFill>
+                  <a:srgbClr val="FFFFFF"/>
+                </a:solidFill>
+              </a:defRPr>
+            </a:pPr>
+            <a:r>
+              <a:t>  88.9%</a:t>
+            </a:r>
+          </a:p>
+        </p:txBody>
+      </p:sp>
+      <p:sp>
+        <p:nvSpPr>
+          <p:cNvPr id="14" name="TextBox 13"/>
+          <p:cNvSpPr txBox="1"/>
+          <p:nvPr/>
+        </p:nvSpPr>
+        <p:spPr>
+          <a:xfrm>
+            <a:off x="10058400" y="2880360"/>
+            <a:ext cx="1371600" cy="457200"/>
+          </a:xfrm>
+          <a:prstGeom prst="rect">
+            <a:avLst/>
+          </a:prstGeom>
+          <a:noFill/>
+        </p:spPr>
+        <p:txBody>
+          <a:bodyPr wrap="square"/>
+          <a:lstStyle/>
+          <a:p>
+            <a:pPr algn="l">
+              <a:defRPr sz="1200" b="0">
+                <a:solidFill>
+                  <a:srgbClr val="A0A0A0"/>
+                </a:solidFill>
+              </a:defRPr>
+            </a:pPr>
+            <a:r>
+              <a:t>3.5pp gap</a:t>
+            </a:r>
+          </a:p>
+        </p:txBody>
+      </p:sp>
+      <p:sp>
+        <p:nvSpPr>
+          <p:cNvPr id="15" name="Rounded Rectangle 14"/>
+          <p:cNvSpPr/>
+          <p:nvPr/>
+        </p:nvSpPr>
+        <p:spPr>
+          <a:xfrm>
+            <a:off x="914400" y="3474720"/>
+            <a:ext cx="10332720" cy="594360"/>
+          </a:xfrm>
+          <a:prstGeom prst="roundRect">
+            <a:avLst/>
+          </a:prstGeom>
+          <a:solidFill>
+            <a:srgbClr val="FFFFFF"/>
+          </a:solidFill>
+          <a:ln>
+            <a:noFill/>
+          </a:ln>
+          <a:effectLst/>
+        </p:spPr>
+        <p:style>
+          <a:lnRef idx="1">
+            <a:schemeClr val="accent1"/>
+          </a:lnRef>
+          <a:fillRef idx="3">
+            <a:schemeClr val="accent1"/>
+          </a:fillRef>
+          <a:effectRef idx="2">
+            <a:schemeClr val="accent1"/>
+          </a:effectRef>
+          <a:fontRef idx="minor">
+            <a:schemeClr val="lt1"/>
+          </a:fontRef>
+        </p:style>
+        <p:txBody>
+          <a:bodyPr rtlCol="0" anchor="ctr"/>
+          <a:lstStyle/>
+          <a:p>
+            <a:pPr algn="ctr"/>
+          </a:p>
+        </p:txBody>
+      </p:sp>
+      <p:sp>
+        <p:nvSpPr>
+          <p:cNvPr id="16" name="TextBox 15"/>
+          <p:cNvSpPr txBox="1"/>
+          <p:nvPr/>
+        </p:nvSpPr>
+        <p:spPr>
+          <a:xfrm>
+            <a:off x="1097280" y="3566160"/>
+            <a:ext cx="2743200" cy="457200"/>
+          </a:xfrm>
+          <a:prstGeom prst="rect">
+            <a:avLst/>
+          </a:prstGeom>
+          <a:noFill/>
+        </p:spPr>
+        <p:txBody>
+          <a:bodyPr wrap="square"/>
+          <a:lstStyle/>
+          <a:p>
+            <a:pPr algn="l">
+              <a:defRPr sz="1600" b="1">
+                <a:solidFill>
+                  <a:srgbClr val="FF5C5C"/>
+                </a:solidFill>
+              </a:defRPr>
+            </a:pPr>
+            <a:r>
+              <a:t>Outcome</a:t>
+            </a:r>
+          </a:p>
+        </p:txBody>
+      </p:sp>
+      <p:sp>
+        <p:nvSpPr>
+          <p:cNvPr id="17" name="Rounded Rectangle 16"/>
+          <p:cNvSpPr/>
+          <p:nvPr/>
+        </p:nvSpPr>
+        <p:spPr>
+          <a:xfrm>
+            <a:off x="4389120" y="3584448"/>
+            <a:ext cx="1936241" cy="365760"/>
+          </a:xfrm>
+          <a:prstGeom prst="roundRect">
+            <a:avLst/>
+          </a:prstGeom>
+          <a:solidFill>
+            <a:srgbClr val="FF5C5C"/>
+          </a:solidFill>
+          <a:ln>
+            <a:noFill/>
+          </a:ln>
+          <a:effectLst/>
+        </p:spPr>
+        <p:style>
+          <a:lnRef idx="1">
+            <a:schemeClr val="accent1"/>
+          </a:lnRef>
+          <a:fillRef idx="3">
+            <a:schemeClr val="accent1"/>
+          </a:fillRef>
+          <a:effectRef idx="2">
+            <a:schemeClr val="accent1"/>
+          </a:effectRef>
+          <a:fontRef idx="minor">
+            <a:schemeClr val="lt1"/>
+          </a:fontRef>
+        </p:style>
+        <p:txBody>
+          <a:bodyPr rtlCol="0" anchor="ctr" wrap="square"/>
+          <a:lstStyle/>
+          <a:p>
+            <a:pPr algn="l">
+              <a:spcBef>
+                <a:spcPts val="400"/>
+              </a:spcBef>
+              <a:defRPr sz="1300" b="1">
+                <a:solidFill>
+                  <a:srgbClr val="FFFFFF"/>
+                </a:solidFill>
+              </a:defRPr>
+            </a:pPr>
+            <a:r>
+              <a:t>  60.5%</a:t>
+            </a:r>
+          </a:p>
+        </p:txBody>
+      </p:sp>
+      <p:sp>
+        <p:nvSpPr>
+          <p:cNvPr id="18" name="Rounded Rectangle 17"/>
+          <p:cNvSpPr/>
+          <p:nvPr/>
+        </p:nvSpPr>
+        <p:spPr>
+          <a:xfrm>
+            <a:off x="7772400" y="3584448"/>
+            <a:ext cx="2057857" cy="365760"/>
+          </a:xfrm>
+          <a:prstGeom prst="roundRect">
+            <a:avLst/>
+          </a:prstGeom>
+          <a:solidFill>
+            <a:srgbClr val="A0A0A0"/>
+          </a:solidFill>
+          <a:ln>
+            <a:noFill/>
+          </a:ln>
+          <a:effectLst/>
+        </p:spPr>
+        <p:style>
+          <a:lnRef idx="1">
+            <a:schemeClr val="accent1"/>
+          </a:lnRef>
+          <a:fillRef idx="3">
+            <a:schemeClr val="accent1"/>
+          </a:fillRef>
+          <a:effectRef idx="2">
+            <a:schemeClr val="accent1"/>
+          </a:effectRef>
+          <a:fontRef idx="minor">
+            <a:schemeClr val="lt1"/>
+          </a:fontRef>
+        </p:style>
+        <p:txBody>
+          <a:bodyPr rtlCol="0" anchor="ctr" wrap="square"/>
+          <a:lstStyle/>
+          <a:p>
+            <a:pPr algn="l">
+              <a:spcBef>
+                <a:spcPts val="400"/>
+              </a:spcBef>
+              <a:defRPr sz="1300" b="1">
+                <a:solidFill>
+                  <a:srgbClr val="FFFFFF"/>
+                </a:solidFill>
+              </a:defRPr>
+            </a:pPr>
+            <a:r>
+              <a:t>  64.3%</a:t>
+            </a:r>
+          </a:p>
+        </p:txBody>
+      </p:sp>
+      <p:sp>
+        <p:nvSpPr>
+          <p:cNvPr id="19" name="TextBox 18"/>
+          <p:cNvSpPr txBox="1"/>
+          <p:nvPr/>
+        </p:nvSpPr>
+        <p:spPr>
+          <a:xfrm>
+            <a:off x="10058400" y="3566160"/>
+            <a:ext cx="1371600" cy="457200"/>
+          </a:xfrm>
+          <a:prstGeom prst="rect">
+            <a:avLst/>
+          </a:prstGeom>
+          <a:noFill/>
+        </p:spPr>
+        <p:txBody>
+          <a:bodyPr wrap="square"/>
+          <a:lstStyle/>
+          <a:p>
+            <a:pPr algn="l">
+              <a:defRPr sz="1200" b="0">
+                <a:solidFill>
+                  <a:srgbClr val="A0A0A0"/>
+                </a:solidFill>
+              </a:defRPr>
+            </a:pPr>
+            <a:r>
+              <a:t>3.8pp gap</a:t>
+            </a:r>
+          </a:p>
+        </p:txBody>
+      </p:sp>
+      <p:sp>
+        <p:nvSpPr>
+          <p:cNvPr id="20" name="Rounded Rectangle 19"/>
+          <p:cNvSpPr/>
+          <p:nvPr/>
+        </p:nvSpPr>
+        <p:spPr>
+          <a:xfrm>
+            <a:off x="914400" y="4160520"/>
+            <a:ext cx="10332720" cy="594360"/>
+          </a:xfrm>
+          <a:prstGeom prst="roundRect">
+            <a:avLst/>
+          </a:prstGeom>
+          <a:solidFill>
+            <a:srgbClr val="F5F7FA"/>
+          </a:solidFill>
+          <a:ln>
+            <a:noFill/>
+          </a:ln>
+          <a:effectLst/>
+        </p:spPr>
+        <p:style>
+          <a:lnRef idx="1">
+            <a:schemeClr val="accent1"/>
+          </a:lnRef>
+          <a:fillRef idx="3">
+            <a:schemeClr val="accent1"/>
+          </a:fillRef>
+          <a:effectRef idx="2">
+            <a:schemeClr val="accent1"/>
+          </a:effectRef>
+          <a:fontRef idx="minor">
+            <a:schemeClr val="lt1"/>
+          </a:fontRef>
+        </p:style>
+        <p:txBody>
+          <a:bodyPr rtlCol="0" anchor="ctr"/>
+          <a:lstStyle/>
+          <a:p>
+            <a:pPr algn="ctr"/>
+          </a:p>
+        </p:txBody>
+      </p:sp>
+      <p:sp>
+        <p:nvSpPr>
+          <p:cNvPr id="21" name="TextBox 20"/>
+          <p:cNvSpPr txBox="1"/>
+          <p:nvPr/>
+        </p:nvSpPr>
+        <p:spPr>
+          <a:xfrm>
+            <a:off x="1097280" y="4251960"/>
+            <a:ext cx="2743200" cy="457200"/>
+          </a:xfrm>
+          <a:prstGeom prst="rect">
+            <a:avLst/>
+          </a:prstGeom>
+          <a:noFill/>
+        </p:spPr>
+        <p:txBody>
+          <a:bodyPr wrap="square"/>
+          <a:lstStyle/>
+          <a:p>
+            <a:pPr algn="l">
+              <a:defRPr sz="1600" b="1">
+                <a:solidFill>
+                  <a:srgbClr val="A85CFF"/>
+                </a:solidFill>
+              </a:defRPr>
+            </a:pPr>
+            <a:r>
+              <a:t>Reason for Failure</a:t>
+            </a:r>
+          </a:p>
+        </p:txBody>
+      </p:sp>
+      <p:sp>
+        <p:nvSpPr>
+          <p:cNvPr id="22" name="Rounded Rectangle 21"/>
+          <p:cNvSpPr/>
+          <p:nvPr/>
+        </p:nvSpPr>
+        <p:spPr>
+          <a:xfrm>
+            <a:off x="4389120" y="4270248"/>
+            <a:ext cx="2957169" cy="365760"/>
+          </a:xfrm>
+          <a:prstGeom prst="roundRect">
+            <a:avLst/>
+          </a:prstGeom>
+          <a:solidFill>
+            <a:srgbClr val="A85CFF"/>
+          </a:solidFill>
+          <a:ln>
+            <a:noFill/>
+          </a:ln>
+          <a:effectLst/>
+        </p:spPr>
+        <p:style>
+          <a:lnRef idx="1">
+            <a:schemeClr val="accent1"/>
+          </a:lnRef>
+          <a:fillRef idx="3">
+            <a:schemeClr val="accent1"/>
+          </a:fillRef>
+          <a:effectRef idx="2">
+            <a:schemeClr val="accent1"/>
+          </a:effectRef>
+          <a:fontRef idx="minor">
+            <a:schemeClr val="lt1"/>
+          </a:fontRef>
+        </p:style>
+        <p:txBody>
+          <a:bodyPr rtlCol="0" anchor="ctr" wrap="square"/>
+          <a:lstStyle/>
+          <a:p>
+            <a:pPr algn="l">
+              <a:spcBef>
+                <a:spcPts val="400"/>
+              </a:spcBef>
+              <a:defRPr sz="1300" b="1">
+                <a:solidFill>
+                  <a:srgbClr val="FFFFFF"/>
+                </a:solidFill>
+              </a:defRPr>
+            </a:pPr>
+            <a:r>
+              <a:t>  92.4%</a:t>
+            </a:r>
+          </a:p>
+        </p:txBody>
+      </p:sp>
+      <p:sp>
+        <p:nvSpPr>
+          <p:cNvPr id="23" name="Rounded Rectangle 22"/>
+          <p:cNvSpPr/>
+          <p:nvPr/>
+        </p:nvSpPr>
+        <p:spPr>
+          <a:xfrm>
+            <a:off x="7772400" y="4270248"/>
+            <a:ext cx="2835554" cy="365760"/>
+          </a:xfrm>
+          <a:prstGeom prst="roundRect">
+            <a:avLst/>
+          </a:prstGeom>
+          <a:solidFill>
+            <a:srgbClr val="A0A0A0"/>
+          </a:solidFill>
+          <a:ln>
+            <a:noFill/>
+          </a:ln>
+          <a:effectLst/>
+        </p:spPr>
+        <p:style>
+          <a:lnRef idx="1">
+            <a:schemeClr val="accent1"/>
+          </a:lnRef>
+          <a:fillRef idx="3">
+            <a:schemeClr val="accent1"/>
+          </a:fillRef>
+          <a:effectRef idx="2">
+            <a:schemeClr val="accent1"/>
+          </a:effectRef>
+          <a:fontRef idx="minor">
+            <a:schemeClr val="lt1"/>
+          </a:fontRef>
+        </p:style>
+        <p:txBody>
+          <a:bodyPr rtlCol="0" anchor="ctr" wrap="square"/>
+          <a:lstStyle/>
+          <a:p>
+            <a:pPr algn="l">
+              <a:spcBef>
+                <a:spcPts val="400"/>
+              </a:spcBef>
+              <a:defRPr sz="1300" b="1">
+                <a:solidFill>
+                  <a:srgbClr val="FFFFFF"/>
+                </a:solidFill>
+              </a:defRPr>
+            </a:pPr>
+            <a:r>
+              <a:t>  88.6%</a:t>
+            </a:r>
+          </a:p>
+        </p:txBody>
+      </p:sp>
+      <p:sp>
+        <p:nvSpPr>
+          <p:cNvPr id="24" name="TextBox 23"/>
+          <p:cNvSpPr txBox="1"/>
+          <p:nvPr/>
+        </p:nvSpPr>
+        <p:spPr>
+          <a:xfrm>
+            <a:off x="10058400" y="4251960"/>
+            <a:ext cx="1371600" cy="457200"/>
+          </a:xfrm>
+          <a:prstGeom prst="rect">
+            <a:avLst/>
+          </a:prstGeom>
+          <a:noFill/>
+        </p:spPr>
+        <p:txBody>
+          <a:bodyPr wrap="square"/>
+          <a:lstStyle/>
+          <a:p>
+            <a:pPr algn="l">
+              <a:defRPr sz="1200" b="1">
+                <a:solidFill>
+                  <a:srgbClr val="00C9A7"/>
+                </a:solidFill>
+              </a:defRPr>
+            </a:pPr>
+            <a:r>
+              <a:t>Above human</a:t>
+            </a:r>
+          </a:p>
+        </p:txBody>
+      </p:sp>
+      <p:sp>
+        <p:nvSpPr>
+          <p:cNvPr id="25" name="Rounded Rectangle 24"/>
+          <p:cNvSpPr/>
+          <p:nvPr/>
+        </p:nvSpPr>
+        <p:spPr>
+          <a:xfrm>
+            <a:off x="914400" y="4846320"/>
+            <a:ext cx="10332720" cy="594360"/>
+          </a:xfrm>
+          <a:prstGeom prst="roundRect">
+            <a:avLst/>
+          </a:prstGeom>
+          <a:solidFill>
+            <a:srgbClr val="FFFFFF"/>
+          </a:solidFill>
+          <a:ln>
+            <a:noFill/>
+          </a:ln>
+          <a:effectLst/>
+        </p:spPr>
+        <p:style>
+          <a:lnRef idx="1">
+            <a:schemeClr val="accent1"/>
+          </a:lnRef>
+          <a:fillRef idx="3">
+            <a:schemeClr val="accent1"/>
+          </a:fillRef>
+          <a:effectRef idx="2">
+            <a:schemeClr val="accent1"/>
+          </a:effectRef>
+          <a:fontRef idx="minor">
+            <a:schemeClr val="lt1"/>
+          </a:fontRef>
+        </p:style>
+        <p:txBody>
+          <a:bodyPr rtlCol="0" anchor="ctr"/>
+          <a:lstStyle/>
+          <a:p>
+            <a:pPr algn="ctr"/>
+          </a:p>
+        </p:txBody>
+      </p:sp>
+      <p:sp>
+        <p:nvSpPr>
+          <p:cNvPr id="26" name="TextBox 25"/>
+          <p:cNvSpPr txBox="1"/>
+          <p:nvPr/>
+        </p:nvSpPr>
+        <p:spPr>
+          <a:xfrm>
+            <a:off x="1097280" y="4937760"/>
+            <a:ext cx="2743200" cy="457200"/>
+          </a:xfrm>
+          <a:prstGeom prst="rect">
+            <a:avLst/>
+          </a:prstGeom>
+          <a:noFill/>
+        </p:spPr>
+        <p:txBody>
+          <a:bodyPr wrap="square"/>
+          <a:lstStyle/>
+          <a:p>
+            <a:pPr algn="l">
+              <a:defRPr sz="1600" b="1">
+                <a:solidFill>
+                  <a:srgbClr val="00C9A7"/>
+                </a:solidFill>
+              </a:defRPr>
+            </a:pPr>
+            <a:r>
+              <a:t>Peptide</a:t>
+            </a:r>
+          </a:p>
+        </p:txBody>
+      </p:sp>
+      <p:sp>
+        <p:nvSpPr>
+          <p:cNvPr id="27" name="Rounded Rectangle 26"/>
+          <p:cNvSpPr/>
+          <p:nvPr/>
+        </p:nvSpPr>
+        <p:spPr>
+          <a:xfrm>
+            <a:off x="4389120" y="4956048"/>
+            <a:ext cx="2825953" cy="365760"/>
           </a:xfrm>
           <a:prstGeom prst="roundRect">
             <a:avLst/>
@@ -10225,151 +11903,41 @@
           <a:bodyPr rtlCol="0" anchor="ctr" wrap="square"/>
           <a:lstStyle/>
           <a:p>
-            <a:pPr algn="ctr">
-              <a:spcBef>
-                <a:spcPts val="600"/>
-              </a:spcBef>
-              <a:defRPr sz="1700" b="1">
+            <a:pPr algn="l">
+              <a:spcBef>
+                <a:spcPts val="400"/>
+              </a:spcBef>
+              <a:defRPr sz="1300" b="1">
                 <a:solidFill>
                   <a:srgbClr val="FFFFFF"/>
                 </a:solidFill>
               </a:defRPr>
             </a:pPr>
             <a:r>
-              <a:t>Infrastructure</a:t>
-            </a:r>
-          </a:p>
-        </p:txBody>
-      </p:sp>
-      <p:sp>
-        <p:nvSpPr>
-          <p:cNvPr id="8" name="TextBox 7"/>
-          <p:cNvSpPr txBox="1"/>
-          <p:nvPr/>
-        </p:nvSpPr>
-        <p:spPr>
-          <a:xfrm>
-            <a:off x="4389120" y="1920240"/>
-            <a:ext cx="3291840" cy="4114800"/>
-          </a:xfrm>
-          <a:prstGeom prst="rect">
-            <a:avLst/>
-          </a:prstGeom>
-          <a:noFill/>
-        </p:spPr>
-        <p:txBody>
-          <a:bodyPr wrap="square"/>
-          <a:lstStyle/>
-          <a:p>
-            <a:pPr algn="l">
-              <a:defRPr sz="1300" b="0">
-                <a:solidFill>
-                  <a:srgbClr val="2D2D3F"/>
-                </a:solidFill>
-              </a:defRPr>
-            </a:pPr>
-            <a:r>
-              <a:t>Python + FastAPI (async web framework)</a:t>
-            </a:r>
-          </a:p>
-          <a:p>
-            <a:pPr>
-              <a:spcBef>
-                <a:spcPts val="1000"/>
-              </a:spcBef>
-              <a:defRPr sz="1300" b="0">
-                <a:solidFill>
-                  <a:srgbClr val="2D2D3F"/>
-                </a:solidFill>
-              </a:defRPr>
-            </a:pPr>
-            <a:r>
-              <a:t>Ollama (local LLM inference server)</a:t>
-            </a:r>
-          </a:p>
-          <a:p>
-            <a:pPr>
-              <a:spcBef>
-                <a:spcPts val="1000"/>
-              </a:spcBef>
-              <a:defRPr sz="1300" b="0">
-                <a:solidFill>
-                  <a:srgbClr val="2D2D3F"/>
-                </a:solidFill>
-              </a:defRPr>
-            </a:pPr>
-            <a:r>
-              <a:t>Mac Mini M4 (16GB) or Server (240GB+)</a:t>
-            </a:r>
-          </a:p>
-          <a:p>
-            <a:pPr>
-              <a:spcBef>
-                <a:spcPts val="1000"/>
-              </a:spcBef>
-              <a:defRPr sz="1300" b="0">
-                <a:solidFill>
-                  <a:srgbClr val="2D2D3F"/>
-                </a:solidFill>
-              </a:defRPr>
-            </a:pPr>
-            <a:r>
-              <a:t>LaunchDaemon services (boot on startup)</a:t>
-            </a:r>
-          </a:p>
-          <a:p>
-            <a:pPr>
-              <a:spcBef>
-                <a:spcPts val="1000"/>
-              </a:spcBef>
-              <a:defRPr sz="1300" b="0">
-                <a:solidFill>
-                  <a:srgbClr val="2D2D3F"/>
-                </a:solidFill>
-              </a:defRPr>
-            </a:pPr>
-            <a:r>
-              <a:t>Git-based auto-updater (30s polling)</a:t>
-            </a:r>
-          </a:p>
-          <a:p>
-            <a:pPr>
-              <a:spcBef>
-                <a:spcPts val="1000"/>
-              </a:spcBef>
-              <a:defRPr sz="1300" b="0">
-                <a:solidFill>
-                  <a:srgbClr val="2D2D3F"/>
-                </a:solidFill>
-              </a:defRPr>
-            </a:pPr>
-            <a:r>
-              <a:t>Prod: port 8005 | Dev: port 9005</a:t>
-            </a:r>
-          </a:p>
-        </p:txBody>
-      </p:sp>
-      <p:sp>
-        <p:nvSpPr>
-          <p:cNvPr id="9" name="Rounded Rectangle 8"/>
+              <a:t>  88.3%</a:t>
+            </a:r>
+          </a:p>
+        </p:txBody>
+      </p:sp>
+      <p:sp>
+        <p:nvSpPr>
+          <p:cNvPr id="28" name="Rounded Rectangle 27"/>
           <p:cNvSpPr/>
           <p:nvPr/>
         </p:nvSpPr>
         <p:spPr>
           <a:xfrm>
-            <a:off x="8046720" y="1188720"/>
-            <a:ext cx="3657600" cy="5029200"/>
+            <a:off x="7772400" y="4956048"/>
+            <a:ext cx="2752344" cy="365760"/>
           </a:xfrm>
           <a:prstGeom prst="roundRect">
             <a:avLst/>
           </a:prstGeom>
           <a:solidFill>
-            <a:srgbClr val="FFFFFF"/>
+            <a:srgbClr val="A0A0A0"/>
           </a:solidFill>
-          <a:ln w="25400">
-            <a:solidFill>
-              <a:srgbClr val="FF8C42"/>
-            </a:solidFill>
+          <a:ln>
+            <a:noFill/>
           </a:ln>
           <a:effectLst/>
         </p:spPr>
@@ -10388,29 +11956,74 @@
           </a:fontRef>
         </p:style>
         <p:txBody>
-          <a:bodyPr rtlCol="0" anchor="ctr"/>
-          <a:lstStyle/>
-          <a:p>
-            <a:pPr algn="ctr"/>
-          </a:p>
-        </p:txBody>
-      </p:sp>
-      <p:sp>
-        <p:nvSpPr>
-          <p:cNvPr id="10" name="Rounded Rectangle 9"/>
+          <a:bodyPr rtlCol="0" anchor="ctr" wrap="square"/>
+          <a:lstStyle/>
+          <a:p>
+            <a:pPr algn="l">
+              <a:spcBef>
+                <a:spcPts val="400"/>
+              </a:spcBef>
+              <a:defRPr sz="1300" b="1">
+                <a:solidFill>
+                  <a:srgbClr val="FFFFFF"/>
+                </a:solidFill>
+              </a:defRPr>
+            </a:pPr>
+            <a:r>
+              <a:t>  86.0%</a:t>
+            </a:r>
+          </a:p>
+        </p:txBody>
+      </p:sp>
+      <p:sp>
+        <p:nvSpPr>
+          <p:cNvPr id="29" name="TextBox 28"/>
+          <p:cNvSpPr txBox="1"/>
+          <p:nvPr/>
+        </p:nvSpPr>
+        <p:spPr>
+          <a:xfrm>
+            <a:off x="10058400" y="4937760"/>
+            <a:ext cx="1371600" cy="457200"/>
+          </a:xfrm>
+          <a:prstGeom prst="rect">
+            <a:avLst/>
+          </a:prstGeom>
+          <a:noFill/>
+        </p:spPr>
+        <p:txBody>
+          <a:bodyPr wrap="square"/>
+          <a:lstStyle/>
+          <a:p>
+            <a:pPr algn="l">
+              <a:defRPr sz="1200" b="1">
+                <a:solidFill>
+                  <a:srgbClr val="00C9A7"/>
+                </a:solidFill>
+              </a:defRPr>
+            </a:pPr>
+            <a:r>
+              <a:t>Above human</a:t>
+            </a:r>
+          </a:p>
+        </p:txBody>
+      </p:sp>
+      <p:sp>
+        <p:nvSpPr>
+          <p:cNvPr id="30" name="Rounded Rectangle 29"/>
           <p:cNvSpPr/>
           <p:nvPr/>
         </p:nvSpPr>
         <p:spPr>
           <a:xfrm>
-            <a:off x="8046720" y="1188720"/>
-            <a:ext cx="3657600" cy="548640"/>
+            <a:off x="914400" y="5532120"/>
+            <a:ext cx="10332720" cy="594360"/>
           </a:xfrm>
           <a:prstGeom prst="roundRect">
             <a:avLst/>
           </a:prstGeom>
           <a:solidFill>
-            <a:srgbClr val="FF8C42"/>
+            <a:srgbClr val="F5F7FA"/>
           </a:solidFill>
           <a:ln>
             <a:noFill/>
@@ -10432,35 +12045,168 @@
           </a:fontRef>
         </p:style>
         <p:txBody>
+          <a:bodyPr rtlCol="0" anchor="ctr"/>
+          <a:lstStyle/>
+          <a:p>
+            <a:pPr algn="ctr"/>
+          </a:p>
+        </p:txBody>
+      </p:sp>
+      <p:sp>
+        <p:nvSpPr>
+          <p:cNvPr id="31" name="TextBox 30"/>
+          <p:cNvSpPr txBox="1"/>
+          <p:nvPr/>
+        </p:nvSpPr>
+        <p:spPr>
+          <a:xfrm>
+            <a:off x="1097280" y="5623560"/>
+            <a:ext cx="2743200" cy="457200"/>
+          </a:xfrm>
+          <a:prstGeom prst="rect">
+            <a:avLst/>
+          </a:prstGeom>
+          <a:noFill/>
+        </p:spPr>
+        <p:txBody>
+          <a:bodyPr wrap="square"/>
+          <a:lstStyle/>
+          <a:p>
+            <a:pPr algn="l">
+              <a:defRPr sz="1600" b="1">
+                <a:solidFill>
+                  <a:srgbClr val="0096D6"/>
+                </a:solidFill>
+              </a:defRPr>
+            </a:pPr>
+            <a:r>
+              <a:t>Sequence</a:t>
+            </a:r>
+          </a:p>
+        </p:txBody>
+      </p:sp>
+      <p:sp>
+        <p:nvSpPr>
+          <p:cNvPr id="32" name="Rounded Rectangle 31"/>
+          <p:cNvSpPr/>
+          <p:nvPr/>
+        </p:nvSpPr>
+        <p:spPr>
+          <a:xfrm>
+            <a:off x="4389120" y="5641848"/>
+            <a:ext cx="1865833" cy="365760"/>
+          </a:xfrm>
+          <a:prstGeom prst="roundRect">
+            <a:avLst/>
+          </a:prstGeom>
+          <a:solidFill>
+            <a:srgbClr val="0096D6"/>
+          </a:solidFill>
+          <a:ln>
+            <a:noFill/>
+          </a:ln>
+          <a:effectLst/>
+        </p:spPr>
+        <p:style>
+          <a:lnRef idx="1">
+            <a:schemeClr val="accent1"/>
+          </a:lnRef>
+          <a:fillRef idx="3">
+            <a:schemeClr val="accent1"/>
+          </a:fillRef>
+          <a:effectRef idx="2">
+            <a:schemeClr val="accent1"/>
+          </a:effectRef>
+          <a:fontRef idx="minor">
+            <a:schemeClr val="lt1"/>
+          </a:fontRef>
+        </p:style>
+        <p:txBody>
           <a:bodyPr rtlCol="0" anchor="ctr" wrap="square"/>
           <a:lstStyle/>
           <a:p>
-            <a:pPr algn="ctr">
-              <a:spcBef>
-                <a:spcPts val="600"/>
-              </a:spcBef>
-              <a:defRPr sz="1700" b="1">
+            <a:pPr algn="l">
+              <a:spcBef>
+                <a:spcPts val="400"/>
+              </a:spcBef>
+              <a:defRPr sz="1300" b="1">
                 <a:solidFill>
                   <a:srgbClr val="FFFFFF"/>
                 </a:solidFill>
               </a:defRPr>
             </a:pPr>
             <a:r>
-              <a:t>Data Pipeline</a:t>
-            </a:r>
-          </a:p>
-        </p:txBody>
-      </p:sp>
-      <p:sp>
-        <p:nvSpPr>
-          <p:cNvPr id="11" name="TextBox 10"/>
+              <a:t>  58.3%</a:t>
+            </a:r>
+          </a:p>
+        </p:txBody>
+      </p:sp>
+      <p:sp>
+        <p:nvSpPr>
+          <p:cNvPr id="33" name="Rounded Rectangle 32"/>
+          <p:cNvSpPr/>
+          <p:nvPr/>
+        </p:nvSpPr>
+        <p:spPr>
+          <a:xfrm>
+            <a:off x="7772400" y="5641848"/>
+            <a:ext cx="1664208" cy="365760"/>
+          </a:xfrm>
+          <a:prstGeom prst="roundRect">
+            <a:avLst/>
+          </a:prstGeom>
+          <a:solidFill>
+            <a:srgbClr val="A0A0A0"/>
+          </a:solidFill>
+          <a:ln>
+            <a:noFill/>
+          </a:ln>
+          <a:effectLst/>
+        </p:spPr>
+        <p:style>
+          <a:lnRef idx="1">
+            <a:schemeClr val="accent1"/>
+          </a:lnRef>
+          <a:fillRef idx="3">
+            <a:schemeClr val="accent1"/>
+          </a:fillRef>
+          <a:effectRef idx="2">
+            <a:schemeClr val="accent1"/>
+          </a:effectRef>
+          <a:fontRef idx="minor">
+            <a:schemeClr val="lt1"/>
+          </a:fontRef>
+        </p:style>
+        <p:txBody>
+          <a:bodyPr rtlCol="0" anchor="ctr" wrap="square"/>
+          <a:lstStyle/>
+          <a:p>
+            <a:pPr algn="l">
+              <a:spcBef>
+                <a:spcPts val="400"/>
+              </a:spcBef>
+              <a:defRPr sz="1300" b="1">
+                <a:solidFill>
+                  <a:srgbClr val="FFFFFF"/>
+                </a:solidFill>
+              </a:defRPr>
+            </a:pPr>
+            <a:r>
+              <a:t>  52.0%</a:t>
+            </a:r>
+          </a:p>
+        </p:txBody>
+      </p:sp>
+      <p:sp>
+        <p:nvSpPr>
+          <p:cNvPr id="34" name="TextBox 33"/>
           <p:cNvSpPr txBox="1"/>
           <p:nvPr/>
         </p:nvSpPr>
         <p:spPr>
           <a:xfrm>
-            <a:off x="8229600" y="1920240"/>
-            <a:ext cx="3291840" cy="4114800"/>
+            <a:off x="10058400" y="5623560"/>
+            <a:ext cx="1371600" cy="457200"/>
           </a:xfrm>
           <a:prstGeom prst="rect">
             <a:avLst/>
@@ -10472,89 +12218,47 @@
           <a:lstStyle/>
           <a:p>
             <a:pPr algn="l">
-              <a:defRPr sz="1300" b="0">
-                <a:solidFill>
-                  <a:srgbClr val="2D2D3F"/>
-                </a:solidFill>
-              </a:defRPr>
-            </a:pPr>
-            <a:r>
-              <a:t>15 async research agents (parallel HTTP)</a:t>
-            </a:r>
-          </a:p>
-          <a:p>
-            <a:pPr>
-              <a:spcBef>
-                <a:spcPts val="1000"/>
-              </a:spcBef>
-              <a:defRPr sz="1300" b="0">
-                <a:solidFill>
-                  <a:srgbClr val="2D2D3F"/>
-                </a:solidFill>
-              </a:defRPr>
-            </a:pPr>
-            <a:r>
-              <a:t>HTTPX async client with per-model timeouts</a:t>
-            </a:r>
-          </a:p>
-          <a:p>
-            <a:pPr>
-              <a:spcBef>
-                <a:spcPts val="1000"/>
-              </a:spcBef>
-              <a:defRPr sz="1300" b="0">
-                <a:solidFill>
-                  <a:srgbClr val="2D2D3F"/>
-                </a:solidFill>
-              </a:defRPr>
-            </a:pPr>
-            <a:r>
-              <a:t>Structured evidence dossier architecture</a:t>
-            </a:r>
-          </a:p>
-          <a:p>
-            <a:pPr>
-              <a:spcBef>
-                <a:spcPts val="1000"/>
-              </a:spcBef>
-              <a:defRPr sz="1300" b="0">
-                <a:solidFill>
-                  <a:srgbClr val="2D2D3F"/>
-                </a:solidFill>
-              </a:defRPr>
-            </a:pPr>
-            <a:r>
-              <a:t>Publication quality classification (v41)</a:t>
-            </a:r>
-          </a:p>
-          <a:p>
-            <a:pPr>
-              <a:spcBef>
-                <a:spcPts val="1000"/>
-              </a:spcBef>
-              <a:defRPr sz="1300" b="0">
-                <a:solidFill>
-                  <a:srgbClr val="2D2D3F"/>
-                </a:solidFill>
-              </a:defRPr>
-            </a:pPr>
-            <a:r>
-              <a:t>Efficacy vs safety keyword separation</a:t>
-            </a:r>
-          </a:p>
-          <a:p>
-            <a:pPr>
-              <a:spcBef>
-                <a:spcPts val="1000"/>
-              </a:spcBef>
-              <a:defRPr sz="1300" b="0">
-                <a:solidFill>
-                  <a:srgbClr val="2D2D3F"/>
-                </a:solidFill>
-              </a:defRPr>
-            </a:pPr>
-            <a:r>
-              <a:t>Full JSON audit trail per trial</a:t>
+              <a:defRPr sz="1200" b="1">
+                <a:solidFill>
+                  <a:srgbClr val="00C9A7"/>
+                </a:solidFill>
+              </a:defRPr>
+            </a:pPr>
+            <a:r>
+              <a:t>Above human</a:t>
+            </a:r>
+          </a:p>
+        </p:txBody>
+      </p:sp>
+      <p:sp>
+        <p:nvSpPr>
+          <p:cNvPr id="35" name="TextBox 34"/>
+          <p:cNvSpPr txBox="1"/>
+          <p:nvPr/>
+        </p:nvSpPr>
+        <p:spPr>
+          <a:xfrm>
+            <a:off x="4389120" y="6217920"/>
+            <a:ext cx="7315200" cy="365760"/>
+          </a:xfrm>
+          <a:prstGeom prst="rect">
+            <a:avLst/>
+          </a:prstGeom>
+          <a:noFill/>
+        </p:spPr>
+        <p:txBody>
+          <a:bodyPr wrap="square"/>
+          <a:lstStyle/>
+          <a:p>
+            <a:pPr algn="l">
+              <a:defRPr sz="1200" b="0">
+                <a:solidFill>
+                  <a:srgbClr val="A0A0A0"/>
+                </a:solidFill>
+              </a:defRPr>
+            </a:pPr>
+            <a:r>
+              <a:t>          Agent vs R1                                              Human R1 vs R2</a:t>
             </a:r>
           </a:p>
         </p:txBody>

--- a/amp_llm_v3/standalone modules/agent_annotate/docs/Agent_Annotate_Architecture.pptx
+++ b/amp_llm_v3/standalone modules/agent_annotate/docs/Agent_Annotate_Architecture.pptx
@@ -10850,8 +10850,8 @@
         </p:nvSpPr>
         <p:spPr>
           <a:xfrm>
-            <a:off x="914400" y="1463040"/>
-            <a:ext cx="10332720" cy="548640"/>
+            <a:off x="457200" y="1463040"/>
+            <a:ext cx="11247120" cy="548640"/>
           </a:xfrm>
           <a:prstGeom prst="roundRect">
             <a:avLst/>
@@ -10884,16 +10884,16 @@
           <a:p>
             <a:pPr algn="l">
               <a:spcBef>
-                <a:spcPts val="600"/>
-              </a:spcBef>
-              <a:defRPr sz="1400" b="1">
+                <a:spcPts val="800"/>
+              </a:spcBef>
+              <a:defRPr sz="1300" b="1">
                 <a:solidFill>
                   <a:srgbClr val="FFFFFF"/>
                 </a:solidFill>
               </a:defRPr>
             </a:pPr>
             <a:r>
-              <a:t>Field                                          Agent vs R1          Human R1 vs R2          Status</a:t>
+              <a:t>   Field                     Agent AC₁    Agent %       Human AC₁    Human %       Status             p-value (two-tailed)</a:t>
             </a:r>
           </a:p>
         </p:txBody>
@@ -10906,8 +10906,8 @@
         </p:nvSpPr>
         <p:spPr>
           <a:xfrm>
-            <a:off x="914400" y="2103120"/>
-            <a:ext cx="10332720" cy="594360"/>
+            <a:off x="457200" y="2103120"/>
+            <a:ext cx="11247120" cy="548640"/>
           </a:xfrm>
           <a:prstGeom prst="roundRect">
             <a:avLst/>
@@ -10950,8 +10950,8 @@
         </p:nvSpPr>
         <p:spPr>
           <a:xfrm>
-            <a:off x="1097280" y="2194560"/>
-            <a:ext cx="2743200" cy="457200"/>
+            <a:off x="640080" y="2176272"/>
+            <a:ext cx="2011680" cy="411480"/>
           </a:xfrm>
           <a:prstGeom prst="rect">
             <a:avLst/>
@@ -10963,7 +10963,7 @@
           <a:lstStyle/>
           <a:p>
             <a:pPr algn="l">
-              <a:defRPr sz="1600" b="1">
+              <a:defRPr sz="1500" b="1">
                 <a:solidFill>
                   <a:srgbClr val="0096D6"/>
                 </a:solidFill>
@@ -10977,112 +10977,66 @@
       </p:sp>
       <p:sp>
         <p:nvSpPr>
-          <p:cNvPr id="7" name="Rounded Rectangle 6"/>
-          <p:cNvSpPr/>
-          <p:nvPr/>
-        </p:nvSpPr>
-        <p:spPr>
-          <a:xfrm>
-            <a:off x="4389120" y="2212848"/>
-            <a:ext cx="2925165" cy="365760"/>
-          </a:xfrm>
-          <a:prstGeom prst="roundRect">
-            <a:avLst/>
-          </a:prstGeom>
-          <a:solidFill>
-            <a:srgbClr val="0096D6"/>
-          </a:solidFill>
-          <a:ln>
-            <a:noFill/>
-          </a:ln>
-          <a:effectLst/>
-        </p:spPr>
-        <p:style>
-          <a:lnRef idx="1">
-            <a:schemeClr val="accent1"/>
-          </a:lnRef>
-          <a:fillRef idx="3">
-            <a:schemeClr val="accent1"/>
-          </a:fillRef>
-          <a:effectRef idx="2">
-            <a:schemeClr val="accent1"/>
-          </a:effectRef>
-          <a:fontRef idx="minor">
-            <a:schemeClr val="lt1"/>
-          </a:fontRef>
-        </p:style>
-        <p:txBody>
-          <a:bodyPr rtlCol="0" anchor="ctr" wrap="square"/>
-          <a:lstStyle/>
-          <a:p>
-            <a:pPr algn="l">
-              <a:spcBef>
-                <a:spcPts val="400"/>
-              </a:spcBef>
-              <a:defRPr sz="1300" b="1">
-                <a:solidFill>
-                  <a:srgbClr val="FFFFFF"/>
-                </a:solidFill>
-              </a:defRPr>
-            </a:pPr>
-            <a:r>
-              <a:t>  91.4%</a:t>
-            </a:r>
-          </a:p>
-        </p:txBody>
-      </p:sp>
-      <p:sp>
-        <p:nvSpPr>
-          <p:cNvPr id="8" name="Rounded Rectangle 7"/>
-          <p:cNvSpPr/>
-          <p:nvPr/>
-        </p:nvSpPr>
-        <p:spPr>
-          <a:xfrm>
-            <a:off x="7772400" y="2212848"/>
-            <a:ext cx="2982772" cy="365760"/>
-          </a:xfrm>
-          <a:prstGeom prst="roundRect">
-            <a:avLst/>
-          </a:prstGeom>
-          <a:solidFill>
-            <a:srgbClr val="A0A0A0"/>
-          </a:solidFill>
-          <a:ln>
-            <a:noFill/>
-          </a:ln>
-          <a:effectLst/>
-        </p:spPr>
-        <p:style>
-          <a:lnRef idx="1">
-            <a:schemeClr val="accent1"/>
-          </a:lnRef>
-          <a:fillRef idx="3">
-            <a:schemeClr val="accent1"/>
-          </a:fillRef>
-          <a:effectRef idx="2">
-            <a:schemeClr val="accent1"/>
-          </a:effectRef>
-          <a:fontRef idx="minor">
-            <a:schemeClr val="lt1"/>
-          </a:fontRef>
-        </p:style>
-        <p:txBody>
-          <a:bodyPr rtlCol="0" anchor="ctr" wrap="square"/>
-          <a:lstStyle/>
-          <a:p>
-            <a:pPr algn="l">
-              <a:spcBef>
-                <a:spcPts val="400"/>
-              </a:spcBef>
-              <a:defRPr sz="1300" b="1">
-                <a:solidFill>
-                  <a:srgbClr val="FFFFFF"/>
-                </a:solidFill>
-              </a:defRPr>
-            </a:pPr>
-            <a:r>
-              <a:t>  93.2%</a:t>
+          <p:cNvPr id="7" name="TextBox 6"/>
+          <p:cNvSpPr txBox="1"/>
+          <p:nvPr/>
+        </p:nvSpPr>
+        <p:spPr>
+          <a:xfrm>
+            <a:off x="2743200" y="2176272"/>
+            <a:ext cx="1097280" cy="411480"/>
+          </a:xfrm>
+          <a:prstGeom prst="rect">
+            <a:avLst/>
+          </a:prstGeom>
+          <a:noFill/>
+        </p:spPr>
+        <p:txBody>
+          <a:bodyPr wrap="square"/>
+          <a:lstStyle/>
+          <a:p>
+            <a:pPr algn="ctr">
+              <a:defRPr sz="1400" b="1">
+                <a:solidFill>
+                  <a:srgbClr val="2D2D3F"/>
+                </a:solidFill>
+              </a:defRPr>
+            </a:pPr>
+            <a:r>
+              <a:t>0.903</a:t>
+            </a:r>
+          </a:p>
+        </p:txBody>
+      </p:sp>
+      <p:sp>
+        <p:nvSpPr>
+          <p:cNvPr id="8" name="TextBox 7"/>
+          <p:cNvSpPr txBox="1"/>
+          <p:nvPr/>
+        </p:nvSpPr>
+        <p:spPr>
+          <a:xfrm>
+            <a:off x="3931920" y="2176272"/>
+            <a:ext cx="1097280" cy="411480"/>
+          </a:xfrm>
+          <a:prstGeom prst="rect">
+            <a:avLst/>
+          </a:prstGeom>
+          <a:noFill/>
+        </p:spPr>
+        <p:txBody>
+          <a:bodyPr wrap="square"/>
+          <a:lstStyle/>
+          <a:p>
+            <a:pPr algn="ctr">
+              <a:defRPr sz="1400" b="0">
+                <a:solidFill>
+                  <a:srgbClr val="A0A0A0"/>
+                </a:solidFill>
+              </a:defRPr>
+            </a:pPr>
+            <a:r>
+              <a:t>91.4%</a:t>
             </a:r>
           </a:p>
         </p:txBody>
@@ -11095,8 +11049,8 @@
         </p:nvSpPr>
         <p:spPr>
           <a:xfrm>
-            <a:off x="10058400" y="2194560"/>
-            <a:ext cx="1371600" cy="457200"/>
+            <a:off x="5212080" y="2176272"/>
+            <a:ext cx="1097280" cy="411480"/>
           </a:xfrm>
           <a:prstGeom prst="rect">
             <a:avLst/>
@@ -11107,29 +11061,128 @@
           <a:bodyPr wrap="square"/>
           <a:lstStyle/>
           <a:p>
-            <a:pPr algn="l">
+            <a:pPr algn="ctr">
+              <a:defRPr sz="1400" b="1">
+                <a:solidFill>
+                  <a:srgbClr val="2D2D3F"/>
+                </a:solidFill>
+              </a:defRPr>
+            </a:pPr>
+            <a:r>
+              <a:t>0.919</a:t>
+            </a:r>
+          </a:p>
+        </p:txBody>
+      </p:sp>
+      <p:sp>
+        <p:nvSpPr>
+          <p:cNvPr id="10" name="TextBox 9"/>
+          <p:cNvSpPr txBox="1"/>
+          <p:nvPr/>
+        </p:nvSpPr>
+        <p:spPr>
+          <a:xfrm>
+            <a:off x="6400800" y="2176272"/>
+            <a:ext cx="1097280" cy="411480"/>
+          </a:xfrm>
+          <a:prstGeom prst="rect">
+            <a:avLst/>
+          </a:prstGeom>
+          <a:noFill/>
+        </p:spPr>
+        <p:txBody>
+          <a:bodyPr wrap="square"/>
+          <a:lstStyle/>
+          <a:p>
+            <a:pPr algn="ctr">
+              <a:defRPr sz="1400" b="0">
+                <a:solidFill>
+                  <a:srgbClr val="A0A0A0"/>
+                </a:solidFill>
+              </a:defRPr>
+            </a:pPr>
+            <a:r>
+              <a:t>93.2%</a:t>
+            </a:r>
+          </a:p>
+        </p:txBody>
+      </p:sp>
+      <p:sp>
+        <p:nvSpPr>
+          <p:cNvPr id="11" name="TextBox 10"/>
+          <p:cNvSpPr txBox="1"/>
+          <p:nvPr/>
+        </p:nvSpPr>
+        <p:spPr>
+          <a:xfrm>
+            <a:off x="7589520" y="2176272"/>
+            <a:ext cx="1645920" cy="411480"/>
+          </a:xfrm>
+          <a:prstGeom prst="rect">
+            <a:avLst/>
+          </a:prstGeom>
+          <a:noFill/>
+        </p:spPr>
+        <p:txBody>
+          <a:bodyPr wrap="square"/>
+          <a:lstStyle/>
+          <a:p>
+            <a:pPr algn="ctr">
+              <a:defRPr sz="1300" b="0">
+                <a:solidFill>
+                  <a:srgbClr val="A0A0A0"/>
+                </a:solidFill>
+              </a:defRPr>
+            </a:pPr>
+            <a:r>
+              <a:t>1.8pp gap</a:t>
+            </a:r>
+          </a:p>
+        </p:txBody>
+      </p:sp>
+      <p:sp>
+        <p:nvSpPr>
+          <p:cNvPr id="12" name="TextBox 11"/>
+          <p:cNvSpPr txBox="1"/>
+          <p:nvPr/>
+        </p:nvSpPr>
+        <p:spPr>
+          <a:xfrm>
+            <a:off x="9418320" y="2176272"/>
+            <a:ext cx="2103120" cy="411480"/>
+          </a:xfrm>
+          <a:prstGeom prst="rect">
+            <a:avLst/>
+          </a:prstGeom>
+          <a:noFill/>
+        </p:spPr>
+        <p:txBody>
+          <a:bodyPr wrap="square"/>
+          <a:lstStyle/>
+          <a:p>
+            <a:pPr algn="ctr">
               <a:defRPr sz="1200" b="0">
                 <a:solidFill>
-                  <a:srgbClr val="A0A0A0"/>
-                </a:solidFill>
-              </a:defRPr>
-            </a:pPr>
-            <a:r>
-              <a:t>1.8pp gap</a:t>
-            </a:r>
-          </a:p>
-        </p:txBody>
-      </p:sp>
-      <p:sp>
-        <p:nvSpPr>
-          <p:cNvPr id="10" name="Rounded Rectangle 9"/>
+                  <a:srgbClr val="00C9A7"/>
+                </a:solidFill>
+              </a:defRPr>
+            </a:pPr>
+            <a:r>
+              <a:t>p=0.82  Not significant</a:t>
+            </a:r>
+          </a:p>
+        </p:txBody>
+      </p:sp>
+      <p:sp>
+        <p:nvSpPr>
+          <p:cNvPr id="13" name="Rounded Rectangle 12"/>
           <p:cNvSpPr/>
           <p:nvPr/>
         </p:nvSpPr>
         <p:spPr>
           <a:xfrm>
-            <a:off x="914400" y="2788920"/>
-            <a:ext cx="10332720" cy="594360"/>
+            <a:off x="457200" y="2743200"/>
+            <a:ext cx="11247120" cy="548640"/>
           </a:xfrm>
           <a:prstGeom prst="roundRect">
             <a:avLst/>
@@ -11166,159 +11219,14 @@
       </p:sp>
       <p:sp>
         <p:nvSpPr>
-          <p:cNvPr id="11" name="TextBox 10"/>
-          <p:cNvSpPr txBox="1"/>
-          <p:nvPr/>
-        </p:nvSpPr>
-        <p:spPr>
-          <a:xfrm>
-            <a:off x="1097280" y="2880360"/>
-            <a:ext cx="2743200" cy="457200"/>
-          </a:xfrm>
-          <a:prstGeom prst="rect">
-            <a:avLst/>
-          </a:prstGeom>
-          <a:noFill/>
-        </p:spPr>
-        <p:txBody>
-          <a:bodyPr wrap="square"/>
-          <a:lstStyle/>
-          <a:p>
-            <a:pPr algn="l">
-              <a:defRPr sz="1600" b="1">
-                <a:solidFill>
-                  <a:srgbClr val="FF8C42"/>
-                </a:solidFill>
-              </a:defRPr>
-            </a:pPr>
-            <a:r>
-              <a:t>Delivery Mode</a:t>
-            </a:r>
-          </a:p>
-        </p:txBody>
-      </p:sp>
-      <p:sp>
-        <p:nvSpPr>
-          <p:cNvPr id="12" name="Rounded Rectangle 11"/>
-          <p:cNvSpPr/>
-          <p:nvPr/>
-        </p:nvSpPr>
-        <p:spPr>
-          <a:xfrm>
-            <a:off x="4389120" y="2898648"/>
-            <a:ext cx="2733141" cy="365760"/>
-          </a:xfrm>
-          <a:prstGeom prst="roundRect">
-            <a:avLst/>
-          </a:prstGeom>
-          <a:solidFill>
-            <a:srgbClr val="FF8C42"/>
-          </a:solidFill>
-          <a:ln>
-            <a:noFill/>
-          </a:ln>
-          <a:effectLst/>
-        </p:spPr>
-        <p:style>
-          <a:lnRef idx="1">
-            <a:schemeClr val="accent1"/>
-          </a:lnRef>
-          <a:fillRef idx="3">
-            <a:schemeClr val="accent1"/>
-          </a:fillRef>
-          <a:effectRef idx="2">
-            <a:schemeClr val="accent1"/>
-          </a:effectRef>
-          <a:fontRef idx="minor">
-            <a:schemeClr val="lt1"/>
-          </a:fontRef>
-        </p:style>
-        <p:txBody>
-          <a:bodyPr rtlCol="0" anchor="ctr" wrap="square"/>
-          <a:lstStyle/>
-          <a:p>
-            <a:pPr algn="l">
-              <a:spcBef>
-                <a:spcPts val="400"/>
-              </a:spcBef>
-              <a:defRPr sz="1300" b="1">
-                <a:solidFill>
-                  <a:srgbClr val="FFFFFF"/>
-                </a:solidFill>
-              </a:defRPr>
-            </a:pPr>
-            <a:r>
-              <a:t>  85.4%</a:t>
-            </a:r>
-          </a:p>
-        </p:txBody>
-      </p:sp>
-      <p:sp>
-        <p:nvSpPr>
-          <p:cNvPr id="13" name="Rounded Rectangle 12"/>
-          <p:cNvSpPr/>
-          <p:nvPr/>
-        </p:nvSpPr>
-        <p:spPr>
-          <a:xfrm>
-            <a:off x="7772400" y="2898648"/>
-            <a:ext cx="2845155" cy="365760"/>
-          </a:xfrm>
-          <a:prstGeom prst="roundRect">
-            <a:avLst/>
-          </a:prstGeom>
-          <a:solidFill>
-            <a:srgbClr val="A0A0A0"/>
-          </a:solidFill>
-          <a:ln>
-            <a:noFill/>
-          </a:ln>
-          <a:effectLst/>
-        </p:spPr>
-        <p:style>
-          <a:lnRef idx="1">
-            <a:schemeClr val="accent1"/>
-          </a:lnRef>
-          <a:fillRef idx="3">
-            <a:schemeClr val="accent1"/>
-          </a:fillRef>
-          <a:effectRef idx="2">
-            <a:schemeClr val="accent1"/>
-          </a:effectRef>
-          <a:fontRef idx="minor">
-            <a:schemeClr val="lt1"/>
-          </a:fontRef>
-        </p:style>
-        <p:txBody>
-          <a:bodyPr rtlCol="0" anchor="ctr" wrap="square"/>
-          <a:lstStyle/>
-          <a:p>
-            <a:pPr algn="l">
-              <a:spcBef>
-                <a:spcPts val="400"/>
-              </a:spcBef>
-              <a:defRPr sz="1300" b="1">
-                <a:solidFill>
-                  <a:srgbClr val="FFFFFF"/>
-                </a:solidFill>
-              </a:defRPr>
-            </a:pPr>
-            <a:r>
-              <a:t>  88.9%</a:t>
-            </a:r>
-          </a:p>
-        </p:txBody>
-      </p:sp>
-      <p:sp>
-        <p:nvSpPr>
           <p:cNvPr id="14" name="TextBox 13"/>
           <p:cNvSpPr txBox="1"/>
           <p:nvPr/>
         </p:nvSpPr>
         <p:spPr>
           <a:xfrm>
-            <a:off x="10058400" y="2880360"/>
-            <a:ext cx="1371600" cy="457200"/>
+            <a:off x="640080" y="2816352"/>
+            <a:ext cx="2011680" cy="411480"/>
           </a:xfrm>
           <a:prstGeom prst="rect">
             <a:avLst/>
@@ -11330,28 +11238,226 @@
           <a:lstStyle/>
           <a:p>
             <a:pPr algn="l">
+              <a:defRPr sz="1500" b="1">
+                <a:solidFill>
+                  <a:srgbClr val="FF8C42"/>
+                </a:solidFill>
+              </a:defRPr>
+            </a:pPr>
+            <a:r>
+              <a:t>Delivery Mode</a:t>
+            </a:r>
+          </a:p>
+        </p:txBody>
+      </p:sp>
+      <p:sp>
+        <p:nvSpPr>
+          <p:cNvPr id="15" name="TextBox 14"/>
+          <p:cNvSpPr txBox="1"/>
+          <p:nvPr/>
+        </p:nvSpPr>
+        <p:spPr>
+          <a:xfrm>
+            <a:off x="2743200" y="2816352"/>
+            <a:ext cx="1097280" cy="411480"/>
+          </a:xfrm>
+          <a:prstGeom prst="rect">
+            <a:avLst/>
+          </a:prstGeom>
+          <a:noFill/>
+        </p:spPr>
+        <p:txBody>
+          <a:bodyPr wrap="square"/>
+          <a:lstStyle/>
+          <a:p>
+            <a:pPr algn="ctr">
+              <a:defRPr sz="1400" b="1">
+                <a:solidFill>
+                  <a:srgbClr val="2D2D3F"/>
+                </a:solidFill>
+              </a:defRPr>
+            </a:pPr>
+            <a:r>
+              <a:t>0.835</a:t>
+            </a:r>
+          </a:p>
+        </p:txBody>
+      </p:sp>
+      <p:sp>
+        <p:nvSpPr>
+          <p:cNvPr id="16" name="TextBox 15"/>
+          <p:cNvSpPr txBox="1"/>
+          <p:nvPr/>
+        </p:nvSpPr>
+        <p:spPr>
+          <a:xfrm>
+            <a:off x="3931920" y="2816352"/>
+            <a:ext cx="1097280" cy="411480"/>
+          </a:xfrm>
+          <a:prstGeom prst="rect">
+            <a:avLst/>
+          </a:prstGeom>
+          <a:noFill/>
+        </p:spPr>
+        <p:txBody>
+          <a:bodyPr wrap="square"/>
+          <a:lstStyle/>
+          <a:p>
+            <a:pPr algn="ctr">
+              <a:defRPr sz="1400" b="0">
+                <a:solidFill>
+                  <a:srgbClr val="A0A0A0"/>
+                </a:solidFill>
+              </a:defRPr>
+            </a:pPr>
+            <a:r>
+              <a:t>85.4%</a:t>
+            </a:r>
+          </a:p>
+        </p:txBody>
+      </p:sp>
+      <p:sp>
+        <p:nvSpPr>
+          <p:cNvPr id="17" name="TextBox 16"/>
+          <p:cNvSpPr txBox="1"/>
+          <p:nvPr/>
+        </p:nvSpPr>
+        <p:spPr>
+          <a:xfrm>
+            <a:off x="5212080" y="2816352"/>
+            <a:ext cx="1097280" cy="411480"/>
+          </a:xfrm>
+          <a:prstGeom prst="rect">
+            <a:avLst/>
+          </a:prstGeom>
+          <a:noFill/>
+        </p:spPr>
+        <p:txBody>
+          <a:bodyPr wrap="square"/>
+          <a:lstStyle/>
+          <a:p>
+            <a:pPr algn="ctr">
+              <a:defRPr sz="1400" b="1">
+                <a:solidFill>
+                  <a:srgbClr val="2D2D3F"/>
+                </a:solidFill>
+              </a:defRPr>
+            </a:pPr>
+            <a:r>
+              <a:t>0.878</a:t>
+            </a:r>
+          </a:p>
+        </p:txBody>
+      </p:sp>
+      <p:sp>
+        <p:nvSpPr>
+          <p:cNvPr id="18" name="TextBox 17"/>
+          <p:cNvSpPr txBox="1"/>
+          <p:nvPr/>
+        </p:nvSpPr>
+        <p:spPr>
+          <a:xfrm>
+            <a:off x="6400800" y="2816352"/>
+            <a:ext cx="1097280" cy="411480"/>
+          </a:xfrm>
+          <a:prstGeom prst="rect">
+            <a:avLst/>
+          </a:prstGeom>
+          <a:noFill/>
+        </p:spPr>
+        <p:txBody>
+          <a:bodyPr wrap="square"/>
+          <a:lstStyle/>
+          <a:p>
+            <a:pPr algn="ctr">
+              <a:defRPr sz="1400" b="0">
+                <a:solidFill>
+                  <a:srgbClr val="A0A0A0"/>
+                </a:solidFill>
+              </a:defRPr>
+            </a:pPr>
+            <a:r>
+              <a:t>88.9%</a:t>
+            </a:r>
+          </a:p>
+        </p:txBody>
+      </p:sp>
+      <p:sp>
+        <p:nvSpPr>
+          <p:cNvPr id="19" name="TextBox 18"/>
+          <p:cNvSpPr txBox="1"/>
+          <p:nvPr/>
+        </p:nvSpPr>
+        <p:spPr>
+          <a:xfrm>
+            <a:off x="7589520" y="2816352"/>
+            <a:ext cx="1645920" cy="411480"/>
+          </a:xfrm>
+          <a:prstGeom prst="rect">
+            <a:avLst/>
+          </a:prstGeom>
+          <a:noFill/>
+        </p:spPr>
+        <p:txBody>
+          <a:bodyPr wrap="square"/>
+          <a:lstStyle/>
+          <a:p>
+            <a:pPr algn="ctr">
+              <a:defRPr sz="1300" b="0">
+                <a:solidFill>
+                  <a:srgbClr val="A0A0A0"/>
+                </a:solidFill>
+              </a:defRPr>
+            </a:pPr>
+            <a:r>
+              <a:t>3.5pp gap</a:t>
+            </a:r>
+          </a:p>
+        </p:txBody>
+      </p:sp>
+      <p:sp>
+        <p:nvSpPr>
+          <p:cNvPr id="20" name="TextBox 19"/>
+          <p:cNvSpPr txBox="1"/>
+          <p:nvPr/>
+        </p:nvSpPr>
+        <p:spPr>
+          <a:xfrm>
+            <a:off x="9418320" y="2816352"/>
+            <a:ext cx="2103120" cy="411480"/>
+          </a:xfrm>
+          <a:prstGeom prst="rect">
+            <a:avLst/>
+          </a:prstGeom>
+          <a:noFill/>
+        </p:spPr>
+        <p:txBody>
+          <a:bodyPr wrap="square"/>
+          <a:lstStyle/>
+          <a:p>
+            <a:pPr algn="ctr">
               <a:defRPr sz="1200" b="0">
                 <a:solidFill>
-                  <a:srgbClr val="A0A0A0"/>
-                </a:solidFill>
-              </a:defRPr>
-            </a:pPr>
-            <a:r>
-              <a:t>3.5pp gap</a:t>
-            </a:r>
-          </a:p>
-        </p:txBody>
-      </p:sp>
-      <p:sp>
-        <p:nvSpPr>
-          <p:cNvPr id="15" name="Rounded Rectangle 14"/>
+                  <a:srgbClr val="00C9A7"/>
+                </a:solidFill>
+              </a:defRPr>
+            </a:pPr>
+            <a:r>
+              <a:t>p=0.58  Not significant</a:t>
+            </a:r>
+          </a:p>
+        </p:txBody>
+      </p:sp>
+      <p:sp>
+        <p:nvSpPr>
+          <p:cNvPr id="21" name="Rounded Rectangle 20"/>
           <p:cNvSpPr/>
           <p:nvPr/>
         </p:nvSpPr>
         <p:spPr>
           <a:xfrm>
-            <a:off x="914400" y="3474720"/>
-            <a:ext cx="10332720" cy="594360"/>
+            <a:off x="457200" y="3383279"/>
+            <a:ext cx="11247120" cy="548640"/>
           </a:xfrm>
           <a:prstGeom prst="roundRect">
             <a:avLst/>
@@ -11388,14 +11494,14 @@
       </p:sp>
       <p:sp>
         <p:nvSpPr>
-          <p:cNvPr id="16" name="TextBox 15"/>
+          <p:cNvPr id="22" name="TextBox 21"/>
           <p:cNvSpPr txBox="1"/>
           <p:nvPr/>
         </p:nvSpPr>
         <p:spPr>
           <a:xfrm>
-            <a:off x="1097280" y="3566160"/>
-            <a:ext cx="2743200" cy="457200"/>
+            <a:off x="640080" y="3456431"/>
+            <a:ext cx="2011680" cy="411480"/>
           </a:xfrm>
           <a:prstGeom prst="rect">
             <a:avLst/>
@@ -11407,7 +11513,7 @@
           <a:lstStyle/>
           <a:p>
             <a:pPr algn="l">
-              <a:defRPr sz="1600" b="1">
+              <a:defRPr sz="1500" b="1">
                 <a:solidFill>
                   <a:srgbClr val="FF5C5C"/>
                 </a:solidFill>
@@ -11421,159 +11527,212 @@
       </p:sp>
       <p:sp>
         <p:nvSpPr>
-          <p:cNvPr id="17" name="Rounded Rectangle 16"/>
+          <p:cNvPr id="23" name="TextBox 22"/>
+          <p:cNvSpPr txBox="1"/>
+          <p:nvPr/>
+        </p:nvSpPr>
+        <p:spPr>
+          <a:xfrm>
+            <a:off x="2743200" y="3456431"/>
+            <a:ext cx="1097280" cy="411480"/>
+          </a:xfrm>
+          <a:prstGeom prst="rect">
+            <a:avLst/>
+          </a:prstGeom>
+          <a:noFill/>
+        </p:spPr>
+        <p:txBody>
+          <a:bodyPr wrap="square"/>
+          <a:lstStyle/>
+          <a:p>
+            <a:pPr algn="ctr">
+              <a:defRPr sz="1400" b="1">
+                <a:solidFill>
+                  <a:srgbClr val="2D2D3F"/>
+                </a:solidFill>
+              </a:defRPr>
+            </a:pPr>
+            <a:r>
+              <a:t>0.558</a:t>
+            </a:r>
+          </a:p>
+        </p:txBody>
+      </p:sp>
+      <p:sp>
+        <p:nvSpPr>
+          <p:cNvPr id="24" name="TextBox 23"/>
+          <p:cNvSpPr txBox="1"/>
+          <p:nvPr/>
+        </p:nvSpPr>
+        <p:spPr>
+          <a:xfrm>
+            <a:off x="3931920" y="3456431"/>
+            <a:ext cx="1097280" cy="411480"/>
+          </a:xfrm>
+          <a:prstGeom prst="rect">
+            <a:avLst/>
+          </a:prstGeom>
+          <a:noFill/>
+        </p:spPr>
+        <p:txBody>
+          <a:bodyPr wrap="square"/>
+          <a:lstStyle/>
+          <a:p>
+            <a:pPr algn="ctr">
+              <a:defRPr sz="1400" b="0">
+                <a:solidFill>
+                  <a:srgbClr val="A0A0A0"/>
+                </a:solidFill>
+              </a:defRPr>
+            </a:pPr>
+            <a:r>
+              <a:t>60.5%</a:t>
+            </a:r>
+          </a:p>
+        </p:txBody>
+      </p:sp>
+      <p:sp>
+        <p:nvSpPr>
+          <p:cNvPr id="25" name="TextBox 24"/>
+          <p:cNvSpPr txBox="1"/>
+          <p:nvPr/>
+        </p:nvSpPr>
+        <p:spPr>
+          <a:xfrm>
+            <a:off x="5212080" y="3456431"/>
+            <a:ext cx="1097280" cy="411480"/>
+          </a:xfrm>
+          <a:prstGeom prst="rect">
+            <a:avLst/>
+          </a:prstGeom>
+          <a:noFill/>
+        </p:spPr>
+        <p:txBody>
+          <a:bodyPr wrap="square"/>
+          <a:lstStyle/>
+          <a:p>
+            <a:pPr algn="ctr">
+              <a:defRPr sz="1400" b="1">
+                <a:solidFill>
+                  <a:srgbClr val="2D2D3F"/>
+                </a:solidFill>
+              </a:defRPr>
+            </a:pPr>
+            <a:r>
+              <a:t>0.583</a:t>
+            </a:r>
+          </a:p>
+        </p:txBody>
+      </p:sp>
+      <p:sp>
+        <p:nvSpPr>
+          <p:cNvPr id="26" name="TextBox 25"/>
+          <p:cNvSpPr txBox="1"/>
+          <p:nvPr/>
+        </p:nvSpPr>
+        <p:spPr>
+          <a:xfrm>
+            <a:off x="6400800" y="3456431"/>
+            <a:ext cx="1097280" cy="411480"/>
+          </a:xfrm>
+          <a:prstGeom prst="rect">
+            <a:avLst/>
+          </a:prstGeom>
+          <a:noFill/>
+        </p:spPr>
+        <p:txBody>
+          <a:bodyPr wrap="square"/>
+          <a:lstStyle/>
+          <a:p>
+            <a:pPr algn="ctr">
+              <a:defRPr sz="1400" b="0">
+                <a:solidFill>
+                  <a:srgbClr val="A0A0A0"/>
+                </a:solidFill>
+              </a:defRPr>
+            </a:pPr>
+            <a:r>
+              <a:t>64.3%</a:t>
+            </a:r>
+          </a:p>
+        </p:txBody>
+      </p:sp>
+      <p:sp>
+        <p:nvSpPr>
+          <p:cNvPr id="27" name="TextBox 26"/>
+          <p:cNvSpPr txBox="1"/>
+          <p:nvPr/>
+        </p:nvSpPr>
+        <p:spPr>
+          <a:xfrm>
+            <a:off x="7589520" y="3456431"/>
+            <a:ext cx="1645920" cy="411480"/>
+          </a:xfrm>
+          <a:prstGeom prst="rect">
+            <a:avLst/>
+          </a:prstGeom>
+          <a:noFill/>
+        </p:spPr>
+        <p:txBody>
+          <a:bodyPr wrap="square"/>
+          <a:lstStyle/>
+          <a:p>
+            <a:pPr algn="ctr">
+              <a:defRPr sz="1300" b="0">
+                <a:solidFill>
+                  <a:srgbClr val="A0A0A0"/>
+                </a:solidFill>
+              </a:defRPr>
+            </a:pPr>
+            <a:r>
+              <a:t>3.8pp gap</a:t>
+            </a:r>
+          </a:p>
+        </p:txBody>
+      </p:sp>
+      <p:sp>
+        <p:nvSpPr>
+          <p:cNvPr id="28" name="TextBox 27"/>
+          <p:cNvSpPr txBox="1"/>
+          <p:nvPr/>
+        </p:nvSpPr>
+        <p:spPr>
+          <a:xfrm>
+            <a:off x="9418320" y="3456431"/>
+            <a:ext cx="2103120" cy="411480"/>
+          </a:xfrm>
+          <a:prstGeom prst="rect">
+            <a:avLst/>
+          </a:prstGeom>
+          <a:noFill/>
+        </p:spPr>
+        <p:txBody>
+          <a:bodyPr wrap="square"/>
+          <a:lstStyle/>
+          <a:p>
+            <a:pPr algn="ctr">
+              <a:defRPr sz="1200" b="0">
+                <a:solidFill>
+                  <a:srgbClr val="00C9A7"/>
+                </a:solidFill>
+              </a:defRPr>
+            </a:pPr>
+            <a:r>
+              <a:t>p=0.77  Not significant</a:t>
+            </a:r>
+          </a:p>
+        </p:txBody>
+      </p:sp>
+      <p:sp>
+        <p:nvSpPr>
+          <p:cNvPr id="29" name="Rounded Rectangle 28"/>
           <p:cNvSpPr/>
           <p:nvPr/>
         </p:nvSpPr>
         <p:spPr>
           <a:xfrm>
-            <a:off x="4389120" y="3584448"/>
-            <a:ext cx="1936241" cy="365760"/>
-          </a:xfrm>
-          <a:prstGeom prst="roundRect">
-            <a:avLst/>
-          </a:prstGeom>
-          <a:solidFill>
-            <a:srgbClr val="FF5C5C"/>
-          </a:solidFill>
-          <a:ln>
-            <a:noFill/>
-          </a:ln>
-          <a:effectLst/>
-        </p:spPr>
-        <p:style>
-          <a:lnRef idx="1">
-            <a:schemeClr val="accent1"/>
-          </a:lnRef>
-          <a:fillRef idx="3">
-            <a:schemeClr val="accent1"/>
-          </a:fillRef>
-          <a:effectRef idx="2">
-            <a:schemeClr val="accent1"/>
-          </a:effectRef>
-          <a:fontRef idx="minor">
-            <a:schemeClr val="lt1"/>
-          </a:fontRef>
-        </p:style>
-        <p:txBody>
-          <a:bodyPr rtlCol="0" anchor="ctr" wrap="square"/>
-          <a:lstStyle/>
-          <a:p>
-            <a:pPr algn="l">
-              <a:spcBef>
-                <a:spcPts val="400"/>
-              </a:spcBef>
-              <a:defRPr sz="1300" b="1">
-                <a:solidFill>
-                  <a:srgbClr val="FFFFFF"/>
-                </a:solidFill>
-              </a:defRPr>
-            </a:pPr>
-            <a:r>
-              <a:t>  60.5%</a:t>
-            </a:r>
-          </a:p>
-        </p:txBody>
-      </p:sp>
-      <p:sp>
-        <p:nvSpPr>
-          <p:cNvPr id="18" name="Rounded Rectangle 17"/>
-          <p:cNvSpPr/>
-          <p:nvPr/>
-        </p:nvSpPr>
-        <p:spPr>
-          <a:xfrm>
-            <a:off x="7772400" y="3584448"/>
-            <a:ext cx="2057857" cy="365760"/>
-          </a:xfrm>
-          <a:prstGeom prst="roundRect">
-            <a:avLst/>
-          </a:prstGeom>
-          <a:solidFill>
-            <a:srgbClr val="A0A0A0"/>
-          </a:solidFill>
-          <a:ln>
-            <a:noFill/>
-          </a:ln>
-          <a:effectLst/>
-        </p:spPr>
-        <p:style>
-          <a:lnRef idx="1">
-            <a:schemeClr val="accent1"/>
-          </a:lnRef>
-          <a:fillRef idx="3">
-            <a:schemeClr val="accent1"/>
-          </a:fillRef>
-          <a:effectRef idx="2">
-            <a:schemeClr val="accent1"/>
-          </a:effectRef>
-          <a:fontRef idx="minor">
-            <a:schemeClr val="lt1"/>
-          </a:fontRef>
-        </p:style>
-        <p:txBody>
-          <a:bodyPr rtlCol="0" anchor="ctr" wrap="square"/>
-          <a:lstStyle/>
-          <a:p>
-            <a:pPr algn="l">
-              <a:spcBef>
-                <a:spcPts val="400"/>
-              </a:spcBef>
-              <a:defRPr sz="1300" b="1">
-                <a:solidFill>
-                  <a:srgbClr val="FFFFFF"/>
-                </a:solidFill>
-              </a:defRPr>
-            </a:pPr>
-            <a:r>
-              <a:t>  64.3%</a:t>
-            </a:r>
-          </a:p>
-        </p:txBody>
-      </p:sp>
-      <p:sp>
-        <p:nvSpPr>
-          <p:cNvPr id="19" name="TextBox 18"/>
-          <p:cNvSpPr txBox="1"/>
-          <p:nvPr/>
-        </p:nvSpPr>
-        <p:spPr>
-          <a:xfrm>
-            <a:off x="10058400" y="3566160"/>
-            <a:ext cx="1371600" cy="457200"/>
-          </a:xfrm>
-          <a:prstGeom prst="rect">
-            <a:avLst/>
-          </a:prstGeom>
-          <a:noFill/>
-        </p:spPr>
-        <p:txBody>
-          <a:bodyPr wrap="square"/>
-          <a:lstStyle/>
-          <a:p>
-            <a:pPr algn="l">
-              <a:defRPr sz="1200" b="0">
-                <a:solidFill>
-                  <a:srgbClr val="A0A0A0"/>
-                </a:solidFill>
-              </a:defRPr>
-            </a:pPr>
-            <a:r>
-              <a:t>3.8pp gap</a:t>
-            </a:r>
-          </a:p>
-        </p:txBody>
-      </p:sp>
-      <p:sp>
-        <p:nvSpPr>
-          <p:cNvPr id="20" name="Rounded Rectangle 19"/>
-          <p:cNvSpPr/>
-          <p:nvPr/>
-        </p:nvSpPr>
-        <p:spPr>
-          <a:xfrm>
-            <a:off x="914400" y="4160520"/>
-            <a:ext cx="10332720" cy="594360"/>
+            <a:off x="457200" y="4023359"/>
+            <a:ext cx="11247120" cy="548640"/>
           </a:xfrm>
           <a:prstGeom prst="roundRect">
             <a:avLst/>
@@ -11610,14 +11769,14 @@
       </p:sp>
       <p:sp>
         <p:nvSpPr>
-          <p:cNvPr id="21" name="TextBox 20"/>
+          <p:cNvPr id="30" name="TextBox 29"/>
           <p:cNvSpPr txBox="1"/>
           <p:nvPr/>
         </p:nvSpPr>
         <p:spPr>
           <a:xfrm>
-            <a:off x="1097280" y="4251960"/>
-            <a:ext cx="2743200" cy="457200"/>
+            <a:off x="640080" y="4096511"/>
+            <a:ext cx="2011680" cy="411480"/>
           </a:xfrm>
           <a:prstGeom prst="rect">
             <a:avLst/>
@@ -11629,7 +11788,7 @@
           <a:lstStyle/>
           <a:p>
             <a:pPr algn="l">
-              <a:defRPr sz="1600" b="1">
+              <a:defRPr sz="1500" b="1">
                 <a:solidFill>
                   <a:srgbClr val="A85CFF"/>
                 </a:solidFill>
@@ -11643,159 +11802,212 @@
       </p:sp>
       <p:sp>
         <p:nvSpPr>
-          <p:cNvPr id="22" name="Rounded Rectangle 21"/>
+          <p:cNvPr id="31" name="TextBox 30"/>
+          <p:cNvSpPr txBox="1"/>
+          <p:nvPr/>
+        </p:nvSpPr>
+        <p:spPr>
+          <a:xfrm>
+            <a:off x="2743200" y="4096511"/>
+            <a:ext cx="1097280" cy="411480"/>
+          </a:xfrm>
+          <a:prstGeom prst="rect">
+            <a:avLst/>
+          </a:prstGeom>
+          <a:noFill/>
+        </p:spPr>
+        <p:txBody>
+          <a:bodyPr wrap="square"/>
+          <a:lstStyle/>
+          <a:p>
+            <a:pPr algn="ctr">
+              <a:defRPr sz="1400" b="1">
+                <a:solidFill>
+                  <a:srgbClr val="2D2D3F"/>
+                </a:solidFill>
+              </a:defRPr>
+            </a:pPr>
+            <a:r>
+              <a:t>0.922</a:t>
+            </a:r>
+          </a:p>
+        </p:txBody>
+      </p:sp>
+      <p:sp>
+        <p:nvSpPr>
+          <p:cNvPr id="32" name="TextBox 31"/>
+          <p:cNvSpPr txBox="1"/>
+          <p:nvPr/>
+        </p:nvSpPr>
+        <p:spPr>
+          <a:xfrm>
+            <a:off x="3931920" y="4096511"/>
+            <a:ext cx="1097280" cy="411480"/>
+          </a:xfrm>
+          <a:prstGeom prst="rect">
+            <a:avLst/>
+          </a:prstGeom>
+          <a:noFill/>
+        </p:spPr>
+        <p:txBody>
+          <a:bodyPr wrap="square"/>
+          <a:lstStyle/>
+          <a:p>
+            <a:pPr algn="ctr">
+              <a:defRPr sz="1400" b="0">
+                <a:solidFill>
+                  <a:srgbClr val="A0A0A0"/>
+                </a:solidFill>
+              </a:defRPr>
+            </a:pPr>
+            <a:r>
+              <a:t>92.4%</a:t>
+            </a:r>
+          </a:p>
+        </p:txBody>
+      </p:sp>
+      <p:sp>
+        <p:nvSpPr>
+          <p:cNvPr id="33" name="TextBox 32"/>
+          <p:cNvSpPr txBox="1"/>
+          <p:nvPr/>
+        </p:nvSpPr>
+        <p:spPr>
+          <a:xfrm>
+            <a:off x="5212080" y="4096511"/>
+            <a:ext cx="1097280" cy="411480"/>
+          </a:xfrm>
+          <a:prstGeom prst="rect">
+            <a:avLst/>
+          </a:prstGeom>
+          <a:noFill/>
+        </p:spPr>
+        <p:txBody>
+          <a:bodyPr wrap="square"/>
+          <a:lstStyle/>
+          <a:p>
+            <a:pPr algn="ctr">
+              <a:defRPr sz="1400" b="1">
+                <a:solidFill>
+                  <a:srgbClr val="2D2D3F"/>
+                </a:solidFill>
+              </a:defRPr>
+            </a:pPr>
+            <a:r>
+              <a:t>0.881</a:t>
+            </a:r>
+          </a:p>
+        </p:txBody>
+      </p:sp>
+      <p:sp>
+        <p:nvSpPr>
+          <p:cNvPr id="34" name="TextBox 33"/>
+          <p:cNvSpPr txBox="1"/>
+          <p:nvPr/>
+        </p:nvSpPr>
+        <p:spPr>
+          <a:xfrm>
+            <a:off x="6400800" y="4096511"/>
+            <a:ext cx="1097280" cy="411480"/>
+          </a:xfrm>
+          <a:prstGeom prst="rect">
+            <a:avLst/>
+          </a:prstGeom>
+          <a:noFill/>
+        </p:spPr>
+        <p:txBody>
+          <a:bodyPr wrap="square"/>
+          <a:lstStyle/>
+          <a:p>
+            <a:pPr algn="ctr">
+              <a:defRPr sz="1400" b="0">
+                <a:solidFill>
+                  <a:srgbClr val="A0A0A0"/>
+                </a:solidFill>
+              </a:defRPr>
+            </a:pPr>
+            <a:r>
+              <a:t>88.6%</a:t>
+            </a:r>
+          </a:p>
+        </p:txBody>
+      </p:sp>
+      <p:sp>
+        <p:nvSpPr>
+          <p:cNvPr id="35" name="TextBox 34"/>
+          <p:cNvSpPr txBox="1"/>
+          <p:nvPr/>
+        </p:nvSpPr>
+        <p:spPr>
+          <a:xfrm>
+            <a:off x="7589520" y="4096511"/>
+            <a:ext cx="1645920" cy="411480"/>
+          </a:xfrm>
+          <a:prstGeom prst="rect">
+            <a:avLst/>
+          </a:prstGeom>
+          <a:noFill/>
+        </p:spPr>
+        <p:txBody>
+          <a:bodyPr wrap="square"/>
+          <a:lstStyle/>
+          <a:p>
+            <a:pPr algn="ctr">
+              <a:defRPr sz="1300" b="1">
+                <a:solidFill>
+                  <a:srgbClr val="00C9A7"/>
+                </a:solidFill>
+              </a:defRPr>
+            </a:pPr>
+            <a:r>
+              <a:t>Above human</a:t>
+            </a:r>
+          </a:p>
+        </p:txBody>
+      </p:sp>
+      <p:sp>
+        <p:nvSpPr>
+          <p:cNvPr id="36" name="TextBox 35"/>
+          <p:cNvSpPr txBox="1"/>
+          <p:nvPr/>
+        </p:nvSpPr>
+        <p:spPr>
+          <a:xfrm>
+            <a:off x="9418320" y="4096511"/>
+            <a:ext cx="2103120" cy="411480"/>
+          </a:xfrm>
+          <a:prstGeom prst="rect">
+            <a:avLst/>
+          </a:prstGeom>
+          <a:noFill/>
+        </p:spPr>
+        <p:txBody>
+          <a:bodyPr wrap="square"/>
+          <a:lstStyle/>
+          <a:p>
+            <a:pPr algn="ctr">
+              <a:defRPr sz="1200" b="0">
+                <a:solidFill>
+                  <a:srgbClr val="00C9A7"/>
+                </a:solidFill>
+              </a:defRPr>
+            </a:pPr>
+            <a:r>
+              <a:t>p=0.26  Not significant</a:t>
+            </a:r>
+          </a:p>
+        </p:txBody>
+      </p:sp>
+      <p:sp>
+        <p:nvSpPr>
+          <p:cNvPr id="37" name="Rounded Rectangle 36"/>
           <p:cNvSpPr/>
           <p:nvPr/>
         </p:nvSpPr>
         <p:spPr>
           <a:xfrm>
-            <a:off x="4389120" y="4270248"/>
-            <a:ext cx="2957169" cy="365760"/>
-          </a:xfrm>
-          <a:prstGeom prst="roundRect">
-            <a:avLst/>
-          </a:prstGeom>
-          <a:solidFill>
-            <a:srgbClr val="A85CFF"/>
-          </a:solidFill>
-          <a:ln>
-            <a:noFill/>
-          </a:ln>
-          <a:effectLst/>
-        </p:spPr>
-        <p:style>
-          <a:lnRef idx="1">
-            <a:schemeClr val="accent1"/>
-          </a:lnRef>
-          <a:fillRef idx="3">
-            <a:schemeClr val="accent1"/>
-          </a:fillRef>
-          <a:effectRef idx="2">
-            <a:schemeClr val="accent1"/>
-          </a:effectRef>
-          <a:fontRef idx="minor">
-            <a:schemeClr val="lt1"/>
-          </a:fontRef>
-        </p:style>
-        <p:txBody>
-          <a:bodyPr rtlCol="0" anchor="ctr" wrap="square"/>
-          <a:lstStyle/>
-          <a:p>
-            <a:pPr algn="l">
-              <a:spcBef>
-                <a:spcPts val="400"/>
-              </a:spcBef>
-              <a:defRPr sz="1300" b="1">
-                <a:solidFill>
-                  <a:srgbClr val="FFFFFF"/>
-                </a:solidFill>
-              </a:defRPr>
-            </a:pPr>
-            <a:r>
-              <a:t>  92.4%</a:t>
-            </a:r>
-          </a:p>
-        </p:txBody>
-      </p:sp>
-      <p:sp>
-        <p:nvSpPr>
-          <p:cNvPr id="23" name="Rounded Rectangle 22"/>
-          <p:cNvSpPr/>
-          <p:nvPr/>
-        </p:nvSpPr>
-        <p:spPr>
-          <a:xfrm>
-            <a:off x="7772400" y="4270248"/>
-            <a:ext cx="2835554" cy="365760"/>
-          </a:xfrm>
-          <a:prstGeom prst="roundRect">
-            <a:avLst/>
-          </a:prstGeom>
-          <a:solidFill>
-            <a:srgbClr val="A0A0A0"/>
-          </a:solidFill>
-          <a:ln>
-            <a:noFill/>
-          </a:ln>
-          <a:effectLst/>
-        </p:spPr>
-        <p:style>
-          <a:lnRef idx="1">
-            <a:schemeClr val="accent1"/>
-          </a:lnRef>
-          <a:fillRef idx="3">
-            <a:schemeClr val="accent1"/>
-          </a:fillRef>
-          <a:effectRef idx="2">
-            <a:schemeClr val="accent1"/>
-          </a:effectRef>
-          <a:fontRef idx="minor">
-            <a:schemeClr val="lt1"/>
-          </a:fontRef>
-        </p:style>
-        <p:txBody>
-          <a:bodyPr rtlCol="0" anchor="ctr" wrap="square"/>
-          <a:lstStyle/>
-          <a:p>
-            <a:pPr algn="l">
-              <a:spcBef>
-                <a:spcPts val="400"/>
-              </a:spcBef>
-              <a:defRPr sz="1300" b="1">
-                <a:solidFill>
-                  <a:srgbClr val="FFFFFF"/>
-                </a:solidFill>
-              </a:defRPr>
-            </a:pPr>
-            <a:r>
-              <a:t>  88.6%</a:t>
-            </a:r>
-          </a:p>
-        </p:txBody>
-      </p:sp>
-      <p:sp>
-        <p:nvSpPr>
-          <p:cNvPr id="24" name="TextBox 23"/>
-          <p:cNvSpPr txBox="1"/>
-          <p:nvPr/>
-        </p:nvSpPr>
-        <p:spPr>
-          <a:xfrm>
-            <a:off x="10058400" y="4251960"/>
-            <a:ext cx="1371600" cy="457200"/>
-          </a:xfrm>
-          <a:prstGeom prst="rect">
-            <a:avLst/>
-          </a:prstGeom>
-          <a:noFill/>
-        </p:spPr>
-        <p:txBody>
-          <a:bodyPr wrap="square"/>
-          <a:lstStyle/>
-          <a:p>
-            <a:pPr algn="l">
-              <a:defRPr sz="1200" b="1">
-                <a:solidFill>
-                  <a:srgbClr val="00C9A7"/>
-                </a:solidFill>
-              </a:defRPr>
-            </a:pPr>
-            <a:r>
-              <a:t>Above human</a:t>
-            </a:r>
-          </a:p>
-        </p:txBody>
-      </p:sp>
-      <p:sp>
-        <p:nvSpPr>
-          <p:cNvPr id="25" name="Rounded Rectangle 24"/>
-          <p:cNvSpPr/>
-          <p:nvPr/>
-        </p:nvSpPr>
-        <p:spPr>
-          <a:xfrm>
-            <a:off x="914400" y="4846320"/>
-            <a:ext cx="10332720" cy="594360"/>
+            <a:off x="457200" y="4663440"/>
+            <a:ext cx="11247120" cy="548640"/>
           </a:xfrm>
           <a:prstGeom prst="roundRect">
             <a:avLst/>
@@ -11832,14 +12044,14 @@
       </p:sp>
       <p:sp>
         <p:nvSpPr>
-          <p:cNvPr id="26" name="TextBox 25"/>
+          <p:cNvPr id="38" name="TextBox 37"/>
           <p:cNvSpPr txBox="1"/>
           <p:nvPr/>
         </p:nvSpPr>
         <p:spPr>
           <a:xfrm>
-            <a:off x="1097280" y="4937760"/>
-            <a:ext cx="2743200" cy="457200"/>
+            <a:off x="640080" y="4736592"/>
+            <a:ext cx="2011680" cy="411480"/>
           </a:xfrm>
           <a:prstGeom prst="rect">
             <a:avLst/>
@@ -11851,7 +12063,7 @@
           <a:lstStyle/>
           <a:p>
             <a:pPr algn="l">
-              <a:defRPr sz="1600" b="1">
+              <a:defRPr sz="1500" b="1">
                 <a:solidFill>
                   <a:srgbClr val="00C9A7"/>
                 </a:solidFill>
@@ -11865,159 +12077,212 @@
       </p:sp>
       <p:sp>
         <p:nvSpPr>
-          <p:cNvPr id="27" name="Rounded Rectangle 26"/>
+          <p:cNvPr id="39" name="TextBox 38"/>
+          <p:cNvSpPr txBox="1"/>
+          <p:nvPr/>
+        </p:nvSpPr>
+        <p:spPr>
+          <a:xfrm>
+            <a:off x="2743200" y="4736592"/>
+            <a:ext cx="1097280" cy="411480"/>
+          </a:xfrm>
+          <a:prstGeom prst="rect">
+            <a:avLst/>
+          </a:prstGeom>
+          <a:noFill/>
+        </p:spPr>
+        <p:txBody>
+          <a:bodyPr wrap="square"/>
+          <a:lstStyle/>
+          <a:p>
+            <a:pPr algn="ctr">
+              <a:defRPr sz="1400" b="1">
+                <a:solidFill>
+                  <a:srgbClr val="2D2D3F"/>
+                </a:solidFill>
+              </a:defRPr>
+            </a:pPr>
+            <a:r>
+              <a:t>0.826</a:t>
+            </a:r>
+          </a:p>
+        </p:txBody>
+      </p:sp>
+      <p:sp>
+        <p:nvSpPr>
+          <p:cNvPr id="40" name="TextBox 39"/>
+          <p:cNvSpPr txBox="1"/>
+          <p:nvPr/>
+        </p:nvSpPr>
+        <p:spPr>
+          <a:xfrm>
+            <a:off x="3931920" y="4736592"/>
+            <a:ext cx="1097280" cy="411480"/>
+          </a:xfrm>
+          <a:prstGeom prst="rect">
+            <a:avLst/>
+          </a:prstGeom>
+          <a:noFill/>
+        </p:spPr>
+        <p:txBody>
+          <a:bodyPr wrap="square"/>
+          <a:lstStyle/>
+          <a:p>
+            <a:pPr algn="ctr">
+              <a:defRPr sz="1400" b="0">
+                <a:solidFill>
+                  <a:srgbClr val="A0A0A0"/>
+                </a:solidFill>
+              </a:defRPr>
+            </a:pPr>
+            <a:r>
+              <a:t>88.3%</a:t>
+            </a:r>
+          </a:p>
+        </p:txBody>
+      </p:sp>
+      <p:sp>
+        <p:nvSpPr>
+          <p:cNvPr id="41" name="TextBox 40"/>
+          <p:cNvSpPr txBox="1"/>
+          <p:nvPr/>
+        </p:nvSpPr>
+        <p:spPr>
+          <a:xfrm>
+            <a:off x="5212080" y="4736592"/>
+            <a:ext cx="1097280" cy="411480"/>
+          </a:xfrm>
+          <a:prstGeom prst="rect">
+            <a:avLst/>
+          </a:prstGeom>
+          <a:noFill/>
+        </p:spPr>
+        <p:txBody>
+          <a:bodyPr wrap="square"/>
+          <a:lstStyle/>
+          <a:p>
+            <a:pPr algn="ctr">
+              <a:defRPr sz="1400" b="1">
+                <a:solidFill>
+                  <a:srgbClr val="2D2D3F"/>
+                </a:solidFill>
+              </a:defRPr>
+            </a:pPr>
+            <a:r>
+              <a:t>0.792</a:t>
+            </a:r>
+          </a:p>
+        </p:txBody>
+      </p:sp>
+      <p:sp>
+        <p:nvSpPr>
+          <p:cNvPr id="42" name="TextBox 41"/>
+          <p:cNvSpPr txBox="1"/>
+          <p:nvPr/>
+        </p:nvSpPr>
+        <p:spPr>
+          <a:xfrm>
+            <a:off x="6400800" y="4736592"/>
+            <a:ext cx="1097280" cy="411480"/>
+          </a:xfrm>
+          <a:prstGeom prst="rect">
+            <a:avLst/>
+          </a:prstGeom>
+          <a:noFill/>
+        </p:spPr>
+        <p:txBody>
+          <a:bodyPr wrap="square"/>
+          <a:lstStyle/>
+          <a:p>
+            <a:pPr algn="ctr">
+              <a:defRPr sz="1400" b="0">
+                <a:solidFill>
+                  <a:srgbClr val="A0A0A0"/>
+                </a:solidFill>
+              </a:defRPr>
+            </a:pPr>
+            <a:r>
+              <a:t>86.0%</a:t>
+            </a:r>
+          </a:p>
+        </p:txBody>
+      </p:sp>
+      <p:sp>
+        <p:nvSpPr>
+          <p:cNvPr id="43" name="TextBox 42"/>
+          <p:cNvSpPr txBox="1"/>
+          <p:nvPr/>
+        </p:nvSpPr>
+        <p:spPr>
+          <a:xfrm>
+            <a:off x="7589520" y="4736592"/>
+            <a:ext cx="1645920" cy="411480"/>
+          </a:xfrm>
+          <a:prstGeom prst="rect">
+            <a:avLst/>
+          </a:prstGeom>
+          <a:noFill/>
+        </p:spPr>
+        <p:txBody>
+          <a:bodyPr wrap="square"/>
+          <a:lstStyle/>
+          <a:p>
+            <a:pPr algn="ctr">
+              <a:defRPr sz="1300" b="1">
+                <a:solidFill>
+                  <a:srgbClr val="00C9A7"/>
+                </a:solidFill>
+              </a:defRPr>
+            </a:pPr>
+            <a:r>
+              <a:t>Above human</a:t>
+            </a:r>
+          </a:p>
+        </p:txBody>
+      </p:sp>
+      <p:sp>
+        <p:nvSpPr>
+          <p:cNvPr id="44" name="TextBox 43"/>
+          <p:cNvSpPr txBox="1"/>
+          <p:nvPr/>
+        </p:nvSpPr>
+        <p:spPr>
+          <a:xfrm>
+            <a:off x="9418320" y="4736592"/>
+            <a:ext cx="2103120" cy="411480"/>
+          </a:xfrm>
+          <a:prstGeom prst="rect">
+            <a:avLst/>
+          </a:prstGeom>
+          <a:noFill/>
+        </p:spPr>
+        <p:txBody>
+          <a:bodyPr wrap="square"/>
+          <a:lstStyle/>
+          <a:p>
+            <a:pPr algn="ctr">
+              <a:defRPr sz="1200" b="0">
+                <a:solidFill>
+                  <a:srgbClr val="00C9A7"/>
+                </a:solidFill>
+              </a:defRPr>
+            </a:pPr>
+            <a:r>
+              <a:t>p=0.76  Not significant</a:t>
+            </a:r>
+          </a:p>
+        </p:txBody>
+      </p:sp>
+      <p:sp>
+        <p:nvSpPr>
+          <p:cNvPr id="45" name="Rounded Rectangle 44"/>
           <p:cNvSpPr/>
           <p:nvPr/>
         </p:nvSpPr>
         <p:spPr>
           <a:xfrm>
-            <a:off x="4389120" y="4956048"/>
-            <a:ext cx="2825953" cy="365760"/>
-          </a:xfrm>
-          <a:prstGeom prst="roundRect">
-            <a:avLst/>
-          </a:prstGeom>
-          <a:solidFill>
-            <a:srgbClr val="00C9A7"/>
-          </a:solidFill>
-          <a:ln>
-            <a:noFill/>
-          </a:ln>
-          <a:effectLst/>
-        </p:spPr>
-        <p:style>
-          <a:lnRef idx="1">
-            <a:schemeClr val="accent1"/>
-          </a:lnRef>
-          <a:fillRef idx="3">
-            <a:schemeClr val="accent1"/>
-          </a:fillRef>
-          <a:effectRef idx="2">
-            <a:schemeClr val="accent1"/>
-          </a:effectRef>
-          <a:fontRef idx="minor">
-            <a:schemeClr val="lt1"/>
-          </a:fontRef>
-        </p:style>
-        <p:txBody>
-          <a:bodyPr rtlCol="0" anchor="ctr" wrap="square"/>
-          <a:lstStyle/>
-          <a:p>
-            <a:pPr algn="l">
-              <a:spcBef>
-                <a:spcPts val="400"/>
-              </a:spcBef>
-              <a:defRPr sz="1300" b="1">
-                <a:solidFill>
-                  <a:srgbClr val="FFFFFF"/>
-                </a:solidFill>
-              </a:defRPr>
-            </a:pPr>
-            <a:r>
-              <a:t>  88.3%</a:t>
-            </a:r>
-          </a:p>
-        </p:txBody>
-      </p:sp>
-      <p:sp>
-        <p:nvSpPr>
-          <p:cNvPr id="28" name="Rounded Rectangle 27"/>
-          <p:cNvSpPr/>
-          <p:nvPr/>
-        </p:nvSpPr>
-        <p:spPr>
-          <a:xfrm>
-            <a:off x="7772400" y="4956048"/>
-            <a:ext cx="2752344" cy="365760"/>
-          </a:xfrm>
-          <a:prstGeom prst="roundRect">
-            <a:avLst/>
-          </a:prstGeom>
-          <a:solidFill>
-            <a:srgbClr val="A0A0A0"/>
-          </a:solidFill>
-          <a:ln>
-            <a:noFill/>
-          </a:ln>
-          <a:effectLst/>
-        </p:spPr>
-        <p:style>
-          <a:lnRef idx="1">
-            <a:schemeClr val="accent1"/>
-          </a:lnRef>
-          <a:fillRef idx="3">
-            <a:schemeClr val="accent1"/>
-          </a:fillRef>
-          <a:effectRef idx="2">
-            <a:schemeClr val="accent1"/>
-          </a:effectRef>
-          <a:fontRef idx="minor">
-            <a:schemeClr val="lt1"/>
-          </a:fontRef>
-        </p:style>
-        <p:txBody>
-          <a:bodyPr rtlCol="0" anchor="ctr" wrap="square"/>
-          <a:lstStyle/>
-          <a:p>
-            <a:pPr algn="l">
-              <a:spcBef>
-                <a:spcPts val="400"/>
-              </a:spcBef>
-              <a:defRPr sz="1300" b="1">
-                <a:solidFill>
-                  <a:srgbClr val="FFFFFF"/>
-                </a:solidFill>
-              </a:defRPr>
-            </a:pPr>
-            <a:r>
-              <a:t>  86.0%</a:t>
-            </a:r>
-          </a:p>
-        </p:txBody>
-      </p:sp>
-      <p:sp>
-        <p:nvSpPr>
-          <p:cNvPr id="29" name="TextBox 28"/>
-          <p:cNvSpPr txBox="1"/>
-          <p:nvPr/>
-        </p:nvSpPr>
-        <p:spPr>
-          <a:xfrm>
-            <a:off x="10058400" y="4937760"/>
-            <a:ext cx="1371600" cy="457200"/>
-          </a:xfrm>
-          <a:prstGeom prst="rect">
-            <a:avLst/>
-          </a:prstGeom>
-          <a:noFill/>
-        </p:spPr>
-        <p:txBody>
-          <a:bodyPr wrap="square"/>
-          <a:lstStyle/>
-          <a:p>
-            <a:pPr algn="l">
-              <a:defRPr sz="1200" b="1">
-                <a:solidFill>
-                  <a:srgbClr val="00C9A7"/>
-                </a:solidFill>
-              </a:defRPr>
-            </a:pPr>
-            <a:r>
-              <a:t>Above human</a:t>
-            </a:r>
-          </a:p>
-        </p:txBody>
-      </p:sp>
-      <p:sp>
-        <p:nvSpPr>
-          <p:cNvPr id="30" name="Rounded Rectangle 29"/>
-          <p:cNvSpPr/>
-          <p:nvPr/>
-        </p:nvSpPr>
-        <p:spPr>
-          <a:xfrm>
-            <a:off x="914400" y="5532120"/>
-            <a:ext cx="10332720" cy="594360"/>
+            <a:off x="457200" y="5303520"/>
+            <a:ext cx="11247120" cy="548640"/>
           </a:xfrm>
           <a:prstGeom prst="roundRect">
             <a:avLst/>
@@ -12054,14 +12319,14 @@
       </p:sp>
       <p:sp>
         <p:nvSpPr>
-          <p:cNvPr id="31" name="TextBox 30"/>
+          <p:cNvPr id="46" name="TextBox 45"/>
           <p:cNvSpPr txBox="1"/>
           <p:nvPr/>
         </p:nvSpPr>
         <p:spPr>
           <a:xfrm>
-            <a:off x="1097280" y="5623560"/>
-            <a:ext cx="2743200" cy="457200"/>
+            <a:off x="640080" y="5376672"/>
+            <a:ext cx="2011680" cy="411480"/>
           </a:xfrm>
           <a:prstGeom prst="rect">
             <a:avLst/>
@@ -12073,7 +12338,7 @@
           <a:lstStyle/>
           <a:p>
             <a:pPr algn="l">
-              <a:defRPr sz="1600" b="1">
+              <a:defRPr sz="1500" b="1">
                 <a:solidFill>
                   <a:srgbClr val="0096D6"/>
                 </a:solidFill>
@@ -12087,126 +12352,179 @@
       </p:sp>
       <p:sp>
         <p:nvSpPr>
-          <p:cNvPr id="32" name="Rounded Rectangle 31"/>
-          <p:cNvSpPr/>
-          <p:nvPr/>
-        </p:nvSpPr>
-        <p:spPr>
-          <a:xfrm>
-            <a:off x="4389120" y="5641848"/>
-            <a:ext cx="1865833" cy="365760"/>
-          </a:xfrm>
-          <a:prstGeom prst="roundRect">
-            <a:avLst/>
-          </a:prstGeom>
-          <a:solidFill>
-            <a:srgbClr val="0096D6"/>
-          </a:solidFill>
-          <a:ln>
-            <a:noFill/>
-          </a:ln>
-          <a:effectLst/>
-        </p:spPr>
-        <p:style>
-          <a:lnRef idx="1">
-            <a:schemeClr val="accent1"/>
-          </a:lnRef>
-          <a:fillRef idx="3">
-            <a:schemeClr val="accent1"/>
-          </a:fillRef>
-          <a:effectRef idx="2">
-            <a:schemeClr val="accent1"/>
-          </a:effectRef>
-          <a:fontRef idx="minor">
-            <a:schemeClr val="lt1"/>
-          </a:fontRef>
-        </p:style>
-        <p:txBody>
-          <a:bodyPr rtlCol="0" anchor="ctr" wrap="square"/>
-          <a:lstStyle/>
-          <a:p>
-            <a:pPr algn="l">
-              <a:spcBef>
-                <a:spcPts val="400"/>
-              </a:spcBef>
+          <p:cNvPr id="47" name="TextBox 46"/>
+          <p:cNvSpPr txBox="1"/>
+          <p:nvPr/>
+        </p:nvSpPr>
+        <p:spPr>
+          <a:xfrm>
+            <a:off x="2743200" y="5376672"/>
+            <a:ext cx="1097280" cy="411480"/>
+          </a:xfrm>
+          <a:prstGeom prst="rect">
+            <a:avLst/>
+          </a:prstGeom>
+          <a:noFill/>
+        </p:spPr>
+        <p:txBody>
+          <a:bodyPr wrap="square"/>
+          <a:lstStyle/>
+          <a:p>
+            <a:pPr algn="ctr">
+              <a:defRPr sz="1400" b="1">
+                <a:solidFill>
+                  <a:srgbClr val="2D2D3F"/>
+                </a:solidFill>
+              </a:defRPr>
+            </a:pPr>
+            <a:r>
+              <a:t>0.566</a:t>
+            </a:r>
+          </a:p>
+        </p:txBody>
+      </p:sp>
+      <p:sp>
+        <p:nvSpPr>
+          <p:cNvPr id="48" name="TextBox 47"/>
+          <p:cNvSpPr txBox="1"/>
+          <p:nvPr/>
+        </p:nvSpPr>
+        <p:spPr>
+          <a:xfrm>
+            <a:off x="3931920" y="5376672"/>
+            <a:ext cx="1097280" cy="411480"/>
+          </a:xfrm>
+          <a:prstGeom prst="rect">
+            <a:avLst/>
+          </a:prstGeom>
+          <a:noFill/>
+        </p:spPr>
+        <p:txBody>
+          <a:bodyPr wrap="square"/>
+          <a:lstStyle/>
+          <a:p>
+            <a:pPr algn="ctr">
+              <a:defRPr sz="1400" b="0">
+                <a:solidFill>
+                  <a:srgbClr val="A0A0A0"/>
+                </a:solidFill>
+              </a:defRPr>
+            </a:pPr>
+            <a:r>
+              <a:t>58.3%</a:t>
+            </a:r>
+          </a:p>
+        </p:txBody>
+      </p:sp>
+      <p:sp>
+        <p:nvSpPr>
+          <p:cNvPr id="49" name="TextBox 48"/>
+          <p:cNvSpPr txBox="1"/>
+          <p:nvPr/>
+        </p:nvSpPr>
+        <p:spPr>
+          <a:xfrm>
+            <a:off x="5212080" y="5376672"/>
+            <a:ext cx="1097280" cy="411480"/>
+          </a:xfrm>
+          <a:prstGeom prst="rect">
+            <a:avLst/>
+          </a:prstGeom>
+          <a:noFill/>
+        </p:spPr>
+        <p:txBody>
+          <a:bodyPr wrap="square"/>
+          <a:lstStyle/>
+          <a:p>
+            <a:pPr algn="ctr">
+              <a:defRPr sz="1400" b="1">
+                <a:solidFill>
+                  <a:srgbClr val="2D2D3F"/>
+                </a:solidFill>
+              </a:defRPr>
+            </a:pPr>
+            <a:r>
+              <a:t>0.518</a:t>
+            </a:r>
+          </a:p>
+        </p:txBody>
+      </p:sp>
+      <p:sp>
+        <p:nvSpPr>
+          <p:cNvPr id="50" name="TextBox 49"/>
+          <p:cNvSpPr txBox="1"/>
+          <p:nvPr/>
+        </p:nvSpPr>
+        <p:spPr>
+          <a:xfrm>
+            <a:off x="6400800" y="5376672"/>
+            <a:ext cx="1097280" cy="411480"/>
+          </a:xfrm>
+          <a:prstGeom prst="rect">
+            <a:avLst/>
+          </a:prstGeom>
+          <a:noFill/>
+        </p:spPr>
+        <p:txBody>
+          <a:bodyPr wrap="square"/>
+          <a:lstStyle/>
+          <a:p>
+            <a:pPr algn="ctr">
+              <a:defRPr sz="1400" b="0">
+                <a:solidFill>
+                  <a:srgbClr val="A0A0A0"/>
+                </a:solidFill>
+              </a:defRPr>
+            </a:pPr>
+            <a:r>
+              <a:t>52.0%</a:t>
+            </a:r>
+          </a:p>
+        </p:txBody>
+      </p:sp>
+      <p:sp>
+        <p:nvSpPr>
+          <p:cNvPr id="51" name="TextBox 50"/>
+          <p:cNvSpPr txBox="1"/>
+          <p:nvPr/>
+        </p:nvSpPr>
+        <p:spPr>
+          <a:xfrm>
+            <a:off x="7589520" y="5376672"/>
+            <a:ext cx="1645920" cy="411480"/>
+          </a:xfrm>
+          <a:prstGeom prst="rect">
+            <a:avLst/>
+          </a:prstGeom>
+          <a:noFill/>
+        </p:spPr>
+        <p:txBody>
+          <a:bodyPr wrap="square"/>
+          <a:lstStyle/>
+          <a:p>
+            <a:pPr algn="ctr">
               <a:defRPr sz="1300" b="1">
                 <a:solidFill>
-                  <a:srgbClr val="FFFFFF"/>
-                </a:solidFill>
-              </a:defRPr>
-            </a:pPr>
-            <a:r>
-              <a:t>  58.3%</a:t>
-            </a:r>
-          </a:p>
-        </p:txBody>
-      </p:sp>
-      <p:sp>
-        <p:nvSpPr>
-          <p:cNvPr id="33" name="Rounded Rectangle 32"/>
-          <p:cNvSpPr/>
-          <p:nvPr/>
-        </p:nvSpPr>
-        <p:spPr>
-          <a:xfrm>
-            <a:off x="7772400" y="5641848"/>
-            <a:ext cx="1664208" cy="365760"/>
-          </a:xfrm>
-          <a:prstGeom prst="roundRect">
-            <a:avLst/>
-          </a:prstGeom>
-          <a:solidFill>
-            <a:srgbClr val="A0A0A0"/>
-          </a:solidFill>
-          <a:ln>
-            <a:noFill/>
-          </a:ln>
-          <a:effectLst/>
-        </p:spPr>
-        <p:style>
-          <a:lnRef idx="1">
-            <a:schemeClr val="accent1"/>
-          </a:lnRef>
-          <a:fillRef idx="3">
-            <a:schemeClr val="accent1"/>
-          </a:fillRef>
-          <a:effectRef idx="2">
-            <a:schemeClr val="accent1"/>
-          </a:effectRef>
-          <a:fontRef idx="minor">
-            <a:schemeClr val="lt1"/>
-          </a:fontRef>
-        </p:style>
-        <p:txBody>
-          <a:bodyPr rtlCol="0" anchor="ctr" wrap="square"/>
-          <a:lstStyle/>
-          <a:p>
-            <a:pPr algn="l">
-              <a:spcBef>
-                <a:spcPts val="400"/>
-              </a:spcBef>
-              <a:defRPr sz="1300" b="1">
-                <a:solidFill>
-                  <a:srgbClr val="FFFFFF"/>
-                </a:solidFill>
-              </a:defRPr>
-            </a:pPr>
-            <a:r>
-              <a:t>  52.0%</a:t>
-            </a:r>
-          </a:p>
-        </p:txBody>
-      </p:sp>
-      <p:sp>
-        <p:nvSpPr>
-          <p:cNvPr id="34" name="TextBox 33"/>
+                  <a:srgbClr val="00C9A7"/>
+                </a:solidFill>
+              </a:defRPr>
+            </a:pPr>
+            <a:r>
+              <a:t>Above human</a:t>
+            </a:r>
+          </a:p>
+        </p:txBody>
+      </p:sp>
+      <p:sp>
+        <p:nvSpPr>
+          <p:cNvPr id="52" name="TextBox 51"/>
           <p:cNvSpPr txBox="1"/>
           <p:nvPr/>
         </p:nvSpPr>
         <p:spPr>
           <a:xfrm>
-            <a:off x="10058400" y="5623560"/>
-            <a:ext cx="1371600" cy="457200"/>
+            <a:off x="9418320" y="5376672"/>
+            <a:ext cx="2103120" cy="411480"/>
           </a:xfrm>
           <a:prstGeom prst="rect">
             <a:avLst/>
@@ -12217,29 +12535,29 @@
           <a:bodyPr wrap="square"/>
           <a:lstStyle/>
           <a:p>
-            <a:pPr algn="l">
-              <a:defRPr sz="1200" b="1">
+            <a:pPr algn="ctr">
+              <a:defRPr sz="1200" b="0">
                 <a:solidFill>
                   <a:srgbClr val="00C9A7"/>
                 </a:solidFill>
               </a:defRPr>
             </a:pPr>
             <a:r>
-              <a:t>Above human</a:t>
-            </a:r>
-          </a:p>
-        </p:txBody>
-      </p:sp>
-      <p:sp>
-        <p:nvSpPr>
-          <p:cNvPr id="35" name="TextBox 34"/>
+              <a:t>p=0.41  Not significant</a:t>
+            </a:r>
+          </a:p>
+        </p:txBody>
+      </p:sp>
+      <p:sp>
+        <p:nvSpPr>
+          <p:cNvPr id="53" name="TextBox 52"/>
           <p:cNvSpPr txBox="1"/>
           <p:nvPr/>
         </p:nvSpPr>
         <p:spPr>
           <a:xfrm>
-            <a:off x="4389120" y="6217920"/>
-            <a:ext cx="7315200" cy="365760"/>
+            <a:off x="457200" y="6035040"/>
+            <a:ext cx="11247120" cy="640080"/>
           </a:xfrm>
           <a:prstGeom prst="rect">
             <a:avLst/>
@@ -12258,7 +12576,22 @@
               </a:defRPr>
             </a:pPr>
             <a:r>
-              <a:t>          Agent vs R1                                              Human R1 vs R2</a:t>
+              <a:t>Statistical test: Two-tailed z-test on AC₁ difference (SE derived from 95% CI). α = 0.05.</a:t>
+            </a:r>
+          </a:p>
+          <a:p>
+            <a:pPr>
+              <a:spcBef>
+                <a:spcPts val="400"/>
+              </a:spcBef>
+              <a:defRPr sz="1300" b="1">
+                <a:solidFill>
+                  <a:srgbClr val="2D2D3F"/>
+                </a:solidFill>
+              </a:defRPr>
+            </a:pPr>
+            <a:r>
+              <a:t>No field shows a statistically significant difference between agent and human agreement — the agent performs at human-level across all 6 fields.</a:t>
             </a:r>
           </a:p>
         </p:txBody>

--- a/amp_llm_v3/standalone modules/agent_annotate/docs/Agent_Annotate_Architecture.pptx
+++ b/amp_llm_v3/standalone modules/agent_annotate/docs/Agent_Annotate_Architecture.pptx
@@ -10850,8 +10850,8 @@
         </p:nvSpPr>
         <p:spPr>
           <a:xfrm>
-            <a:off x="457200" y="1463040"/>
-            <a:ext cx="11247120" cy="548640"/>
+            <a:off x="274320" y="1463040"/>
+            <a:ext cx="11612880" cy="548640"/>
           </a:xfrm>
           <a:prstGeom prst="roundRect">
             <a:avLst/>
@@ -10886,14 +10886,14 @@
               <a:spcBef>
                 <a:spcPts val="800"/>
               </a:spcBef>
-              <a:defRPr sz="1300" b="1">
+              <a:defRPr sz="1200" b="1">
                 <a:solidFill>
                   <a:srgbClr val="FFFFFF"/>
                 </a:solidFill>
               </a:defRPr>
             </a:pPr>
             <a:r>
-              <a:t>   Field                     Agent AC₁    Agent %       Human AC₁    Human %       Status             p-value (two-tailed)</a:t>
+              <a:t>   Field                  Agent–R1 AC₁  Agent–R2 AC₁  Human AC₁      p (R1)              p (R2)              Interpretation</a:t>
             </a:r>
           </a:p>
         </p:txBody>
@@ -10906,8 +10906,8 @@
         </p:nvSpPr>
         <p:spPr>
           <a:xfrm>
-            <a:off x="457200" y="2103120"/>
-            <a:ext cx="11247120" cy="548640"/>
+            <a:off x="274320" y="2103120"/>
+            <a:ext cx="11612880" cy="548640"/>
           </a:xfrm>
           <a:prstGeom prst="roundRect">
             <a:avLst/>
@@ -10950,8 +10950,8 @@
         </p:nvSpPr>
         <p:spPr>
           <a:xfrm>
-            <a:off x="640080" y="2176272"/>
-            <a:ext cx="2011680" cy="411480"/>
+            <a:off x="457200" y="2176272"/>
+            <a:ext cx="1828800" cy="411480"/>
           </a:xfrm>
           <a:prstGeom prst="rect">
             <a:avLst/>
@@ -10963,7 +10963,7 @@
           <a:lstStyle/>
           <a:p>
             <a:pPr algn="l">
-              <a:defRPr sz="1500" b="1">
+              <a:defRPr sz="1400" b="1">
                 <a:solidFill>
                   <a:srgbClr val="0096D6"/>
                 </a:solidFill>
@@ -10983,8 +10983,8 @@
         </p:nvSpPr>
         <p:spPr>
           <a:xfrm>
-            <a:off x="2743200" y="2176272"/>
-            <a:ext cx="1097280" cy="411480"/>
+            <a:off x="2377440" y="2176272"/>
+            <a:ext cx="1188720" cy="411480"/>
           </a:xfrm>
           <a:prstGeom prst="rect">
             <a:avLst/>
@@ -10996,14 +10996,14 @@
           <a:lstStyle/>
           <a:p>
             <a:pPr algn="ctr">
-              <a:defRPr sz="1400" b="1">
-                <a:solidFill>
-                  <a:srgbClr val="2D2D3F"/>
-                </a:solidFill>
-              </a:defRPr>
-            </a:pPr>
-            <a:r>
-              <a:t>0.903</a:t>
+              <a:defRPr sz="1300" b="1">
+                <a:solidFill>
+                  <a:srgbClr val="FF5C5C"/>
+                </a:solidFill>
+              </a:defRPr>
+            </a:pPr>
+            <a:r>
+              <a:t>0.903 (91%)</a:t>
             </a:r>
           </a:p>
         </p:txBody>
@@ -11016,8 +11016,8 @@
         </p:nvSpPr>
         <p:spPr>
           <a:xfrm>
-            <a:off x="3931920" y="2176272"/>
-            <a:ext cx="1097280" cy="411480"/>
+            <a:off x="3657600" y="2176272"/>
+            <a:ext cx="1188720" cy="411480"/>
           </a:xfrm>
           <a:prstGeom prst="rect">
             <a:avLst/>
@@ -11029,14 +11029,14 @@
           <a:lstStyle/>
           <a:p>
             <a:pPr algn="ctr">
-              <a:defRPr sz="1400" b="0">
-                <a:solidFill>
-                  <a:srgbClr val="A0A0A0"/>
-                </a:solidFill>
-              </a:defRPr>
-            </a:pPr>
-            <a:r>
-              <a:t>91.4%</a:t>
+              <a:defRPr sz="1300" b="1">
+                <a:solidFill>
+                  <a:srgbClr val="00C9A7"/>
+                </a:solidFill>
+              </a:defRPr>
+            </a:pPr>
+            <a:r>
+              <a:t>0.962 (97%)</a:t>
             </a:r>
           </a:p>
         </p:txBody>
@@ -11049,8 +11049,8 @@
         </p:nvSpPr>
         <p:spPr>
           <a:xfrm>
-            <a:off x="5212080" y="2176272"/>
-            <a:ext cx="1097280" cy="411480"/>
+            <a:off x="5029200" y="2176272"/>
+            <a:ext cx="1188720" cy="411480"/>
           </a:xfrm>
           <a:prstGeom prst="rect">
             <a:avLst/>
@@ -11062,14 +11062,14 @@
           <a:lstStyle/>
           <a:p>
             <a:pPr algn="ctr">
-              <a:defRPr sz="1400" b="1">
-                <a:solidFill>
-                  <a:srgbClr val="2D2D3F"/>
-                </a:solidFill>
-              </a:defRPr>
-            </a:pPr>
-            <a:r>
-              <a:t>0.919</a:t>
+              <a:defRPr sz="1300" b="1">
+                <a:solidFill>
+                  <a:srgbClr val="A0A0A0"/>
+                </a:solidFill>
+              </a:defRPr>
+            </a:pPr>
+            <a:r>
+              <a:t>0.919 (93%)</a:t>
             </a:r>
           </a:p>
         </p:txBody>
@@ -11083,7 +11083,7 @@
         <p:spPr>
           <a:xfrm>
             <a:off x="6400800" y="2176272"/>
-            <a:ext cx="1097280" cy="411480"/>
+            <a:ext cx="1645920" cy="411480"/>
           </a:xfrm>
           <a:prstGeom prst="rect">
             <a:avLst/>
@@ -11095,14 +11095,14 @@
           <a:lstStyle/>
           <a:p>
             <a:pPr algn="ctr">
-              <a:defRPr sz="1400" b="0">
+              <a:defRPr sz="1200" b="0">
                 <a:solidFill>
                   <a:srgbClr val="A0A0A0"/>
                 </a:solidFill>
               </a:defRPr>
             </a:pPr>
             <a:r>
-              <a:t>93.2%</a:t>
+              <a:t>p=0.82 n.s.</a:t>
             </a:r>
           </a:p>
         </p:txBody>
@@ -11115,7 +11115,7 @@
         </p:nvSpPr>
         <p:spPr>
           <a:xfrm>
-            <a:off x="7589520" y="2176272"/>
+            <a:off x="8138160" y="2176272"/>
             <a:ext cx="1645920" cy="411480"/>
           </a:xfrm>
           <a:prstGeom prst="rect">
@@ -11128,14 +11128,14 @@
           <a:lstStyle/>
           <a:p>
             <a:pPr algn="ctr">
-              <a:defRPr sz="1300" b="0">
+              <a:defRPr sz="1200" b="0">
                 <a:solidFill>
                   <a:srgbClr val="A0A0A0"/>
                 </a:solidFill>
               </a:defRPr>
             </a:pPr>
             <a:r>
-              <a:t>1.8pp gap</a:t>
+              <a:t>p=0.38 n.s.</a:t>
             </a:r>
           </a:p>
         </p:txBody>
@@ -11148,8 +11148,8 @@
         </p:nvSpPr>
         <p:spPr>
           <a:xfrm>
-            <a:off x="9418320" y="2176272"/>
-            <a:ext cx="2103120" cy="411480"/>
+            <a:off x="9875520" y="2176272"/>
+            <a:ext cx="1920240" cy="411480"/>
           </a:xfrm>
           <a:prstGeom prst="rect">
             <a:avLst/>
@@ -11161,14 +11161,14 @@
           <a:lstStyle/>
           <a:p>
             <a:pPr algn="ctr">
-              <a:defRPr sz="1200" b="0">
+              <a:defRPr sz="1200" b="1">
                 <a:solidFill>
                   <a:srgbClr val="00C9A7"/>
                 </a:solidFill>
               </a:defRPr>
             </a:pPr>
             <a:r>
-              <a:t>p=0.82  Not significant</a:t>
+              <a:t>At human level</a:t>
             </a:r>
           </a:p>
         </p:txBody>
@@ -11181,8 +11181,8 @@
         </p:nvSpPr>
         <p:spPr>
           <a:xfrm>
-            <a:off x="457200" y="2743200"/>
-            <a:ext cx="11247120" cy="548640"/>
+            <a:off x="274320" y="2743200"/>
+            <a:ext cx="11612880" cy="548640"/>
           </a:xfrm>
           <a:prstGeom prst="roundRect">
             <a:avLst/>
@@ -11225,8 +11225,8 @@
         </p:nvSpPr>
         <p:spPr>
           <a:xfrm>
-            <a:off x="640080" y="2816352"/>
-            <a:ext cx="2011680" cy="411480"/>
+            <a:off x="457200" y="2816352"/>
+            <a:ext cx="1828800" cy="411480"/>
           </a:xfrm>
           <a:prstGeom prst="rect">
             <a:avLst/>
@@ -11238,7 +11238,7 @@
           <a:lstStyle/>
           <a:p>
             <a:pPr algn="l">
-              <a:defRPr sz="1500" b="1">
+              <a:defRPr sz="1400" b="1">
                 <a:solidFill>
                   <a:srgbClr val="FF8C42"/>
                 </a:solidFill>
@@ -11258,8 +11258,8 @@
         </p:nvSpPr>
         <p:spPr>
           <a:xfrm>
-            <a:off x="2743200" y="2816352"/>
-            <a:ext cx="1097280" cy="411480"/>
+            <a:off x="2377440" y="2816352"/>
+            <a:ext cx="1188720" cy="411480"/>
           </a:xfrm>
           <a:prstGeom prst="rect">
             <a:avLst/>
@@ -11271,14 +11271,14 @@
           <a:lstStyle/>
           <a:p>
             <a:pPr algn="ctr">
-              <a:defRPr sz="1400" b="1">
-                <a:solidFill>
-                  <a:srgbClr val="2D2D3F"/>
-                </a:solidFill>
-              </a:defRPr>
-            </a:pPr>
-            <a:r>
-              <a:t>0.835</a:t>
+              <a:defRPr sz="1300" b="1">
+                <a:solidFill>
+                  <a:srgbClr val="FF5C5C"/>
+                </a:solidFill>
+              </a:defRPr>
+            </a:pPr>
+            <a:r>
+              <a:t>0.835 (85%)</a:t>
             </a:r>
           </a:p>
         </p:txBody>
@@ -11291,8 +11291,8 @@
         </p:nvSpPr>
         <p:spPr>
           <a:xfrm>
-            <a:off x="3931920" y="2816352"/>
-            <a:ext cx="1097280" cy="411480"/>
+            <a:off x="3657600" y="2816352"/>
+            <a:ext cx="1188720" cy="411480"/>
           </a:xfrm>
           <a:prstGeom prst="rect">
             <a:avLst/>
@@ -11304,14 +11304,14 @@
           <a:lstStyle/>
           <a:p>
             <a:pPr algn="ctr">
-              <a:defRPr sz="1400" b="0">
-                <a:solidFill>
-                  <a:srgbClr val="A0A0A0"/>
-                </a:solidFill>
-              </a:defRPr>
-            </a:pPr>
-            <a:r>
-              <a:t>85.4%</a:t>
+              <a:defRPr sz="1300" b="1">
+                <a:solidFill>
+                  <a:srgbClr val="FF5C5C"/>
+                </a:solidFill>
+              </a:defRPr>
+            </a:pPr>
+            <a:r>
+              <a:t>0.854 (88%)</a:t>
             </a:r>
           </a:p>
         </p:txBody>
@@ -11324,8 +11324,8 @@
         </p:nvSpPr>
         <p:spPr>
           <a:xfrm>
-            <a:off x="5212080" y="2816352"/>
-            <a:ext cx="1097280" cy="411480"/>
+            <a:off x="5029200" y="2816352"/>
+            <a:ext cx="1188720" cy="411480"/>
           </a:xfrm>
           <a:prstGeom prst="rect">
             <a:avLst/>
@@ -11337,14 +11337,14 @@
           <a:lstStyle/>
           <a:p>
             <a:pPr algn="ctr">
-              <a:defRPr sz="1400" b="1">
-                <a:solidFill>
-                  <a:srgbClr val="2D2D3F"/>
-                </a:solidFill>
-              </a:defRPr>
-            </a:pPr>
-            <a:r>
-              <a:t>0.878</a:t>
+              <a:defRPr sz="1300" b="1">
+                <a:solidFill>
+                  <a:srgbClr val="A0A0A0"/>
+                </a:solidFill>
+              </a:defRPr>
+            </a:pPr>
+            <a:r>
+              <a:t>0.878 (89%)</a:t>
             </a:r>
           </a:p>
         </p:txBody>
@@ -11358,7 +11358,7 @@
         <p:spPr>
           <a:xfrm>
             <a:off x="6400800" y="2816352"/>
-            <a:ext cx="1097280" cy="411480"/>
+            <a:ext cx="1645920" cy="411480"/>
           </a:xfrm>
           <a:prstGeom prst="rect">
             <a:avLst/>
@@ -11370,14 +11370,14 @@
           <a:lstStyle/>
           <a:p>
             <a:pPr algn="ctr">
-              <a:defRPr sz="1400" b="0">
+              <a:defRPr sz="1200" b="0">
                 <a:solidFill>
                   <a:srgbClr val="A0A0A0"/>
                 </a:solidFill>
               </a:defRPr>
             </a:pPr>
             <a:r>
-              <a:t>88.9%</a:t>
+              <a:t>p=0.58 n.s.</a:t>
             </a:r>
           </a:p>
         </p:txBody>
@@ -11390,7 +11390,7 @@
         </p:nvSpPr>
         <p:spPr>
           <a:xfrm>
-            <a:off x="7589520" y="2816352"/>
+            <a:off x="8138160" y="2816352"/>
             <a:ext cx="1645920" cy="411480"/>
           </a:xfrm>
           <a:prstGeom prst="rect">
@@ -11403,14 +11403,14 @@
           <a:lstStyle/>
           <a:p>
             <a:pPr algn="ctr">
-              <a:defRPr sz="1300" b="0">
+              <a:defRPr sz="1200" b="0">
                 <a:solidFill>
                   <a:srgbClr val="A0A0A0"/>
                 </a:solidFill>
               </a:defRPr>
             </a:pPr>
             <a:r>
-              <a:t>3.5pp gap</a:t>
+              <a:t>p=0.72 n.s.</a:t>
             </a:r>
           </a:p>
         </p:txBody>
@@ -11423,8 +11423,8 @@
         </p:nvSpPr>
         <p:spPr>
           <a:xfrm>
-            <a:off x="9418320" y="2816352"/>
-            <a:ext cx="2103120" cy="411480"/>
+            <a:off x="9875520" y="2816352"/>
+            <a:ext cx="1920240" cy="411480"/>
           </a:xfrm>
           <a:prstGeom prst="rect">
             <a:avLst/>
@@ -11436,14 +11436,14 @@
           <a:lstStyle/>
           <a:p>
             <a:pPr algn="ctr">
-              <a:defRPr sz="1200" b="0">
+              <a:defRPr sz="1200" b="1">
                 <a:solidFill>
                   <a:srgbClr val="00C9A7"/>
                 </a:solidFill>
               </a:defRPr>
             </a:pPr>
             <a:r>
-              <a:t>p=0.58  Not significant</a:t>
+              <a:t>At human level</a:t>
             </a:r>
           </a:p>
         </p:txBody>
@@ -11456,8 +11456,8 @@
         </p:nvSpPr>
         <p:spPr>
           <a:xfrm>
-            <a:off x="457200" y="3383279"/>
-            <a:ext cx="11247120" cy="548640"/>
+            <a:off x="274320" y="3383279"/>
+            <a:ext cx="11612880" cy="548640"/>
           </a:xfrm>
           <a:prstGeom prst="roundRect">
             <a:avLst/>
@@ -11500,8 +11500,8 @@
         </p:nvSpPr>
         <p:spPr>
           <a:xfrm>
-            <a:off x="640080" y="3456431"/>
-            <a:ext cx="2011680" cy="411480"/>
+            <a:off x="457200" y="3456431"/>
+            <a:ext cx="1828800" cy="411480"/>
           </a:xfrm>
           <a:prstGeom prst="rect">
             <a:avLst/>
@@ -11513,7 +11513,7 @@
           <a:lstStyle/>
           <a:p>
             <a:pPr algn="l">
-              <a:defRPr sz="1500" b="1">
+              <a:defRPr sz="1400" b="1">
                 <a:solidFill>
                   <a:srgbClr val="FF5C5C"/>
                 </a:solidFill>
@@ -11533,8 +11533,8 @@
         </p:nvSpPr>
         <p:spPr>
           <a:xfrm>
-            <a:off x="2743200" y="3456431"/>
-            <a:ext cx="1097280" cy="411480"/>
+            <a:off x="2377440" y="3456431"/>
+            <a:ext cx="1188720" cy="411480"/>
           </a:xfrm>
           <a:prstGeom prst="rect">
             <a:avLst/>
@@ -11546,14 +11546,14 @@
           <a:lstStyle/>
           <a:p>
             <a:pPr algn="ctr">
-              <a:defRPr sz="1400" b="1">
-                <a:solidFill>
-                  <a:srgbClr val="2D2D3F"/>
-                </a:solidFill>
-              </a:defRPr>
-            </a:pPr>
-            <a:r>
-              <a:t>0.558</a:t>
+              <a:defRPr sz="1300" b="1">
+                <a:solidFill>
+                  <a:srgbClr val="FF5C5C"/>
+                </a:solidFill>
+              </a:defRPr>
+            </a:pPr>
+            <a:r>
+              <a:t>0.558 (60%)</a:t>
             </a:r>
           </a:p>
         </p:txBody>
@@ -11566,8 +11566,8 @@
         </p:nvSpPr>
         <p:spPr>
           <a:xfrm>
-            <a:off x="3931920" y="3456431"/>
-            <a:ext cx="1097280" cy="411480"/>
+            <a:off x="3657600" y="3456431"/>
+            <a:ext cx="1188720" cy="411480"/>
           </a:xfrm>
           <a:prstGeom prst="rect">
             <a:avLst/>
@@ -11579,14 +11579,14 @@
           <a:lstStyle/>
           <a:p>
             <a:pPr algn="ctr">
-              <a:defRPr sz="1400" b="0">
-                <a:solidFill>
-                  <a:srgbClr val="A0A0A0"/>
-                </a:solidFill>
-              </a:defRPr>
-            </a:pPr>
-            <a:r>
-              <a:t>60.5%</a:t>
+              <a:defRPr sz="1300" b="1">
+                <a:solidFill>
+                  <a:srgbClr val="FF5C5C"/>
+                </a:solidFill>
+              </a:defRPr>
+            </a:pPr>
+            <a:r>
+              <a:t>0.557 (60%)</a:t>
             </a:r>
           </a:p>
         </p:txBody>
@@ -11599,8 +11599,8 @@
         </p:nvSpPr>
         <p:spPr>
           <a:xfrm>
-            <a:off x="5212080" y="3456431"/>
-            <a:ext cx="1097280" cy="411480"/>
+            <a:off x="5029200" y="3456431"/>
+            <a:ext cx="1188720" cy="411480"/>
           </a:xfrm>
           <a:prstGeom prst="rect">
             <a:avLst/>
@@ -11612,14 +11612,14 @@
           <a:lstStyle/>
           <a:p>
             <a:pPr algn="ctr">
-              <a:defRPr sz="1400" b="1">
-                <a:solidFill>
-                  <a:srgbClr val="2D2D3F"/>
-                </a:solidFill>
-              </a:defRPr>
-            </a:pPr>
-            <a:r>
-              <a:t>0.583</a:t>
+              <a:defRPr sz="1300" b="1">
+                <a:solidFill>
+                  <a:srgbClr val="A0A0A0"/>
+                </a:solidFill>
+              </a:defRPr>
+            </a:pPr>
+            <a:r>
+              <a:t>0.583 (64%)</a:t>
             </a:r>
           </a:p>
         </p:txBody>
@@ -11633,7 +11633,7 @@
         <p:spPr>
           <a:xfrm>
             <a:off x="6400800" y="3456431"/>
-            <a:ext cx="1097280" cy="411480"/>
+            <a:ext cx="1645920" cy="411480"/>
           </a:xfrm>
           <a:prstGeom prst="rect">
             <a:avLst/>
@@ -11645,14 +11645,14 @@
           <a:lstStyle/>
           <a:p>
             <a:pPr algn="ctr">
-              <a:defRPr sz="1400" b="0">
+              <a:defRPr sz="1200" b="0">
                 <a:solidFill>
                   <a:srgbClr val="A0A0A0"/>
                 </a:solidFill>
               </a:defRPr>
             </a:pPr>
             <a:r>
-              <a:t>64.3%</a:t>
+              <a:t>p=0.77 n.s.</a:t>
             </a:r>
           </a:p>
         </p:txBody>
@@ -11665,7 +11665,7 @@
         </p:nvSpPr>
         <p:spPr>
           <a:xfrm>
-            <a:off x="7589520" y="3456431"/>
+            <a:off x="8138160" y="3456431"/>
             <a:ext cx="1645920" cy="411480"/>
           </a:xfrm>
           <a:prstGeom prst="rect">
@@ -11678,14 +11678,14 @@
           <a:lstStyle/>
           <a:p>
             <a:pPr algn="ctr">
-              <a:defRPr sz="1300" b="0">
+              <a:defRPr sz="1200" b="0">
                 <a:solidFill>
                   <a:srgbClr val="A0A0A0"/>
                 </a:solidFill>
               </a:defRPr>
             </a:pPr>
             <a:r>
-              <a:t>3.8pp gap</a:t>
+              <a:t>p=0.76 n.s.</a:t>
             </a:r>
           </a:p>
         </p:txBody>
@@ -11698,8 +11698,8 @@
         </p:nvSpPr>
         <p:spPr>
           <a:xfrm>
-            <a:off x="9418320" y="3456431"/>
-            <a:ext cx="2103120" cy="411480"/>
+            <a:off x="9875520" y="3456431"/>
+            <a:ext cx="1920240" cy="411480"/>
           </a:xfrm>
           <a:prstGeom prst="rect">
             <a:avLst/>
@@ -11711,14 +11711,14 @@
           <a:lstStyle/>
           <a:p>
             <a:pPr algn="ctr">
-              <a:defRPr sz="1200" b="0">
+              <a:defRPr sz="1200" b="1">
                 <a:solidFill>
                   <a:srgbClr val="00C9A7"/>
                 </a:solidFill>
               </a:defRPr>
             </a:pPr>
             <a:r>
-              <a:t>p=0.77  Not significant</a:t>
+              <a:t>At human level</a:t>
             </a:r>
           </a:p>
         </p:txBody>
@@ -11731,8 +11731,8 @@
         </p:nvSpPr>
         <p:spPr>
           <a:xfrm>
-            <a:off x="457200" y="4023359"/>
-            <a:ext cx="11247120" cy="548640"/>
+            <a:off x="274320" y="4023359"/>
+            <a:ext cx="11612880" cy="548640"/>
           </a:xfrm>
           <a:prstGeom prst="roundRect">
             <a:avLst/>
@@ -11775,8 +11775,8 @@
         </p:nvSpPr>
         <p:spPr>
           <a:xfrm>
-            <a:off x="640080" y="4096511"/>
-            <a:ext cx="2011680" cy="411480"/>
+            <a:off x="457200" y="4096511"/>
+            <a:ext cx="1828800" cy="411480"/>
           </a:xfrm>
           <a:prstGeom prst="rect">
             <a:avLst/>
@@ -11788,7 +11788,7 @@
           <a:lstStyle/>
           <a:p>
             <a:pPr algn="l">
-              <a:defRPr sz="1500" b="1">
+              <a:defRPr sz="1400" b="1">
                 <a:solidFill>
                   <a:srgbClr val="A85CFF"/>
                 </a:solidFill>
@@ -11808,8 +11808,8 @@
         </p:nvSpPr>
         <p:spPr>
           <a:xfrm>
-            <a:off x="2743200" y="4096511"/>
-            <a:ext cx="1097280" cy="411480"/>
+            <a:off x="2377440" y="4096511"/>
+            <a:ext cx="1188720" cy="411480"/>
           </a:xfrm>
           <a:prstGeom prst="rect">
             <a:avLst/>
@@ -11821,14 +11821,14 @@
           <a:lstStyle/>
           <a:p>
             <a:pPr algn="ctr">
-              <a:defRPr sz="1400" b="1">
-                <a:solidFill>
-                  <a:srgbClr val="2D2D3F"/>
-                </a:solidFill>
-              </a:defRPr>
-            </a:pPr>
-            <a:r>
-              <a:t>0.922</a:t>
+              <a:defRPr sz="1300" b="1">
+                <a:solidFill>
+                  <a:srgbClr val="00C9A7"/>
+                </a:solidFill>
+              </a:defRPr>
+            </a:pPr>
+            <a:r>
+              <a:t>0.922 (92%)</a:t>
             </a:r>
           </a:p>
         </p:txBody>
@@ -11841,8 +11841,8 @@
         </p:nvSpPr>
         <p:spPr>
           <a:xfrm>
-            <a:off x="3931920" y="4096511"/>
-            <a:ext cx="1097280" cy="411480"/>
+            <a:off x="3657600" y="4096511"/>
+            <a:ext cx="1188720" cy="411480"/>
           </a:xfrm>
           <a:prstGeom prst="rect">
             <a:avLst/>
@@ -11854,14 +11854,14 @@
           <a:lstStyle/>
           <a:p>
             <a:pPr algn="ctr">
-              <a:defRPr sz="1400" b="0">
-                <a:solidFill>
-                  <a:srgbClr val="A0A0A0"/>
-                </a:solidFill>
-              </a:defRPr>
-            </a:pPr>
-            <a:r>
-              <a:t>92.4%</a:t>
+              <a:defRPr sz="1300" b="1">
+                <a:solidFill>
+                  <a:srgbClr val="00C9A7"/>
+                </a:solidFill>
+              </a:defRPr>
+            </a:pPr>
+            <a:r>
+              <a:t>0.904 (91%)</a:t>
             </a:r>
           </a:p>
         </p:txBody>
@@ -11874,8 +11874,8 @@
         </p:nvSpPr>
         <p:spPr>
           <a:xfrm>
-            <a:off x="5212080" y="4096511"/>
-            <a:ext cx="1097280" cy="411480"/>
+            <a:off x="5029200" y="4096511"/>
+            <a:ext cx="1188720" cy="411480"/>
           </a:xfrm>
           <a:prstGeom prst="rect">
             <a:avLst/>
@@ -11887,14 +11887,14 @@
           <a:lstStyle/>
           <a:p>
             <a:pPr algn="ctr">
-              <a:defRPr sz="1400" b="1">
-                <a:solidFill>
-                  <a:srgbClr val="2D2D3F"/>
-                </a:solidFill>
-              </a:defRPr>
-            </a:pPr>
-            <a:r>
-              <a:t>0.881</a:t>
+              <a:defRPr sz="1300" b="1">
+                <a:solidFill>
+                  <a:srgbClr val="A0A0A0"/>
+                </a:solidFill>
+              </a:defRPr>
+            </a:pPr>
+            <a:r>
+              <a:t>0.881 (89%)</a:t>
             </a:r>
           </a:p>
         </p:txBody>
@@ -11908,7 +11908,7 @@
         <p:spPr>
           <a:xfrm>
             <a:off x="6400800" y="4096511"/>
-            <a:ext cx="1097280" cy="411480"/>
+            <a:ext cx="1645920" cy="411480"/>
           </a:xfrm>
           <a:prstGeom prst="rect">
             <a:avLst/>
@@ -11920,14 +11920,14 @@
           <a:lstStyle/>
           <a:p>
             <a:pPr algn="ctr">
-              <a:defRPr sz="1400" b="0">
+              <a:defRPr sz="1200" b="0">
                 <a:solidFill>
                   <a:srgbClr val="A0A0A0"/>
                 </a:solidFill>
               </a:defRPr>
             </a:pPr>
             <a:r>
-              <a:t>88.6%</a:t>
+              <a:t>p=0.26 n.s.</a:t>
             </a:r>
           </a:p>
         </p:txBody>
@@ -11940,7 +11940,7 @@
         </p:nvSpPr>
         <p:spPr>
           <a:xfrm>
-            <a:off x="7589520" y="4096511"/>
+            <a:off x="8138160" y="4096511"/>
             <a:ext cx="1645920" cy="411480"/>
           </a:xfrm>
           <a:prstGeom prst="rect">
@@ -11953,14 +11953,14 @@
           <a:lstStyle/>
           <a:p>
             <a:pPr algn="ctr">
-              <a:defRPr sz="1300" b="1">
-                <a:solidFill>
-                  <a:srgbClr val="00C9A7"/>
-                </a:solidFill>
-              </a:defRPr>
-            </a:pPr>
-            <a:r>
-              <a:t>Above human</a:t>
+              <a:defRPr sz="1200" b="0">
+                <a:solidFill>
+                  <a:srgbClr val="A0A0A0"/>
+                </a:solidFill>
+              </a:defRPr>
+            </a:pPr>
+            <a:r>
+              <a:t>p=0.55 n.s.</a:t>
             </a:r>
           </a:p>
         </p:txBody>
@@ -11973,8 +11973,8 @@
         </p:nvSpPr>
         <p:spPr>
           <a:xfrm>
-            <a:off x="9418320" y="4096511"/>
-            <a:ext cx="2103120" cy="411480"/>
+            <a:off x="9875520" y="4096511"/>
+            <a:ext cx="1920240" cy="411480"/>
           </a:xfrm>
           <a:prstGeom prst="rect">
             <a:avLst/>
@@ -11986,14 +11986,14 @@
           <a:lstStyle/>
           <a:p>
             <a:pPr algn="ctr">
-              <a:defRPr sz="1200" b="0">
+              <a:defRPr sz="1200" b="1">
                 <a:solidFill>
                   <a:srgbClr val="00C9A7"/>
                 </a:solidFill>
               </a:defRPr>
             </a:pPr>
             <a:r>
-              <a:t>p=0.26  Not significant</a:t>
+              <a:t>At human level</a:t>
             </a:r>
           </a:p>
         </p:txBody>
@@ -12006,8 +12006,8 @@
         </p:nvSpPr>
         <p:spPr>
           <a:xfrm>
-            <a:off x="457200" y="4663440"/>
-            <a:ext cx="11247120" cy="548640"/>
+            <a:off x="274320" y="4663440"/>
+            <a:ext cx="11612880" cy="548640"/>
           </a:xfrm>
           <a:prstGeom prst="roundRect">
             <a:avLst/>
@@ -12050,8 +12050,8 @@
         </p:nvSpPr>
         <p:spPr>
           <a:xfrm>
-            <a:off x="640080" y="4736592"/>
-            <a:ext cx="2011680" cy="411480"/>
+            <a:off x="457200" y="4736592"/>
+            <a:ext cx="1828800" cy="411480"/>
           </a:xfrm>
           <a:prstGeom prst="rect">
             <a:avLst/>
@@ -12063,7 +12063,7 @@
           <a:lstStyle/>
           <a:p>
             <a:pPr algn="l">
-              <a:defRPr sz="1500" b="1">
+              <a:defRPr sz="1400" b="1">
                 <a:solidFill>
                   <a:srgbClr val="00C9A7"/>
                 </a:solidFill>
@@ -12083,8 +12083,8 @@
         </p:nvSpPr>
         <p:spPr>
           <a:xfrm>
-            <a:off x="2743200" y="4736592"/>
-            <a:ext cx="1097280" cy="411480"/>
+            <a:off x="2377440" y="4736592"/>
+            <a:ext cx="1188720" cy="411480"/>
           </a:xfrm>
           <a:prstGeom prst="rect">
             <a:avLst/>
@@ -12096,14 +12096,14 @@
           <a:lstStyle/>
           <a:p>
             <a:pPr algn="ctr">
-              <a:defRPr sz="1400" b="1">
-                <a:solidFill>
-                  <a:srgbClr val="2D2D3F"/>
-                </a:solidFill>
-              </a:defRPr>
-            </a:pPr>
-            <a:r>
-              <a:t>0.826</a:t>
+              <a:defRPr sz="1300" b="1">
+                <a:solidFill>
+                  <a:srgbClr val="00C9A7"/>
+                </a:solidFill>
+              </a:defRPr>
+            </a:pPr>
+            <a:r>
+              <a:t>0.826 (88%)</a:t>
             </a:r>
           </a:p>
         </p:txBody>
@@ -12116,8 +12116,8 @@
         </p:nvSpPr>
         <p:spPr>
           <a:xfrm>
-            <a:off x="3931920" y="4736592"/>
-            <a:ext cx="1097280" cy="411480"/>
+            <a:off x="3657600" y="4736592"/>
+            <a:ext cx="1188720" cy="411480"/>
           </a:xfrm>
           <a:prstGeom prst="rect">
             <a:avLst/>
@@ -12129,14 +12129,14 @@
           <a:lstStyle/>
           <a:p>
             <a:pPr algn="ctr">
-              <a:defRPr sz="1400" b="0">
-                <a:solidFill>
-                  <a:srgbClr val="A0A0A0"/>
-                </a:solidFill>
-              </a:defRPr>
-            </a:pPr>
-            <a:r>
-              <a:t>88.3%</a:t>
+              <a:defRPr sz="1300" b="1">
+                <a:solidFill>
+                  <a:srgbClr val="FF5C5C"/>
+                </a:solidFill>
+              </a:defRPr>
+            </a:pPr>
+            <a:r>
+              <a:t>0.756 (84%)</a:t>
             </a:r>
           </a:p>
         </p:txBody>
@@ -12149,8 +12149,8 @@
         </p:nvSpPr>
         <p:spPr>
           <a:xfrm>
-            <a:off x="5212080" y="4736592"/>
-            <a:ext cx="1097280" cy="411480"/>
+            <a:off x="5029200" y="4736592"/>
+            <a:ext cx="1188720" cy="411480"/>
           </a:xfrm>
           <a:prstGeom prst="rect">
             <a:avLst/>
@@ -12162,14 +12162,14 @@
           <a:lstStyle/>
           <a:p>
             <a:pPr algn="ctr">
-              <a:defRPr sz="1400" b="1">
-                <a:solidFill>
-                  <a:srgbClr val="2D2D3F"/>
-                </a:solidFill>
-              </a:defRPr>
-            </a:pPr>
-            <a:r>
-              <a:t>0.792</a:t>
+              <a:defRPr sz="1300" b="1">
+                <a:solidFill>
+                  <a:srgbClr val="A0A0A0"/>
+                </a:solidFill>
+              </a:defRPr>
+            </a:pPr>
+            <a:r>
+              <a:t>0.792 (86%)</a:t>
             </a:r>
           </a:p>
         </p:txBody>
@@ -12183,7 +12183,7 @@
         <p:spPr>
           <a:xfrm>
             <a:off x="6400800" y="4736592"/>
-            <a:ext cx="1097280" cy="411480"/>
+            <a:ext cx="1645920" cy="411480"/>
           </a:xfrm>
           <a:prstGeom prst="rect">
             <a:avLst/>
@@ -12195,14 +12195,14 @@
           <a:lstStyle/>
           <a:p>
             <a:pPr algn="ctr">
-              <a:defRPr sz="1400" b="0">
+              <a:defRPr sz="1200" b="0">
                 <a:solidFill>
                   <a:srgbClr val="A0A0A0"/>
                 </a:solidFill>
               </a:defRPr>
             </a:pPr>
             <a:r>
-              <a:t>86.0%</a:t>
+              <a:t>p=0.76 n.s.</a:t>
             </a:r>
           </a:p>
         </p:txBody>
@@ -12215,7 +12215,7 @@
         </p:nvSpPr>
         <p:spPr>
           <a:xfrm>
-            <a:off x="7589520" y="4736592"/>
+            <a:off x="8138160" y="4736592"/>
             <a:ext cx="1645920" cy="411480"/>
           </a:xfrm>
           <a:prstGeom prst="rect">
@@ -12228,14 +12228,14 @@
           <a:lstStyle/>
           <a:p>
             <a:pPr algn="ctr">
-              <a:defRPr sz="1300" b="1">
-                <a:solidFill>
-                  <a:srgbClr val="00C9A7"/>
-                </a:solidFill>
-              </a:defRPr>
-            </a:pPr>
-            <a:r>
-              <a:t>Above human</a:t>
+              <a:defRPr sz="1200" b="0">
+                <a:solidFill>
+                  <a:srgbClr val="A0A0A0"/>
+                </a:solidFill>
+              </a:defRPr>
+            </a:pPr>
+            <a:r>
+              <a:t>p=0.70 n.s.</a:t>
             </a:r>
           </a:p>
         </p:txBody>
@@ -12248,8 +12248,8 @@
         </p:nvSpPr>
         <p:spPr>
           <a:xfrm>
-            <a:off x="9418320" y="4736592"/>
-            <a:ext cx="2103120" cy="411480"/>
+            <a:off x="9875520" y="4736592"/>
+            <a:ext cx="1920240" cy="411480"/>
           </a:xfrm>
           <a:prstGeom prst="rect">
             <a:avLst/>
@@ -12261,14 +12261,14 @@
           <a:lstStyle/>
           <a:p>
             <a:pPr algn="ctr">
-              <a:defRPr sz="1200" b="0">
+              <a:defRPr sz="1200" b="1">
                 <a:solidFill>
                   <a:srgbClr val="00C9A7"/>
                 </a:solidFill>
               </a:defRPr>
             </a:pPr>
             <a:r>
-              <a:t>p=0.76  Not significant</a:t>
+              <a:t>At human level</a:t>
             </a:r>
           </a:p>
         </p:txBody>
@@ -12281,8 +12281,8 @@
         </p:nvSpPr>
         <p:spPr>
           <a:xfrm>
-            <a:off x="457200" y="5303520"/>
-            <a:ext cx="11247120" cy="548640"/>
+            <a:off x="274320" y="5303520"/>
+            <a:ext cx="11612880" cy="548640"/>
           </a:xfrm>
           <a:prstGeom prst="roundRect">
             <a:avLst/>
@@ -12325,8 +12325,8 @@
         </p:nvSpPr>
         <p:spPr>
           <a:xfrm>
-            <a:off x="640080" y="5376672"/>
-            <a:ext cx="2011680" cy="411480"/>
+            <a:off x="457200" y="5376672"/>
+            <a:ext cx="1828800" cy="411480"/>
           </a:xfrm>
           <a:prstGeom prst="rect">
             <a:avLst/>
@@ -12338,7 +12338,7 @@
           <a:lstStyle/>
           <a:p>
             <a:pPr algn="l">
-              <a:defRPr sz="1500" b="1">
+              <a:defRPr sz="1400" b="1">
                 <a:solidFill>
                   <a:srgbClr val="0096D6"/>
                 </a:solidFill>
@@ -12358,8 +12358,8 @@
         </p:nvSpPr>
         <p:spPr>
           <a:xfrm>
-            <a:off x="2743200" y="5376672"/>
-            <a:ext cx="1097280" cy="411480"/>
+            <a:off x="2377440" y="5376672"/>
+            <a:ext cx="1188720" cy="411480"/>
           </a:xfrm>
           <a:prstGeom prst="rect">
             <a:avLst/>
@@ -12371,14 +12371,14 @@
           <a:lstStyle/>
           <a:p>
             <a:pPr algn="ctr">
-              <a:defRPr sz="1400" b="1">
-                <a:solidFill>
-                  <a:srgbClr val="2D2D3F"/>
-                </a:solidFill>
-              </a:defRPr>
-            </a:pPr>
-            <a:r>
-              <a:t>0.566</a:t>
+              <a:defRPr sz="1300" b="1">
+                <a:solidFill>
+                  <a:srgbClr val="00C9A7"/>
+                </a:solidFill>
+              </a:defRPr>
+            </a:pPr>
+            <a:r>
+              <a:t>0.566 (58%)</a:t>
             </a:r>
           </a:p>
         </p:txBody>
@@ -12391,8 +12391,8 @@
         </p:nvSpPr>
         <p:spPr>
           <a:xfrm>
-            <a:off x="3931920" y="5376672"/>
-            <a:ext cx="1097280" cy="411480"/>
+            <a:off x="3657600" y="5376672"/>
+            <a:ext cx="1188720" cy="411480"/>
           </a:xfrm>
           <a:prstGeom prst="rect">
             <a:avLst/>
@@ -12404,14 +12404,14 @@
           <a:lstStyle/>
           <a:p>
             <a:pPr algn="ctr">
-              <a:defRPr sz="1400" b="0">
-                <a:solidFill>
-                  <a:srgbClr val="A0A0A0"/>
-                </a:solidFill>
-              </a:defRPr>
-            </a:pPr>
-            <a:r>
-              <a:t>58.3%</a:t>
+              <a:defRPr sz="1300" b="1">
+                <a:solidFill>
+                  <a:srgbClr val="00C9A7"/>
+                </a:solidFill>
+              </a:defRPr>
+            </a:pPr>
+            <a:r>
+              <a:t>0.549 (56%)</a:t>
             </a:r>
           </a:p>
         </p:txBody>
@@ -12424,8 +12424,8 @@
         </p:nvSpPr>
         <p:spPr>
           <a:xfrm>
-            <a:off x="5212080" y="5376672"/>
-            <a:ext cx="1097280" cy="411480"/>
+            <a:off x="5029200" y="5376672"/>
+            <a:ext cx="1188720" cy="411480"/>
           </a:xfrm>
           <a:prstGeom prst="rect">
             <a:avLst/>
@@ -12437,14 +12437,14 @@
           <a:lstStyle/>
           <a:p>
             <a:pPr algn="ctr">
-              <a:defRPr sz="1400" b="1">
-                <a:solidFill>
-                  <a:srgbClr val="2D2D3F"/>
-                </a:solidFill>
-              </a:defRPr>
-            </a:pPr>
-            <a:r>
-              <a:t>0.518</a:t>
+              <a:defRPr sz="1300" b="1">
+                <a:solidFill>
+                  <a:srgbClr val="A0A0A0"/>
+                </a:solidFill>
+              </a:defRPr>
+            </a:pPr>
+            <a:r>
+              <a:t>0.518 (52%)</a:t>
             </a:r>
           </a:p>
         </p:txBody>
@@ -12458,7 +12458,7 @@
         <p:spPr>
           <a:xfrm>
             <a:off x="6400800" y="5376672"/>
-            <a:ext cx="1097280" cy="411480"/>
+            <a:ext cx="1645920" cy="411480"/>
           </a:xfrm>
           <a:prstGeom prst="rect">
             <a:avLst/>
@@ -12470,14 +12470,14 @@
           <a:lstStyle/>
           <a:p>
             <a:pPr algn="ctr">
-              <a:defRPr sz="1400" b="0">
+              <a:defRPr sz="1200" b="0">
                 <a:solidFill>
                   <a:srgbClr val="A0A0A0"/>
                 </a:solidFill>
               </a:defRPr>
             </a:pPr>
             <a:r>
-              <a:t>52.0%</a:t>
+              <a:t>p=0.41 n.s.</a:t>
             </a:r>
           </a:p>
         </p:txBody>
@@ -12490,7 +12490,7 @@
         </p:nvSpPr>
         <p:spPr>
           <a:xfrm>
-            <a:off x="7589520" y="5376672"/>
+            <a:off x="8138160" y="5376672"/>
             <a:ext cx="1645920" cy="411480"/>
           </a:xfrm>
           <a:prstGeom prst="rect">
@@ -12503,14 +12503,14 @@
           <a:lstStyle/>
           <a:p>
             <a:pPr algn="ctr">
-              <a:defRPr sz="1300" b="1">
-                <a:solidFill>
-                  <a:srgbClr val="00C9A7"/>
-                </a:solidFill>
-              </a:defRPr>
-            </a:pPr>
-            <a:r>
-              <a:t>Above human</a:t>
+              <a:defRPr sz="1200" b="0">
+                <a:solidFill>
+                  <a:srgbClr val="A0A0A0"/>
+                </a:solidFill>
+              </a:defRPr>
+            </a:pPr>
+            <a:r>
+              <a:t>p=0.60 n.s.</a:t>
             </a:r>
           </a:p>
         </p:txBody>
@@ -12523,8 +12523,8 @@
         </p:nvSpPr>
         <p:spPr>
           <a:xfrm>
-            <a:off x="9418320" y="5376672"/>
-            <a:ext cx="2103120" cy="411480"/>
+            <a:off x="9875520" y="5376672"/>
+            <a:ext cx="1920240" cy="411480"/>
           </a:xfrm>
           <a:prstGeom prst="rect">
             <a:avLst/>
@@ -12536,14 +12536,14 @@
           <a:lstStyle/>
           <a:p>
             <a:pPr algn="ctr">
-              <a:defRPr sz="1200" b="0">
+              <a:defRPr sz="1200" b="1">
                 <a:solidFill>
                   <a:srgbClr val="00C9A7"/>
                 </a:solidFill>
               </a:defRPr>
             </a:pPr>
             <a:r>
-              <a:t>p=0.41  Not significant</a:t>
+              <a:t>At human level</a:t>
             </a:r>
           </a:p>
         </p:txBody>
@@ -12556,8 +12556,8 @@
         </p:nvSpPr>
         <p:spPr>
           <a:xfrm>
-            <a:off x="457200" y="6035040"/>
-            <a:ext cx="11247120" cy="640080"/>
+            <a:off x="274320" y="6035040"/>
+            <a:ext cx="11612880" cy="640080"/>
           </a:xfrm>
           <a:prstGeom prst="rect">
             <a:avLst/>
@@ -12576,7 +12576,7 @@
               </a:defRPr>
             </a:pPr>
             <a:r>
-              <a:t>Statistical test: Two-tailed z-test on AC₁ difference (SE derived from 95% CI). α = 0.05.</a:t>
+              <a:t>Two-tailed z-test on AC₁ difference (α = 0.05). n.s. = not significant. Green = agent ≥ human, Red = agent &lt; human.</a:t>
             </a:r>
           </a:p>
           <a:p>
@@ -12591,7 +12591,22 @@
               </a:defRPr>
             </a:pPr>
             <a:r>
-              <a:t>No field shows a statistically significant difference between agent and human agreement — the agent performs at human-level across all 6 fields.</a:t>
+              <a:t>No field shows a statistically significant difference — the agent performs at human-level across all 6 fields.</a:t>
+            </a:r>
+          </a:p>
+          <a:p>
+            <a:pPr>
+              <a:spcBef>
+                <a:spcPts val="400"/>
+              </a:spcBef>
+              <a:defRPr sz="1200" b="0">
+                <a:solidFill>
+                  <a:srgbClr val="A0A0A0"/>
+                </a:solidFill>
+              </a:defRPr>
+            </a:pPr>
+            <a:r>
+              <a:t>If significant AND better: agent outperforms human annotators. If significant AND worse: improvement needed.</a:t>
             </a:r>
           </a:p>
         </p:txBody>

--- a/amp_llm_v3/standalone modules/agent_annotate/docs/Agent_Annotate_Architecture.pptx
+++ b/amp_llm_v3/standalone modules/agent_annotate/docs/Agent_Annotate_Architecture.pptx
@@ -3441,7 +3441,7 @@
               </a:defRPr>
             </a:pPr>
             <a:r>
-              <a:t>gemma2:9b — Verifier (conservative)</a:t>
+              <a:t>gemma3:12b — Verifier (conservative) + v42 atomic assessor</a:t>
             </a:r>
           </a:p>
           <a:p>
@@ -3876,7 +3876,7 @@
               </a:defRPr>
             </a:pPr>
             <a:r>
-              <a:t>Structured evidence dossier architecture</a:t>
+              <a:t>v42 atomic outcome: Tier 0–3 pipeline</a:t>
             </a:r>
           </a:p>
           <a:p>
@@ -3891,7 +3891,7 @@
               </a:defRPr>
             </a:pPr>
             <a:r>
-              <a:t>Publication quality classification (v41)</a:t>
+              <a:t>Per-publication atomic Y/N/UNCLEAR assessment</a:t>
             </a:r>
           </a:p>
           <a:p>
@@ -3906,7 +3906,7 @@
               </a:defRPr>
             </a:pPr>
             <a:r>
-              <a:t>Efficacy vs safety keyword separation</a:t>
+              <a:t>Deterministic R1–R8 aggregator — no LLM final decision</a:t>
             </a:r>
           </a:p>
           <a:p>
@@ -3921,7 +3921,7 @@
               </a:defRPr>
             </a:pPr>
             <a:r>
-              <a:t>Full JSON audit trail per trial</a:t>
+              <a:t>Full JSON audit trail per trial + rule trace</a:t>
             </a:r>
           </a:p>
         </p:txBody>
@@ -9027,7 +9027,7 @@
               </a:defRPr>
             </a:pPr>
             <a:r>
-              <a:t>How it works (4-tier dossier architecture):</a:t>
+              <a:t>v42 Atomic Evidence Decomposition (4 tiers, no single-LLM verdict):</a:t>
             </a:r>
           </a:p>
           <a:p>
@@ -9042,7 +9042,7 @@
               </a:defRPr>
             </a:pPr>
             <a:r>
-              <a:t>Tier 1: Deterministic status mapping (Recruiting, Withdrawn)</a:t>
+              <a:t>Tier 0: Deterministic pre-label (Recruiting, Withdrawn, p&lt;0.05 → Positive)</a:t>
             </a:r>
           </a:p>
           <a:p>
@@ -9057,7 +9057,7 @@
               </a:defRPr>
             </a:pPr>
             <a:r>
-              <a:t>Tier 2: Structured evidence dossier (no LLM yet)</a:t>
+              <a:t>Tier 1a: Structural trial-specificity classifier (no keywords)</a:t>
             </a:r>
           </a:p>
           <a:p>
@@ -9072,7 +9072,22 @@
               </a:defRPr>
             </a:pPr>
             <a:r>
-              <a:t>Extracts: status, results, endpoints, p-values, publications</a:t>
+              <a:t>3 Y/N checks: NCT-in-body, PMID-in-CT.gov-refs, title-design+drug</a:t>
+            </a:r>
+          </a:p>
+          <a:p>
+            <a:pPr>
+              <a:spcBef>
+                <a:spcPts val="400"/>
+              </a:spcBef>
+              <a:defRPr sz="1300" b="0">
+                <a:solidFill>
+                  <a:srgbClr val="2D2D3F"/>
+                </a:solidFill>
+              </a:defRPr>
+            </a:pPr>
+            <a:r>
+              <a:t>Tier 1b: Per-publication LLM (gemma3:12b, one focused call)</a:t>
             </a:r>
           </a:p>
           <a:p>
@@ -9087,7 +9102,37 @@
               </a:defRPr>
             </a:pPr>
             <a:r>
-              <a:t>Classifies publications as trial-specific vs reviews</a:t>
+              <a:t>5 atomic Y/N/UNCLEAR questions + forced evidence_quote</a:t>
+            </a:r>
+          </a:p>
+          <a:p>
+            <a:pPr>
+              <a:spcBef>
+                <a:spcPts val="400"/>
+              </a:spcBef>
+              <a:defRPr sz="1300" b="0">
+                <a:solidFill>
+                  <a:srgbClr val="2D2D3F"/>
+                </a:solidFill>
+              </a:defRPr>
+            </a:pPr>
+            <a:r>
+              <a:t>Tier 2: Registry signal extractor (status, p-values, ChEMBL phase)</a:t>
+            </a:r>
+          </a:p>
+          <a:p>
+            <a:pPr>
+              <a:spcBef>
+                <a:spcPts val="400"/>
+              </a:spcBef>
+              <a:defRPr sz="1300" b="0">
+                <a:solidFill>
+                  <a:srgbClr val="2D2D3F"/>
+                </a:solidFill>
+              </a:defRPr>
+            </a:pPr>
+            <a:r>
+              <a:t>Tier 3: Deterministic aggregator (R1–R8 ordered rules, no LLM)</a:t>
             </a:r>
           </a:p>
           <a:p>
@@ -9102,7 +9147,7 @@
               </a:defRPr>
             </a:pPr>
             <a:r>
-              <a:t>Separates efficacy vs safety-only signals</a:t>
+              <a:t>Every verdict carries a named rule + atomic inputs</a:t>
             </a:r>
           </a:p>
           <a:p>
@@ -9110,14 +9155,14 @@
               <a:spcBef>
                 <a:spcPts val="400"/>
               </a:spcBef>
-              <a:defRPr sz="1300" b="0">
-                <a:solidFill>
-                  <a:srgbClr val="2D2D3F"/>
-                </a:solidFill>
-              </a:defRPr>
-            </a:pPr>
-            <a:r>
-              <a:t>Tier 3: Deterministic rules (p&lt;0.05 → Positive, futility → Failed)</a:t>
+              <a:defRPr sz="1300" b="1">
+                <a:solidFill>
+                  <a:srgbClr val="FF5C5C"/>
+                </a:solidFill>
+              </a:defRPr>
+            </a:pPr>
+            <a:r>
+              <a:t>Legacy v41b dossier: 60.5% (vs 64.3% human agreement)</a:t>
             </a:r>
           </a:p>
           <a:p>
@@ -9125,56 +9170,14 @@
               <a:spcBef>
                 <a:spcPts val="400"/>
               </a:spcBef>
-              <a:defRPr sz="1300" b="0">
-                <a:solidFill>
-                  <a:srgbClr val="2D2D3F"/>
-                </a:solidFill>
-              </a:defRPr>
-            </a:pPr>
-            <a:r>
-              <a:t>Tier 4: LLM with structured dossier (hardest cases only)</a:t>
-            </a:r>
-          </a:p>
-          <a:p>
-            <a:pPr>
-              <a:spcBef>
-                <a:spcPts val="400"/>
-              </a:spcBef>
-              <a:defRPr sz="600" b="0">
-                <a:solidFill>
-                  <a:srgbClr val="FFFFFF"/>
-                </a:solidFill>
-              </a:defRPr>
-            </a:pPr>
-          </a:p>
-          <a:p>
-            <a:pPr>
-              <a:spcBef>
-                <a:spcPts val="400"/>
-              </a:spcBef>
-              <a:defRPr sz="1400" b="1">
+              <a:defRPr sz="1200" b="0">
                 <a:solidFill>
                   <a:srgbClr val="FF5C5C"/>
                 </a:solidFill>
               </a:defRPr>
             </a:pPr>
             <a:r>
-              <a:t>Accuracy: 60.5% (vs 64.3% human agreement)</a:t>
-            </a:r>
-          </a:p>
-          <a:p>
-            <a:pPr>
-              <a:spcBef>
-                <a:spcPts val="400"/>
-              </a:spcBef>
-              <a:defRPr sz="1200" b="0">
-                <a:solidFill>
-                  <a:srgbClr val="FF5C5C"/>
-                </a:solidFill>
-              </a:defRPr>
-            </a:pPr>
-            <a:r>
-              <a:t>Hardest field — even humans disagree 36% of the time</a:t>
+              <a:t>v42 atomic shadow-mode validation pending (94-NCT run)</a:t>
             </a:r>
           </a:p>
         </p:txBody>
@@ -10146,7 +10149,7 @@
               </a:defRPr>
             </a:pPr>
             <a:r>
-              <a:t>gemma2:9b</a:t>
+              <a:t>gemma3:12b</a:t>
             </a:r>
           </a:p>
           <a:p>
@@ -10165,7 +10168,7 @@
             </a:r>
             <a:br/>
             <a:r>
-              <a:t>of evidence</a:t>
+              <a:t>of evidence (Gemma 3)</a:t>
             </a:r>
           </a:p>
         </p:txBody>

--- a/amp_llm_v3/standalone modules/agent_annotate/docs/Agent_Annotate_Architecture.pptx
+++ b/amp_llm_v3/standalone modules/agent_annotate/docs/Agent_Annotate_Architecture.pptx
@@ -3456,7 +3456,7 @@
               </a:defRPr>
             </a:pPr>
             <a:r>
-              <a:t>qwen2.5:7b — Verifier (evidence-strict)</a:t>
+              <a:t>qwen3:8b — Verifier (evidence-strict)</a:t>
             </a:r>
           </a:p>
           <a:p>
@@ -10241,7 +10241,7 @@
               </a:defRPr>
             </a:pPr>
             <a:r>
-              <a:t>qwen2.5:7b</a:t>
+              <a:t>qwen3:8b</a:t>
             </a:r>
           </a:p>
           <a:p>
@@ -10260,7 +10260,7 @@
             </a:r>
             <a:br/>
             <a:r>
-              <a:t>facts from sources</a:t>
+              <a:t>facts from sources (Qwen 3)</a:t>
             </a:r>
           </a:p>
         </p:txBody>
